--- a/chapter17/ASE_17_People_Performance.pptx
+++ b/chapter17/ASE_17_People_Performance.pptx
@@ -5,7 +5,7 @@
     <p:sldMasterId id="2147483792" r:id="rId4"/>
   </p:sldMasterIdLst>
   <p:notesMasterIdLst>
-    <p:notesMasterId r:id="rId43"/>
+    <p:notesMasterId r:id="rId44"/>
   </p:notesMasterIdLst>
   <p:sldIdLst>
     <p:sldId id="256" r:id="rId5"/>
@@ -39,13 +39,14 @@
     <p:sldId id="260" r:id="rId33"/>
     <p:sldId id="261" r:id="rId34"/>
     <p:sldId id="262" r:id="rId35"/>
-    <p:sldId id="263" r:id="rId36"/>
-    <p:sldId id="264" r:id="rId37"/>
-    <p:sldId id="266" r:id="rId38"/>
-    <p:sldId id="414" r:id="rId39"/>
-    <p:sldId id="267" r:id="rId40"/>
-    <p:sldId id="268" r:id="rId41"/>
-    <p:sldId id="374" r:id="rId42"/>
+    <p:sldId id="415" r:id="rId36"/>
+    <p:sldId id="263" r:id="rId37"/>
+    <p:sldId id="264" r:id="rId38"/>
+    <p:sldId id="266" r:id="rId39"/>
+    <p:sldId id="414" r:id="rId40"/>
+    <p:sldId id="267" r:id="rId41"/>
+    <p:sldId id="268" r:id="rId42"/>
+    <p:sldId id="374" r:id="rId43"/>
   </p:sldIdLst>
   <p:sldSz cx="12192000" cy="6858000"/>
   <p:notesSz cx="6858000" cy="9144000"/>
@@ -166,7 +167,7 @@
 <file path=ppt/revisionInfo.xml><?xml version="1.0" encoding="utf-8"?>
 <p1510:revInfo xmlns:a="http://schemas.openxmlformats.org/drawingml/2006/main" xmlns:r="http://schemas.openxmlformats.org/officeDocument/2006/relationships" xmlns:p1510="http://schemas.microsoft.com/office/powerpoint/2015/10/main">
   <p1510:revLst>
-    <p1510:client id="{EA1161A4-2E24-49DF-9EF1-91EDFE592024}" v="3" dt="2019-09-04T08:00:59.479"/>
+    <p1510:client id="{B5B6ADE1-DDD4-4951-A3A9-0FEB8418E745}" v="3" dt="2026-05-06T13:19:09.208"/>
   </p1510:revLst>
 </p1510:revInfo>
 </file>
@@ -174,958 +175,222 @@
 <file path=ppt/changesInfos/changesInfo1.xml><?xml version="1.0" encoding="utf-8"?>
 <pc:chgInfo xmlns:a="http://schemas.openxmlformats.org/drawingml/2006/main" xmlns:r="http://schemas.openxmlformats.org/officeDocument/2006/relationships" xmlns:ac="http://schemas.microsoft.com/office/drawing/2013/main/command" xmlns:pc="http://schemas.microsoft.com/office/powerpoint/2013/main/command">
   <pc:docChgLst>
-    <pc:chgData name="Xin Zou" userId="260b9726081dae15" providerId="LiveId" clId="{EA1161A4-2E24-49DF-9EF1-91EDFE592024}"/>
-    <pc:docChg chg="modSld">
-      <pc:chgData name="Xin Zou" userId="260b9726081dae15" providerId="LiveId" clId="{EA1161A4-2E24-49DF-9EF1-91EDFE592024}" dt="2019-09-04T08:00:59.479" v="20"/>
+    <pc:chgData name="Xin Zou" userId="260b9726081dae15" providerId="LiveId" clId="{9D297BCE-98D2-4025-9670-F2ABFDE5436C}"/>
+    <pc:docChg chg="undo custSel addSld delSld modSld">
+      <pc:chgData name="Xin Zou" userId="260b9726081dae15" providerId="LiveId" clId="{9D297BCE-98D2-4025-9670-F2ABFDE5436C}" dt="2026-05-06T13:21:31.718" v="54" actId="1076"/>
       <pc:docMkLst>
         <pc:docMk/>
       </pc:docMkLst>
-      <pc:sldChg chg="modSp">
-        <pc:chgData name="Xin Zou" userId="260b9726081dae15" providerId="LiveId" clId="{EA1161A4-2E24-49DF-9EF1-91EDFE592024}" dt="2019-09-04T08:00:07.941" v="1" actId="20577"/>
+      <pc:sldChg chg="addSp delSp modSp add mod setBg delDesignElem">
+        <pc:chgData name="Xin Zou" userId="260b9726081dae15" providerId="LiveId" clId="{9D297BCE-98D2-4025-9670-F2ABFDE5436C}" dt="2026-05-06T13:21:31.718" v="54" actId="1076"/>
         <pc:sldMkLst>
           <pc:docMk/>
-          <pc:sldMk cId="0" sldId="256"/>
+          <pc:sldMk cId="2423002010" sldId="415"/>
         </pc:sldMkLst>
         <pc:spChg chg="mod">
-          <ac:chgData name="Xin Zou" userId="260b9726081dae15" providerId="LiveId" clId="{EA1161A4-2E24-49DF-9EF1-91EDFE592024}" dt="2019-09-04T08:00:07.941" v="1" actId="20577"/>
+          <ac:chgData name="Xin Zou" userId="260b9726081dae15" providerId="LiveId" clId="{9D297BCE-98D2-4025-9670-F2ABFDE5436C}" dt="2026-05-06T13:21:31.718" v="54" actId="1076"/>
           <ac:spMkLst>
             <pc:docMk/>
-            <pc:sldMk cId="0" sldId="256"/>
-            <ac:spMk id="3" creationId="{00000000-0000-0000-0000-000000000000}"/>
+            <pc:sldMk cId="2423002010" sldId="415"/>
+            <ac:spMk id="2" creationId="{1BCB5A19-B3AF-1A55-223F-75EC51F317B0}"/>
+          </ac:spMkLst>
+        </pc:spChg>
+        <pc:spChg chg="mod ord">
+          <ac:chgData name="Xin Zou" userId="260b9726081dae15" providerId="LiveId" clId="{9D297BCE-98D2-4025-9670-F2ABFDE5436C}" dt="2026-05-06T13:21:31.718" v="54" actId="1076"/>
+          <ac:spMkLst>
+            <pc:docMk/>
+            <pc:sldMk cId="2423002010" sldId="415"/>
+            <ac:spMk id="3" creationId="{7A831B99-4A25-0C5C-4637-898826B64E22}"/>
+          </ac:spMkLst>
+        </pc:spChg>
+        <pc:spChg chg="add">
+          <ac:chgData name="Xin Zou" userId="260b9726081dae15" providerId="LiveId" clId="{9D297BCE-98D2-4025-9670-F2ABFDE5436C}" dt="2026-05-06T13:19:50.661" v="8" actId="26606"/>
+          <ac:spMkLst>
+            <pc:docMk/>
+            <pc:sldMk cId="2423002010" sldId="415"/>
+            <ac:spMk id="8" creationId="{4A079BE1-ED93-4445-AD4A-0D67109702E7}"/>
+          </ac:spMkLst>
+        </pc:spChg>
+        <pc:spChg chg="del">
+          <ac:chgData name="Xin Zou" userId="260b9726081dae15" providerId="LiveId" clId="{9D297BCE-98D2-4025-9670-F2ABFDE5436C}" dt="2026-05-06T13:19:09.207" v="5"/>
+          <ac:spMkLst>
+            <pc:docMk/>
+            <pc:sldMk cId="2423002010" sldId="415"/>
+            <ac:spMk id="9" creationId="{72AAF801-C771-C97A-BFAD-B52E74CF88D8}"/>
+          </ac:spMkLst>
+        </pc:spChg>
+        <pc:spChg chg="del">
+          <ac:chgData name="Xin Zou" userId="260b9726081dae15" providerId="LiveId" clId="{9D297BCE-98D2-4025-9670-F2ABFDE5436C}" dt="2026-05-06T13:19:09.207" v="5"/>
+          <ac:spMkLst>
+            <pc:docMk/>
+            <pc:sldMk cId="2423002010" sldId="415"/>
+            <ac:spMk id="11" creationId="{976EB60C-D4AF-5043-B011-3459951DFE43}"/>
+          </ac:spMkLst>
+        </pc:spChg>
+        <pc:spChg chg="add">
+          <ac:chgData name="Xin Zou" userId="260b9726081dae15" providerId="LiveId" clId="{9D297BCE-98D2-4025-9670-F2ABFDE5436C}" dt="2026-05-06T13:19:50.661" v="8" actId="26606"/>
+          <ac:spMkLst>
+            <pc:docMk/>
+            <pc:sldMk cId="2423002010" sldId="415"/>
+            <ac:spMk id="13" creationId="{3F6C79BF-A4E0-4CC8-952B-C736485CAFF4}"/>
+          </ac:spMkLst>
+        </pc:spChg>
+        <pc:picChg chg="del">
+          <ac:chgData name="Xin Zou" userId="260b9726081dae15" providerId="LiveId" clId="{9D297BCE-98D2-4025-9670-F2ABFDE5436C}" dt="2026-05-06T13:19:13.700" v="6" actId="478"/>
+          <ac:picMkLst>
+            <pc:docMk/>
+            <pc:sldMk cId="2423002010" sldId="415"/>
+            <ac:picMk id="4" creationId="{ECC677AF-4564-818B-3E5D-B766968A9F1B}"/>
+          </ac:picMkLst>
+        </pc:picChg>
+        <pc:picChg chg="add mod">
+          <ac:chgData name="Xin Zou" userId="260b9726081dae15" providerId="LiveId" clId="{9D297BCE-98D2-4025-9670-F2ABFDE5436C}" dt="2026-05-06T13:19:50.661" v="8" actId="26606"/>
+          <ac:picMkLst>
+            <pc:docMk/>
+            <pc:sldMk cId="2423002010" sldId="415"/>
+            <ac:picMk id="6" creationId="{0CC04E94-6A1A-51C3-A6BF-3AF6CB38147F}"/>
+          </ac:picMkLst>
+        </pc:picChg>
+      </pc:sldChg>
+      <pc:sldChg chg="add del">
+        <pc:chgData name="Xin Zou" userId="260b9726081dae15" providerId="LiveId" clId="{9D297BCE-98D2-4025-9670-F2ABFDE5436C}" dt="2026-05-06T13:19:03.532" v="3"/>
+        <pc:sldMkLst>
+          <pc:docMk/>
+          <pc:sldMk cId="4184760010" sldId="480"/>
+        </pc:sldMkLst>
+      </pc:sldChg>
+      <pc:sldChg chg="addSp delSp add del setBg delDesignElem">
+        <pc:chgData name="Xin Zou" userId="260b9726081dae15" providerId="LiveId" clId="{9D297BCE-98D2-4025-9670-F2ABFDE5436C}" dt="2026-05-06T13:19:03.532" v="3"/>
+        <pc:sldMkLst>
+          <pc:docMk/>
+          <pc:sldMk cId="135712492" sldId="10087"/>
+        </pc:sldMkLst>
+        <pc:spChg chg="add del">
+          <ac:chgData name="Xin Zou" userId="260b9726081dae15" providerId="LiveId" clId="{9D297BCE-98D2-4025-9670-F2ABFDE5436C}" dt="2026-05-06T13:19:03.532" v="3"/>
+          <ac:spMkLst>
+            <pc:docMk/>
+            <pc:sldMk cId="135712492" sldId="10087"/>
+            <ac:spMk id="1031" creationId="{593A179E-9739-4A6A-BFC0-9792A47FF15B}"/>
+          </ac:spMkLst>
+        </pc:spChg>
+        <pc:spChg chg="add del">
+          <ac:chgData name="Xin Zou" userId="260b9726081dae15" providerId="LiveId" clId="{9D297BCE-98D2-4025-9670-F2ABFDE5436C}" dt="2026-05-06T13:19:03.532" v="3"/>
+          <ac:spMkLst>
+            <pc:docMk/>
+            <pc:sldMk cId="135712492" sldId="10087"/>
+            <ac:spMk id="1033" creationId="{64B5D730-0F03-4E18-B5E2-A3AFEE4CB1D0}"/>
+          </ac:spMkLst>
+        </pc:spChg>
+        <pc:spChg chg="add del">
+          <ac:chgData name="Xin Zou" userId="260b9726081dae15" providerId="LiveId" clId="{9D297BCE-98D2-4025-9670-F2ABFDE5436C}" dt="2026-05-06T13:19:03.532" v="3"/>
+          <ac:spMkLst>
+            <pc:docMk/>
+            <pc:sldMk cId="135712492" sldId="10087"/>
+            <ac:spMk id="1035" creationId="{99BCAAE7-0794-4AF7-8A50-AB589BEC99E0}"/>
+          </ac:spMkLst>
+        </pc:spChg>
+        <pc:spChg chg="add del">
+          <ac:chgData name="Xin Zou" userId="260b9726081dae15" providerId="LiveId" clId="{9D297BCE-98D2-4025-9670-F2ABFDE5436C}" dt="2026-05-06T13:19:03.532" v="3"/>
+          <ac:spMkLst>
+            <pc:docMk/>
+            <pc:sldMk cId="135712492" sldId="10087"/>
+            <ac:spMk id="1037" creationId="{89D3435D-9A48-4791-925E-91DC45F7930C}"/>
+          </ac:spMkLst>
+        </pc:spChg>
+        <pc:spChg chg="add del">
+          <ac:chgData name="Xin Zou" userId="260b9726081dae15" providerId="LiveId" clId="{9D297BCE-98D2-4025-9670-F2ABFDE5436C}" dt="2026-05-06T13:19:03.532" v="3"/>
+          <ac:spMkLst>
+            <pc:docMk/>
+            <pc:sldMk cId="135712492" sldId="10087"/>
+            <ac:spMk id="1039" creationId="{D1D20898-4E05-4678-AF40-ADD3390C0669}"/>
           </ac:spMkLst>
         </pc:spChg>
       </pc:sldChg>
-      <pc:sldChg chg="modSp">
-        <pc:chgData name="Xin Zou" userId="260b9726081dae15" providerId="LiveId" clId="{EA1161A4-2E24-49DF-9EF1-91EDFE592024}" dt="2019-09-04T08:00:59.479" v="20"/>
+      <pc:sldChg chg="add del">
+        <pc:chgData name="Xin Zou" userId="260b9726081dae15" providerId="LiveId" clId="{9D297BCE-98D2-4025-9670-F2ABFDE5436C}" dt="2026-05-06T13:19:03.532" v="3"/>
         <pc:sldMkLst>
           <pc:docMk/>
-          <pc:sldMk cId="3587831306" sldId="267"/>
+          <pc:sldMk cId="251502843" sldId="10088"/>
         </pc:sldMkLst>
-        <pc:spChg chg="mod">
-          <ac:chgData name="Xin Zou" userId="260b9726081dae15" providerId="LiveId" clId="{EA1161A4-2E24-49DF-9EF1-91EDFE592024}" dt="2019-09-04T08:00:59.479" v="20"/>
+      </pc:sldChg>
+      <pc:sldChg chg="add del">
+        <pc:chgData name="Xin Zou" userId="260b9726081dae15" providerId="LiveId" clId="{9D297BCE-98D2-4025-9670-F2ABFDE5436C}" dt="2026-05-06T13:19:03.532" v="3"/>
+        <pc:sldMkLst>
+          <pc:docMk/>
+          <pc:sldMk cId="1333485985" sldId="10090"/>
+        </pc:sldMkLst>
+      </pc:sldChg>
+      <pc:sldChg chg="add del">
+        <pc:chgData name="Xin Zou" userId="260b9726081dae15" providerId="LiveId" clId="{9D297BCE-98D2-4025-9670-F2ABFDE5436C}" dt="2026-05-06T13:19:03.532" v="3"/>
+        <pc:sldMkLst>
+          <pc:docMk/>
+          <pc:sldMk cId="2238410139" sldId="10092"/>
+        </pc:sldMkLst>
+      </pc:sldChg>
+      <pc:sldChg chg="add del">
+        <pc:chgData name="Xin Zou" userId="260b9726081dae15" providerId="LiveId" clId="{9D297BCE-98D2-4025-9670-F2ABFDE5436C}" dt="2026-05-06T13:19:03.532" v="3"/>
+        <pc:sldMkLst>
+          <pc:docMk/>
+          <pc:sldMk cId="3652109019" sldId="10093"/>
+        </pc:sldMkLst>
+      </pc:sldChg>
+      <pc:sldChg chg="add del">
+        <pc:chgData name="Xin Zou" userId="260b9726081dae15" providerId="LiveId" clId="{9D297BCE-98D2-4025-9670-F2ABFDE5436C}" dt="2026-05-06T13:19:03.532" v="3"/>
+        <pc:sldMkLst>
+          <pc:docMk/>
+          <pc:sldMk cId="3858371046" sldId="10096"/>
+        </pc:sldMkLst>
+      </pc:sldChg>
+      <pc:sldChg chg="add del">
+        <pc:chgData name="Xin Zou" userId="260b9726081dae15" providerId="LiveId" clId="{9D297BCE-98D2-4025-9670-F2ABFDE5436C}" dt="2026-05-06T13:19:03.532" v="3"/>
+        <pc:sldMkLst>
+          <pc:docMk/>
+          <pc:sldMk cId="3967604562" sldId="10097"/>
+        </pc:sldMkLst>
+      </pc:sldChg>
+      <pc:sldChg chg="add del">
+        <pc:chgData name="Xin Zou" userId="260b9726081dae15" providerId="LiveId" clId="{9D297BCE-98D2-4025-9670-F2ABFDE5436C}" dt="2026-05-06T13:19:03.532" v="3"/>
+        <pc:sldMkLst>
+          <pc:docMk/>
+          <pc:sldMk cId="2237320997" sldId="10098"/>
+        </pc:sldMkLst>
+      </pc:sldChg>
+      <pc:sldChg chg="add del">
+        <pc:chgData name="Xin Zou" userId="260b9726081dae15" providerId="LiveId" clId="{9D297BCE-98D2-4025-9670-F2ABFDE5436C}" dt="2026-05-06T13:19:03.532" v="3"/>
+        <pc:sldMkLst>
+          <pc:docMk/>
+          <pc:sldMk cId="141476521" sldId="10099"/>
+        </pc:sldMkLst>
+      </pc:sldChg>
+      <pc:sldChg chg="addSp delSp add del setBg delDesignElem">
+        <pc:chgData name="Xin Zou" userId="260b9726081dae15" providerId="LiveId" clId="{9D297BCE-98D2-4025-9670-F2ABFDE5436C}" dt="2026-05-06T13:19:03.532" v="3"/>
+        <pc:sldMkLst>
+          <pc:docMk/>
+          <pc:sldMk cId="1360776781" sldId="10100"/>
+        </pc:sldMkLst>
+        <pc:spChg chg="add del">
+          <ac:chgData name="Xin Zou" userId="260b9726081dae15" providerId="LiveId" clId="{9D297BCE-98D2-4025-9670-F2ABFDE5436C}" dt="2026-05-06T13:19:03.532" v="3"/>
           <ac:spMkLst>
             <pc:docMk/>
-            <pc:sldMk cId="3587831306" sldId="267"/>
-            <ac:spMk id="3" creationId="{00000000-0000-0000-0000-000000000000}"/>
+            <pc:sldMk cId="1360776781" sldId="10100"/>
+            <ac:spMk id="1028" creationId="{F7F9F02B-DB04-4B60-859E-78BED6F401B9}"/>
           </ac:spMkLst>
         </pc:spChg>
       </pc:sldChg>
-    </pc:docChg>
-  </pc:docChgLst>
-  <pc:docChgLst>
-    <pc:chgData name="Xin Zou" userId="260b9726081dae15" providerId="LiveId" clId="{38676C1A-CF62-4DBE-B095-D63BA33FC8BE}"/>
-    <pc:docChg chg="custSel mod addSld delSld modSld modMainMaster">
-      <pc:chgData name="Xin Zou" userId="260b9726081dae15" providerId="LiveId" clId="{38676C1A-CF62-4DBE-B095-D63BA33FC8BE}" dt="2018-10-08T05:52:23.823" v="435"/>
-      <pc:docMkLst>
-        <pc:docMk/>
-      </pc:docMkLst>
-      <pc:sldChg chg="modSp">
-        <pc:chgData name="Xin Zou" userId="260b9726081dae15" providerId="LiveId" clId="{38676C1A-CF62-4DBE-B095-D63BA33FC8BE}" dt="2018-10-08T05:52:23.823" v="435"/>
+      <pc:sldChg chg="add del">
+        <pc:chgData name="Xin Zou" userId="260b9726081dae15" providerId="LiveId" clId="{9D297BCE-98D2-4025-9670-F2ABFDE5436C}" dt="2026-05-06T13:19:03.532" v="3"/>
         <pc:sldMkLst>
           <pc:docMk/>
-          <pc:sldMk cId="0" sldId="256"/>
+          <pc:sldMk cId="3467653473" sldId="10117"/>
         </pc:sldMkLst>
-        <pc:spChg chg="mod">
-          <ac:chgData name="Xin Zou" userId="260b9726081dae15" providerId="LiveId" clId="{38676C1A-CF62-4DBE-B095-D63BA33FC8BE}" dt="2018-10-08T05:52:23.823" v="435"/>
-          <ac:spMkLst>
-            <pc:docMk/>
-            <pc:sldMk cId="0" sldId="256"/>
-            <ac:spMk id="3" creationId="{00000000-0000-0000-0000-000000000000}"/>
-          </ac:spMkLst>
-        </pc:spChg>
       </pc:sldChg>
-      <pc:sldChg chg="modSp modAnim">
-        <pc:chgData name="Xin Zou" userId="260b9726081dae15" providerId="LiveId" clId="{38676C1A-CF62-4DBE-B095-D63BA33FC8BE}" dt="2018-10-08T04:26:20.045" v="30" actId="20577"/>
+      <pc:sldChg chg="add del">
+        <pc:chgData name="Xin Zou" userId="260b9726081dae15" providerId="LiveId" clId="{9D297BCE-98D2-4025-9670-F2ABFDE5436C}" dt="2026-05-06T13:19:03.532" v="3"/>
         <pc:sldMkLst>
           <pc:docMk/>
-          <pc:sldMk cId="0" sldId="257"/>
-        </pc:sldMkLst>
-        <pc:spChg chg="mod">
-          <ac:chgData name="Xin Zou" userId="260b9726081dae15" providerId="LiveId" clId="{38676C1A-CF62-4DBE-B095-D63BA33FC8BE}" dt="2018-10-08T04:26:20.045" v="30" actId="20577"/>
-          <ac:spMkLst>
-            <pc:docMk/>
-            <pc:sldMk cId="0" sldId="257"/>
-            <ac:spMk id="3" creationId="{00000000-0000-0000-0000-000000000000}"/>
-          </ac:spMkLst>
-        </pc:spChg>
-      </pc:sldChg>
-      <pc:sldChg chg="modSp">
-        <pc:chgData name="Xin Zou" userId="260b9726081dae15" providerId="LiveId" clId="{38676C1A-CF62-4DBE-B095-D63BA33FC8BE}" dt="2018-10-08T04:25:15.617" v="0"/>
-        <pc:sldMkLst>
-          <pc:docMk/>
-          <pc:sldMk cId="1172930146" sldId="258"/>
-        </pc:sldMkLst>
-        <pc:spChg chg="mod">
-          <ac:chgData name="Xin Zou" userId="260b9726081dae15" providerId="LiveId" clId="{38676C1A-CF62-4DBE-B095-D63BA33FC8BE}" dt="2018-10-08T04:25:15.617" v="0"/>
-          <ac:spMkLst>
-            <pc:docMk/>
-            <pc:sldMk cId="1172930146" sldId="258"/>
-            <ac:spMk id="5" creationId="{00000000-0000-0000-0000-000000000000}"/>
-          </ac:spMkLst>
-        </pc:spChg>
-        <pc:picChg chg="mod">
-          <ac:chgData name="Xin Zou" userId="260b9726081dae15" providerId="LiveId" clId="{38676C1A-CF62-4DBE-B095-D63BA33FC8BE}" dt="2018-10-08T04:25:15.617" v="0"/>
-          <ac:picMkLst>
-            <pc:docMk/>
-            <pc:sldMk cId="1172930146" sldId="258"/>
-            <ac:picMk id="4" creationId="{00000000-0000-0000-0000-000000000000}"/>
-          </ac:picMkLst>
-        </pc:picChg>
-      </pc:sldChg>
-      <pc:sldChg chg="modSp">
-        <pc:chgData name="Xin Zou" userId="260b9726081dae15" providerId="LiveId" clId="{38676C1A-CF62-4DBE-B095-D63BA33FC8BE}" dt="2018-10-08T04:26:02.928" v="8" actId="27636"/>
-        <pc:sldMkLst>
-          <pc:docMk/>
-          <pc:sldMk cId="552225193" sldId="259"/>
-        </pc:sldMkLst>
-        <pc:spChg chg="mod">
-          <ac:chgData name="Xin Zou" userId="260b9726081dae15" providerId="LiveId" clId="{38676C1A-CF62-4DBE-B095-D63BA33FC8BE}" dt="2018-10-08T04:26:02.928" v="8" actId="27636"/>
-          <ac:spMkLst>
-            <pc:docMk/>
-            <pc:sldMk cId="552225193" sldId="259"/>
-            <ac:spMk id="3" creationId="{00000000-0000-0000-0000-000000000000}"/>
-          </ac:spMkLst>
-        </pc:spChg>
-      </pc:sldChg>
-      <pc:sldChg chg="modSp">
-        <pc:chgData name="Xin Zou" userId="260b9726081dae15" providerId="LiveId" clId="{38676C1A-CF62-4DBE-B095-D63BA33FC8BE}" dt="2018-10-08T04:34:24.884" v="205" actId="20577"/>
-        <pc:sldMkLst>
-          <pc:docMk/>
-          <pc:sldMk cId="2779454383" sldId="261"/>
-        </pc:sldMkLst>
-        <pc:spChg chg="mod">
-          <ac:chgData name="Xin Zou" userId="260b9726081dae15" providerId="LiveId" clId="{38676C1A-CF62-4DBE-B095-D63BA33FC8BE}" dt="2018-10-08T04:34:24.884" v="205" actId="20577"/>
-          <ac:spMkLst>
-            <pc:docMk/>
-            <pc:sldMk cId="2779454383" sldId="261"/>
-            <ac:spMk id="2" creationId="{00000000-0000-0000-0000-000000000000}"/>
-          </ac:spMkLst>
-        </pc:spChg>
-        <pc:spChg chg="mod">
-          <ac:chgData name="Xin Zou" userId="260b9726081dae15" providerId="LiveId" clId="{38676C1A-CF62-4DBE-B095-D63BA33FC8BE}" dt="2018-10-08T04:31:55.811" v="85" actId="15"/>
-          <ac:spMkLst>
-            <pc:docMk/>
-            <pc:sldMk cId="2779454383" sldId="261"/>
-            <ac:spMk id="3" creationId="{00000000-0000-0000-0000-000000000000}"/>
-          </ac:spMkLst>
-        </pc:spChg>
-      </pc:sldChg>
-      <pc:sldChg chg="addSp modSp mod setBg setClrOvrMap">
-        <pc:chgData name="Xin Zou" userId="260b9726081dae15" providerId="LiveId" clId="{38676C1A-CF62-4DBE-B095-D63BA33FC8BE}" dt="2018-10-08T05:15:55.352" v="209" actId="26606"/>
-        <pc:sldMkLst>
-          <pc:docMk/>
-          <pc:sldMk cId="2100864417" sldId="262"/>
-        </pc:sldMkLst>
-        <pc:spChg chg="mod">
-          <ac:chgData name="Xin Zou" userId="260b9726081dae15" providerId="LiveId" clId="{38676C1A-CF62-4DBE-B095-D63BA33FC8BE}" dt="2018-10-08T05:15:55.352" v="209" actId="26606"/>
-          <ac:spMkLst>
-            <pc:docMk/>
-            <pc:sldMk cId="2100864417" sldId="262"/>
-            <ac:spMk id="2" creationId="{00000000-0000-0000-0000-000000000000}"/>
-          </ac:spMkLst>
-        </pc:spChg>
-        <pc:spChg chg="mod">
-          <ac:chgData name="Xin Zou" userId="260b9726081dae15" providerId="LiveId" clId="{38676C1A-CF62-4DBE-B095-D63BA33FC8BE}" dt="2018-10-08T05:15:55.352" v="209" actId="26606"/>
-          <ac:spMkLst>
-            <pc:docMk/>
-            <pc:sldMk cId="2100864417" sldId="262"/>
-            <ac:spMk id="3" creationId="{00000000-0000-0000-0000-000000000000}"/>
-          </ac:spMkLst>
-        </pc:spChg>
-        <pc:spChg chg="add">
-          <ac:chgData name="Xin Zou" userId="260b9726081dae15" providerId="LiveId" clId="{38676C1A-CF62-4DBE-B095-D63BA33FC8BE}" dt="2018-10-08T05:15:55.352" v="209" actId="26606"/>
-          <ac:spMkLst>
-            <pc:docMk/>
-            <pc:sldMk cId="2100864417" sldId="262"/>
-            <ac:spMk id="9" creationId="{05325879-C4B2-475E-B853-DC8F21A63351}"/>
-          </ac:spMkLst>
-        </pc:spChg>
-        <pc:spChg chg="add">
-          <ac:chgData name="Xin Zou" userId="260b9726081dae15" providerId="LiveId" clId="{38676C1A-CF62-4DBE-B095-D63BA33FC8BE}" dt="2018-10-08T05:15:55.352" v="209" actId="26606"/>
-          <ac:spMkLst>
-            <pc:docMk/>
-            <pc:sldMk cId="2100864417" sldId="262"/>
-            <ac:spMk id="11" creationId="{012C085F-3B19-420D-902A-B55695F5036C}"/>
-          </ac:spMkLst>
-        </pc:spChg>
-        <pc:picChg chg="add mod">
-          <ac:chgData name="Xin Zou" userId="260b9726081dae15" providerId="LiveId" clId="{38676C1A-CF62-4DBE-B095-D63BA33FC8BE}" dt="2018-10-08T05:15:55.352" v="209" actId="26606"/>
-          <ac:picMkLst>
-            <pc:docMk/>
-            <pc:sldMk cId="2100864417" sldId="262"/>
-            <ac:picMk id="4" creationId="{C865262D-9945-4CC0-B8FB-C3D176AFD1C3}"/>
-          </ac:picMkLst>
-        </pc:picChg>
-      </pc:sldChg>
-      <pc:sldChg chg="addSp modSp mod setBg">
-        <pc:chgData name="Xin Zou" userId="260b9726081dae15" providerId="LiveId" clId="{38676C1A-CF62-4DBE-B095-D63BA33FC8BE}" dt="2018-10-08T05:16:34.375" v="212" actId="26606"/>
-        <pc:sldMkLst>
-          <pc:docMk/>
-          <pc:sldMk cId="3257530078" sldId="263"/>
-        </pc:sldMkLst>
-        <pc:spChg chg="mod">
-          <ac:chgData name="Xin Zou" userId="260b9726081dae15" providerId="LiveId" clId="{38676C1A-CF62-4DBE-B095-D63BA33FC8BE}" dt="2018-10-08T05:16:34.375" v="212" actId="26606"/>
-          <ac:spMkLst>
-            <pc:docMk/>
-            <pc:sldMk cId="3257530078" sldId="263"/>
-            <ac:spMk id="2" creationId="{00000000-0000-0000-0000-000000000000}"/>
-          </ac:spMkLst>
-        </pc:spChg>
-        <pc:spChg chg="mod">
-          <ac:chgData name="Xin Zou" userId="260b9726081dae15" providerId="LiveId" clId="{38676C1A-CF62-4DBE-B095-D63BA33FC8BE}" dt="2018-10-08T05:16:34.375" v="212" actId="26606"/>
-          <ac:spMkLst>
-            <pc:docMk/>
-            <pc:sldMk cId="3257530078" sldId="263"/>
-            <ac:spMk id="3" creationId="{00000000-0000-0000-0000-000000000000}"/>
-          </ac:spMkLst>
-        </pc:spChg>
-        <pc:spChg chg="add">
-          <ac:chgData name="Xin Zou" userId="260b9726081dae15" providerId="LiveId" clId="{38676C1A-CF62-4DBE-B095-D63BA33FC8BE}" dt="2018-10-08T05:16:34.375" v="212" actId="26606"/>
-          <ac:spMkLst>
-            <pc:docMk/>
-            <pc:sldMk cId="3257530078" sldId="263"/>
-            <ac:spMk id="9" creationId="{229B61F6-561C-44B1-809D-51A2F295F329}"/>
-          </ac:spMkLst>
-        </pc:spChg>
-        <pc:picChg chg="add mod ord">
-          <ac:chgData name="Xin Zou" userId="260b9726081dae15" providerId="LiveId" clId="{38676C1A-CF62-4DBE-B095-D63BA33FC8BE}" dt="2018-10-08T05:16:34.375" v="212" actId="26606"/>
-          <ac:picMkLst>
-            <pc:docMk/>
-            <pc:sldMk cId="3257530078" sldId="263"/>
-            <ac:picMk id="4" creationId="{105705EE-F9CC-4179-8161-85F1EE4DF5CA}"/>
-          </ac:picMkLst>
-        </pc:picChg>
-      </pc:sldChg>
-      <pc:sldChg chg="modSp">
-        <pc:chgData name="Xin Zou" userId="260b9726081dae15" providerId="LiveId" clId="{38676C1A-CF62-4DBE-B095-D63BA33FC8BE}" dt="2018-10-08T04:25:15.617" v="0"/>
-        <pc:sldMkLst>
-          <pc:docMk/>
-          <pc:sldMk cId="711914682" sldId="264"/>
-        </pc:sldMkLst>
-        <pc:picChg chg="mod">
-          <ac:chgData name="Xin Zou" userId="260b9726081dae15" providerId="LiveId" clId="{38676C1A-CF62-4DBE-B095-D63BA33FC8BE}" dt="2018-10-08T04:25:15.617" v="0"/>
-          <ac:picMkLst>
-            <pc:docMk/>
-            <pc:sldMk cId="711914682" sldId="264"/>
-            <ac:picMk id="4" creationId="{00000000-0000-0000-0000-000000000000}"/>
-          </ac:picMkLst>
-        </pc:picChg>
-      </pc:sldChg>
-      <pc:sldChg chg="del">
-        <pc:chgData name="Xin Zou" userId="260b9726081dae15" providerId="LiveId" clId="{38676C1A-CF62-4DBE-B095-D63BA33FC8BE}" dt="2018-10-08T05:17:01.199" v="213" actId="2696"/>
-        <pc:sldMkLst>
-          <pc:docMk/>
-          <pc:sldMk cId="2871512770" sldId="265"/>
+          <pc:sldMk cId="593912656" sldId="10118"/>
         </pc:sldMkLst>
       </pc:sldChg>
-      <pc:sldChg chg="modSp">
-        <pc:chgData name="Xin Zou" userId="260b9726081dae15" providerId="LiveId" clId="{38676C1A-CF62-4DBE-B095-D63BA33FC8BE}" dt="2018-10-08T05:24:14.005" v="411" actId="20577"/>
-        <pc:sldMkLst>
-          <pc:docMk/>
-          <pc:sldMk cId="476253036" sldId="266"/>
-        </pc:sldMkLst>
-        <pc:spChg chg="mod">
-          <ac:chgData name="Xin Zou" userId="260b9726081dae15" providerId="LiveId" clId="{38676C1A-CF62-4DBE-B095-D63BA33FC8BE}" dt="2018-10-08T05:24:14.005" v="411" actId="20577"/>
-          <ac:spMkLst>
-            <pc:docMk/>
-            <pc:sldMk cId="476253036" sldId="266"/>
-            <ac:spMk id="3" creationId="{00000000-0000-0000-0000-000000000000}"/>
-          </ac:spMkLst>
-        </pc:spChg>
-      </pc:sldChg>
-      <pc:sldChg chg="modSp">
-        <pc:chgData name="Xin Zou" userId="260b9726081dae15" providerId="LiveId" clId="{38676C1A-CF62-4DBE-B095-D63BA33FC8BE}" dt="2018-10-08T05:17:09.793" v="215" actId="27636"/>
-        <pc:sldMkLst>
-          <pc:docMk/>
-          <pc:sldMk cId="3587831306" sldId="267"/>
-        </pc:sldMkLst>
-        <pc:spChg chg="mod">
-          <ac:chgData name="Xin Zou" userId="260b9726081dae15" providerId="LiveId" clId="{38676C1A-CF62-4DBE-B095-D63BA33FC8BE}" dt="2018-10-08T05:17:09.793" v="215" actId="27636"/>
-          <ac:spMkLst>
-            <pc:docMk/>
-            <pc:sldMk cId="3587831306" sldId="267"/>
-            <ac:spMk id="3" creationId="{00000000-0000-0000-0000-000000000000}"/>
-          </ac:spMkLst>
-        </pc:spChg>
-      </pc:sldChg>
-      <pc:sldChg chg="add">
-        <pc:chgData name="Xin Zou" userId="260b9726081dae15" providerId="LiveId" clId="{38676C1A-CF62-4DBE-B095-D63BA33FC8BE}" dt="2018-10-08T04:33:07.365" v="146"/>
-        <pc:sldMkLst>
-          <pc:docMk/>
-          <pc:sldMk cId="0" sldId="276"/>
-        </pc:sldMkLst>
-      </pc:sldChg>
-      <pc:sldChg chg="add">
-        <pc:chgData name="Xin Zou" userId="260b9726081dae15" providerId="LiveId" clId="{38676C1A-CF62-4DBE-B095-D63BA33FC8BE}" dt="2018-10-08T04:33:07.365" v="146"/>
-        <pc:sldMkLst>
-          <pc:docMk/>
-          <pc:sldMk cId="0" sldId="277"/>
-        </pc:sldMkLst>
-      </pc:sldChg>
-      <pc:sldChg chg="add">
-        <pc:chgData name="Xin Zou" userId="260b9726081dae15" providerId="LiveId" clId="{38676C1A-CF62-4DBE-B095-D63BA33FC8BE}" dt="2018-10-08T04:33:35.952" v="147"/>
-        <pc:sldMkLst>
-          <pc:docMk/>
-          <pc:sldMk cId="0" sldId="278"/>
-        </pc:sldMkLst>
-      </pc:sldChg>
-      <pc:sldChg chg="add">
-        <pc:chgData name="Xin Zou" userId="260b9726081dae15" providerId="LiveId" clId="{38676C1A-CF62-4DBE-B095-D63BA33FC8BE}" dt="2018-10-08T04:33:35.952" v="147"/>
-        <pc:sldMkLst>
-          <pc:docMk/>
-          <pc:sldMk cId="0" sldId="279"/>
-        </pc:sldMkLst>
-      </pc:sldChg>
-      <pc:sldChg chg="add">
-        <pc:chgData name="Xin Zou" userId="260b9726081dae15" providerId="LiveId" clId="{38676C1A-CF62-4DBE-B095-D63BA33FC8BE}" dt="2018-10-08T04:25:57.075" v="6"/>
-        <pc:sldMkLst>
-          <pc:docMk/>
-          <pc:sldMk cId="161325156" sldId="374"/>
-        </pc:sldMkLst>
-      </pc:sldChg>
-      <pc:sldChg chg="modSp add">
-        <pc:chgData name="Xin Zou" userId="260b9726081dae15" providerId="LiveId" clId="{38676C1A-CF62-4DBE-B095-D63BA33FC8BE}" dt="2018-10-08T04:26:31.166" v="52"/>
-        <pc:sldMkLst>
-          <pc:docMk/>
-          <pc:sldMk cId="4263994457" sldId="375"/>
-        </pc:sldMkLst>
-        <pc:spChg chg="mod">
-          <ac:chgData name="Xin Zou" userId="260b9726081dae15" providerId="LiveId" clId="{38676C1A-CF62-4DBE-B095-D63BA33FC8BE}" dt="2018-10-08T04:26:31.166" v="52"/>
-          <ac:spMkLst>
-            <pc:docMk/>
-            <pc:sldMk cId="4263994457" sldId="375"/>
-            <ac:spMk id="2" creationId="{7CD61EC4-17AD-45DC-95E5-80FCD9EA05D7}"/>
-          </ac:spMkLst>
-        </pc:spChg>
-      </pc:sldChg>
-      <pc:sldChg chg="add">
-        <pc:chgData name="Xin Zou" userId="260b9726081dae15" providerId="LiveId" clId="{38676C1A-CF62-4DBE-B095-D63BA33FC8BE}" dt="2018-10-08T04:27:40.162" v="54"/>
-        <pc:sldMkLst>
-          <pc:docMk/>
-          <pc:sldMk cId="73778410" sldId="390"/>
-        </pc:sldMkLst>
-      </pc:sldChg>
-      <pc:sldChg chg="modSp add">
-        <pc:chgData name="Xin Zou" userId="260b9726081dae15" providerId="LiveId" clId="{38676C1A-CF62-4DBE-B095-D63BA33FC8BE}" dt="2018-10-08T04:30:12.856" v="59" actId="113"/>
-        <pc:sldMkLst>
-          <pc:docMk/>
-          <pc:sldMk cId="3657488488" sldId="391"/>
-        </pc:sldMkLst>
-        <pc:spChg chg="mod">
-          <ac:chgData name="Xin Zou" userId="260b9726081dae15" providerId="LiveId" clId="{38676C1A-CF62-4DBE-B095-D63BA33FC8BE}" dt="2018-10-08T04:30:12.856" v="59" actId="113"/>
-          <ac:spMkLst>
-            <pc:docMk/>
-            <pc:sldMk cId="3657488488" sldId="391"/>
-            <ac:spMk id="3" creationId="{78320EF3-3AF7-4CEF-8858-CFAEC5EDDCB7}"/>
-          </ac:spMkLst>
-        </pc:spChg>
-      </pc:sldChg>
-      <pc:sldChg chg="add">
-        <pc:chgData name="Xin Zou" userId="260b9726081dae15" providerId="LiveId" clId="{38676C1A-CF62-4DBE-B095-D63BA33FC8BE}" dt="2018-10-08T04:27:40.162" v="54"/>
-        <pc:sldMkLst>
-          <pc:docMk/>
-          <pc:sldMk cId="2735044265" sldId="392"/>
-        </pc:sldMkLst>
-      </pc:sldChg>
-      <pc:sldChg chg="delSp add setBg delDesignElem">
-        <pc:chgData name="Xin Zou" userId="260b9726081dae15" providerId="LiveId" clId="{38676C1A-CF62-4DBE-B095-D63BA33FC8BE}" dt="2018-10-08T04:27:40.162" v="54"/>
-        <pc:sldMkLst>
-          <pc:docMk/>
-          <pc:sldMk cId="1965381647" sldId="394"/>
-        </pc:sldMkLst>
-        <pc:spChg chg="del">
-          <ac:chgData name="Xin Zou" userId="260b9726081dae15" providerId="LiveId" clId="{38676C1A-CF62-4DBE-B095-D63BA33FC8BE}" dt="2018-10-08T04:27:40.162" v="54"/>
-          <ac:spMkLst>
-            <pc:docMk/>
-            <pc:sldMk cId="1965381647" sldId="394"/>
-            <ac:spMk id="9" creationId="{4A079BE1-ED93-4445-AD4A-0D67109702E7}"/>
-          </ac:spMkLst>
-        </pc:spChg>
-        <pc:spChg chg="del">
-          <ac:chgData name="Xin Zou" userId="260b9726081dae15" providerId="LiveId" clId="{38676C1A-CF62-4DBE-B095-D63BA33FC8BE}" dt="2018-10-08T04:27:40.162" v="54"/>
-          <ac:spMkLst>
-            <pc:docMk/>
-            <pc:sldMk cId="1965381647" sldId="394"/>
-            <ac:spMk id="11" creationId="{3F6C79BF-A4E0-4CC8-952B-C736485CAFF4}"/>
-          </ac:spMkLst>
-        </pc:spChg>
-      </pc:sldChg>
-      <pc:sldChg chg="add">
-        <pc:chgData name="Xin Zou" userId="260b9726081dae15" providerId="LiveId" clId="{38676C1A-CF62-4DBE-B095-D63BA33FC8BE}" dt="2018-10-08T04:27:40.162" v="54"/>
-        <pc:sldMkLst>
-          <pc:docMk/>
-          <pc:sldMk cId="3019264826" sldId="395"/>
-        </pc:sldMkLst>
-      </pc:sldChg>
-      <pc:sldChg chg="add">
-        <pc:chgData name="Xin Zou" userId="260b9726081dae15" providerId="LiveId" clId="{38676C1A-CF62-4DBE-B095-D63BA33FC8BE}" dt="2018-10-08T04:27:40.162" v="54"/>
-        <pc:sldMkLst>
-          <pc:docMk/>
-          <pc:sldMk cId="1119285080" sldId="396"/>
-        </pc:sldMkLst>
-      </pc:sldChg>
-      <pc:sldChg chg="add">
-        <pc:chgData name="Xin Zou" userId="260b9726081dae15" providerId="LiveId" clId="{38676C1A-CF62-4DBE-B095-D63BA33FC8BE}" dt="2018-10-08T04:27:40.162" v="54"/>
-        <pc:sldMkLst>
-          <pc:docMk/>
-          <pc:sldMk cId="1481050817" sldId="397"/>
-        </pc:sldMkLst>
-      </pc:sldChg>
-      <pc:sldChg chg="add">
-        <pc:chgData name="Xin Zou" userId="260b9726081dae15" providerId="LiveId" clId="{38676C1A-CF62-4DBE-B095-D63BA33FC8BE}" dt="2018-10-08T04:27:40.162" v="54"/>
-        <pc:sldMkLst>
-          <pc:docMk/>
-          <pc:sldMk cId="1040950805" sldId="398"/>
-        </pc:sldMkLst>
-      </pc:sldChg>
-      <pc:sldChg chg="add">
-        <pc:chgData name="Xin Zou" userId="260b9726081dae15" providerId="LiveId" clId="{38676C1A-CF62-4DBE-B095-D63BA33FC8BE}" dt="2018-10-08T04:27:40.162" v="54"/>
-        <pc:sldMkLst>
-          <pc:docMk/>
-          <pc:sldMk cId="2480698082" sldId="399"/>
-        </pc:sldMkLst>
-      </pc:sldChg>
-      <pc:sldChg chg="add">
-        <pc:chgData name="Xin Zou" userId="260b9726081dae15" providerId="LiveId" clId="{38676C1A-CF62-4DBE-B095-D63BA33FC8BE}" dt="2018-10-08T04:27:40.162" v="54"/>
-        <pc:sldMkLst>
-          <pc:docMk/>
-          <pc:sldMk cId="852902275" sldId="400"/>
-        </pc:sldMkLst>
-      </pc:sldChg>
-      <pc:sldChg chg="add">
-        <pc:chgData name="Xin Zou" userId="260b9726081dae15" providerId="LiveId" clId="{38676C1A-CF62-4DBE-B095-D63BA33FC8BE}" dt="2018-10-08T04:27:40.162" v="54"/>
-        <pc:sldMkLst>
-          <pc:docMk/>
-          <pc:sldMk cId="1281493869" sldId="401"/>
-        </pc:sldMkLst>
-      </pc:sldChg>
-      <pc:sldChg chg="modSp add">
-        <pc:chgData name="Xin Zou" userId="260b9726081dae15" providerId="LiveId" clId="{38676C1A-CF62-4DBE-B095-D63BA33FC8BE}" dt="2018-10-08T04:32:48.863" v="145"/>
-        <pc:sldMkLst>
-          <pc:docMk/>
-          <pc:sldMk cId="3345101463" sldId="402"/>
-        </pc:sldMkLst>
-        <pc:spChg chg="mod">
-          <ac:chgData name="Xin Zou" userId="260b9726081dae15" providerId="LiveId" clId="{38676C1A-CF62-4DBE-B095-D63BA33FC8BE}" dt="2018-10-08T04:32:48.863" v="145"/>
-          <ac:spMkLst>
-            <pc:docMk/>
-            <pc:sldMk cId="3345101463" sldId="402"/>
-            <ac:spMk id="2" creationId="{921C21EB-F2E8-4DC1-8006-214546ADC988}"/>
-          </ac:spMkLst>
-        </pc:spChg>
-      </pc:sldChg>
-      <pc:sldChg chg="add">
-        <pc:chgData name="Xin Zou" userId="260b9726081dae15" providerId="LiveId" clId="{38676C1A-CF62-4DBE-B095-D63BA33FC8BE}" dt="2018-10-08T04:33:35.952" v="147"/>
-        <pc:sldMkLst>
-          <pc:docMk/>
-          <pc:sldMk cId="2464728381" sldId="407"/>
-        </pc:sldMkLst>
-      </pc:sldChg>
-      <pc:sldChg chg="add">
-        <pc:chgData name="Xin Zou" userId="260b9726081dae15" providerId="LiveId" clId="{38676C1A-CF62-4DBE-B095-D63BA33FC8BE}" dt="2018-10-08T04:33:35.952" v="147"/>
-        <pc:sldMkLst>
-          <pc:docMk/>
-          <pc:sldMk cId="351275956" sldId="408"/>
-        </pc:sldMkLst>
-      </pc:sldChg>
-      <pc:sldChg chg="add">
-        <pc:chgData name="Xin Zou" userId="260b9726081dae15" providerId="LiveId" clId="{38676C1A-CF62-4DBE-B095-D63BA33FC8BE}" dt="2018-10-08T04:33:35.952" v="147"/>
-        <pc:sldMkLst>
-          <pc:docMk/>
-          <pc:sldMk cId="4076201193" sldId="409"/>
-        </pc:sldMkLst>
-      </pc:sldChg>
-      <pc:sldChg chg="add">
-        <pc:chgData name="Xin Zou" userId="260b9726081dae15" providerId="LiveId" clId="{38676C1A-CF62-4DBE-B095-D63BA33FC8BE}" dt="2018-10-08T04:33:35.952" v="147"/>
-        <pc:sldMkLst>
-          <pc:docMk/>
-          <pc:sldMk cId="245638306" sldId="410"/>
-        </pc:sldMkLst>
-      </pc:sldChg>
-      <pc:sldChg chg="add">
-        <pc:chgData name="Xin Zou" userId="260b9726081dae15" providerId="LiveId" clId="{38676C1A-CF62-4DBE-B095-D63BA33FC8BE}" dt="2018-10-08T04:33:35.952" v="147"/>
-        <pc:sldMkLst>
-          <pc:docMk/>
-          <pc:sldMk cId="3393697691" sldId="411"/>
-        </pc:sldMkLst>
-      </pc:sldChg>
-      <pc:sldChg chg="add setBg">
-        <pc:chgData name="Xin Zou" userId="260b9726081dae15" providerId="LiveId" clId="{38676C1A-CF62-4DBE-B095-D63BA33FC8BE}" dt="2018-10-08T04:33:35.952" v="147"/>
-        <pc:sldMkLst>
-          <pc:docMk/>
-          <pc:sldMk cId="3448455092" sldId="412"/>
-        </pc:sldMkLst>
-      </pc:sldChg>
-      <pc:sldChg chg="modSp add">
-        <pc:chgData name="Xin Zou" userId="260b9726081dae15" providerId="LiveId" clId="{38676C1A-CF62-4DBE-B095-D63BA33FC8BE}" dt="2018-10-08T04:34:05.533" v="196"/>
-        <pc:sldMkLst>
-          <pc:docMk/>
-          <pc:sldMk cId="1716841113" sldId="413"/>
-        </pc:sldMkLst>
-        <pc:spChg chg="mod">
-          <ac:chgData name="Xin Zou" userId="260b9726081dae15" providerId="LiveId" clId="{38676C1A-CF62-4DBE-B095-D63BA33FC8BE}" dt="2018-10-08T04:34:05.533" v="196"/>
-          <ac:spMkLst>
-            <pc:docMk/>
-            <pc:sldMk cId="1716841113" sldId="413"/>
-            <ac:spMk id="2" creationId="{EBC670D6-509A-4EDF-A852-1D96C818CBE2}"/>
-          </ac:spMkLst>
-        </pc:spChg>
-      </pc:sldChg>
-      <pc:sldChg chg="addSp modSp add mod setBg">
-        <pc:chgData name="Xin Zou" userId="260b9726081dae15" providerId="LiveId" clId="{38676C1A-CF62-4DBE-B095-D63BA33FC8BE}" dt="2018-10-08T05:22:36.339" v="383" actId="26606"/>
-        <pc:sldMkLst>
-          <pc:docMk/>
-          <pc:sldMk cId="4084690665" sldId="414"/>
-        </pc:sldMkLst>
-        <pc:spChg chg="mod">
-          <ac:chgData name="Xin Zou" userId="260b9726081dae15" providerId="LiveId" clId="{38676C1A-CF62-4DBE-B095-D63BA33FC8BE}" dt="2018-10-08T05:22:36.339" v="383" actId="26606"/>
-          <ac:spMkLst>
-            <pc:docMk/>
-            <pc:sldMk cId="4084690665" sldId="414"/>
-            <ac:spMk id="2" creationId="{6D26B91B-D9B1-477D-8B40-9367BF479138}"/>
-          </ac:spMkLst>
-        </pc:spChg>
-        <pc:spChg chg="mod ord">
-          <ac:chgData name="Xin Zou" userId="260b9726081dae15" providerId="LiveId" clId="{38676C1A-CF62-4DBE-B095-D63BA33FC8BE}" dt="2018-10-08T05:22:36.339" v="383" actId="26606"/>
-          <ac:spMkLst>
-            <pc:docMk/>
-            <pc:sldMk cId="4084690665" sldId="414"/>
-            <ac:spMk id="3" creationId="{C212176C-009A-4C3D-8B0B-972D42797D8A}"/>
-          </ac:spMkLst>
-        </pc:spChg>
-        <pc:picChg chg="add mod">
-          <ac:chgData name="Xin Zou" userId="260b9726081dae15" providerId="LiveId" clId="{38676C1A-CF62-4DBE-B095-D63BA33FC8BE}" dt="2018-10-08T05:22:36.339" v="383" actId="26606"/>
-          <ac:picMkLst>
-            <pc:docMk/>
-            <pc:sldMk cId="4084690665" sldId="414"/>
-            <ac:picMk id="4" creationId="{B7650DC0-3412-4510-A886-893C09B9FE5D}"/>
-          </ac:picMkLst>
-        </pc:picChg>
-      </pc:sldChg>
-      <pc:sldMasterChg chg="modSp modSldLayout">
-        <pc:chgData name="Xin Zou" userId="260b9726081dae15" providerId="LiveId" clId="{38676C1A-CF62-4DBE-B095-D63BA33FC8BE}" dt="2018-10-08T04:25:15.617" v="0"/>
-        <pc:sldMasterMkLst>
-          <pc:docMk/>
-          <pc:sldMasterMk cId="846276100" sldId="2147483780"/>
-        </pc:sldMasterMkLst>
-        <pc:spChg chg="mod">
-          <ac:chgData name="Xin Zou" userId="260b9726081dae15" providerId="LiveId" clId="{38676C1A-CF62-4DBE-B095-D63BA33FC8BE}" dt="2018-10-08T04:25:15.617" v="0"/>
-          <ac:spMkLst>
-            <pc:docMk/>
-            <pc:sldMasterMk cId="846276100" sldId="2147483780"/>
-            <ac:spMk id="2" creationId="{00000000-0000-0000-0000-000000000000}"/>
-          </ac:spMkLst>
-        </pc:spChg>
-        <pc:spChg chg="mod">
-          <ac:chgData name="Xin Zou" userId="260b9726081dae15" providerId="LiveId" clId="{38676C1A-CF62-4DBE-B095-D63BA33FC8BE}" dt="2018-10-08T04:25:15.617" v="0"/>
-          <ac:spMkLst>
-            <pc:docMk/>
-            <pc:sldMasterMk cId="846276100" sldId="2147483780"/>
-            <ac:spMk id="3" creationId="{00000000-0000-0000-0000-000000000000}"/>
-          </ac:spMkLst>
-        </pc:spChg>
-        <pc:spChg chg="mod">
-          <ac:chgData name="Xin Zou" userId="260b9726081dae15" providerId="LiveId" clId="{38676C1A-CF62-4DBE-B095-D63BA33FC8BE}" dt="2018-10-08T04:25:15.617" v="0"/>
-          <ac:spMkLst>
-            <pc:docMk/>
-            <pc:sldMasterMk cId="846276100" sldId="2147483780"/>
-            <ac:spMk id="4" creationId="{00000000-0000-0000-0000-000000000000}"/>
-          </ac:spMkLst>
-        </pc:spChg>
-        <pc:spChg chg="mod">
-          <ac:chgData name="Xin Zou" userId="260b9726081dae15" providerId="LiveId" clId="{38676C1A-CF62-4DBE-B095-D63BA33FC8BE}" dt="2018-10-08T04:25:15.617" v="0"/>
-          <ac:spMkLst>
-            <pc:docMk/>
-            <pc:sldMasterMk cId="846276100" sldId="2147483780"/>
-            <ac:spMk id="5" creationId="{00000000-0000-0000-0000-000000000000}"/>
-          </ac:spMkLst>
-        </pc:spChg>
-        <pc:spChg chg="mod">
-          <ac:chgData name="Xin Zou" userId="260b9726081dae15" providerId="LiveId" clId="{38676C1A-CF62-4DBE-B095-D63BA33FC8BE}" dt="2018-10-08T04:25:15.617" v="0"/>
-          <ac:spMkLst>
-            <pc:docMk/>
-            <pc:sldMasterMk cId="846276100" sldId="2147483780"/>
-            <ac:spMk id="6" creationId="{00000000-0000-0000-0000-000000000000}"/>
-          </ac:spMkLst>
-        </pc:spChg>
-        <pc:spChg chg="mod">
-          <ac:chgData name="Xin Zou" userId="260b9726081dae15" providerId="LiveId" clId="{38676C1A-CF62-4DBE-B095-D63BA33FC8BE}" dt="2018-10-08T04:25:15.617" v="0"/>
-          <ac:spMkLst>
-            <pc:docMk/>
-            <pc:sldMasterMk cId="846276100" sldId="2147483780"/>
-            <ac:spMk id="7" creationId="{00000000-0000-0000-0000-000000000000}"/>
-          </ac:spMkLst>
-        </pc:spChg>
-        <pc:spChg chg="mod">
-          <ac:chgData name="Xin Zou" userId="260b9726081dae15" providerId="LiveId" clId="{38676C1A-CF62-4DBE-B095-D63BA33FC8BE}" dt="2018-10-08T04:25:15.617" v="0"/>
-          <ac:spMkLst>
-            <pc:docMk/>
-            <pc:sldMasterMk cId="846276100" sldId="2147483780"/>
-            <ac:spMk id="10" creationId="{00000000-0000-0000-0000-000000000000}"/>
-          </ac:spMkLst>
-        </pc:spChg>
-        <pc:sldLayoutChg chg="modSp">
-          <pc:chgData name="Xin Zou" userId="260b9726081dae15" providerId="LiveId" clId="{38676C1A-CF62-4DBE-B095-D63BA33FC8BE}" dt="2018-10-08T04:25:15.617" v="0"/>
-          <pc:sldLayoutMkLst>
-            <pc:docMk/>
-            <pc:sldMasterMk cId="846276100" sldId="2147483780"/>
-            <pc:sldLayoutMk cId="323638451" sldId="2147483781"/>
-          </pc:sldLayoutMkLst>
-          <pc:spChg chg="mod">
-            <ac:chgData name="Xin Zou" userId="260b9726081dae15" providerId="LiveId" clId="{38676C1A-CF62-4DBE-B095-D63BA33FC8BE}" dt="2018-10-08T04:25:15.617" v="0"/>
-            <ac:spMkLst>
-              <pc:docMk/>
-              <pc:sldMasterMk cId="846276100" sldId="2147483780"/>
-              <pc:sldLayoutMk cId="323638451" sldId="2147483781"/>
-              <ac:spMk id="2" creationId="{00000000-0000-0000-0000-000000000000}"/>
-            </ac:spMkLst>
-          </pc:spChg>
-          <pc:spChg chg="mod">
-            <ac:chgData name="Xin Zou" userId="260b9726081dae15" providerId="LiveId" clId="{38676C1A-CF62-4DBE-B095-D63BA33FC8BE}" dt="2018-10-08T04:25:15.617" v="0"/>
-            <ac:spMkLst>
-              <pc:docMk/>
-              <pc:sldMasterMk cId="846276100" sldId="2147483780"/>
-              <pc:sldLayoutMk cId="323638451" sldId="2147483781"/>
-              <ac:spMk id="3" creationId="{00000000-0000-0000-0000-000000000000}"/>
-            </ac:spMkLst>
-          </pc:spChg>
-          <pc:spChg chg="mod">
-            <ac:chgData name="Xin Zou" userId="260b9726081dae15" providerId="LiveId" clId="{38676C1A-CF62-4DBE-B095-D63BA33FC8BE}" dt="2018-10-08T04:25:15.617" v="0"/>
-            <ac:spMkLst>
-              <pc:docMk/>
-              <pc:sldMasterMk cId="846276100" sldId="2147483780"/>
-              <pc:sldLayoutMk cId="323638451" sldId="2147483781"/>
-              <ac:spMk id="9" creationId="{00000000-0000-0000-0000-000000000000}"/>
-            </ac:spMkLst>
-          </pc:spChg>
-          <pc:spChg chg="mod">
-            <ac:chgData name="Xin Zou" userId="260b9726081dae15" providerId="LiveId" clId="{38676C1A-CF62-4DBE-B095-D63BA33FC8BE}" dt="2018-10-08T04:25:15.617" v="0"/>
-            <ac:spMkLst>
-              <pc:docMk/>
-              <pc:sldMasterMk cId="846276100" sldId="2147483780"/>
-              <pc:sldLayoutMk cId="323638451" sldId="2147483781"/>
-              <ac:spMk id="10" creationId="{00000000-0000-0000-0000-000000000000}"/>
-            </ac:spMkLst>
-          </pc:spChg>
-        </pc:sldLayoutChg>
-        <pc:sldLayoutChg chg="modSp">
-          <pc:chgData name="Xin Zou" userId="260b9726081dae15" providerId="LiveId" clId="{38676C1A-CF62-4DBE-B095-D63BA33FC8BE}" dt="2018-10-08T04:25:15.617" v="0"/>
-          <pc:sldLayoutMkLst>
-            <pc:docMk/>
-            <pc:sldMasterMk cId="846276100" sldId="2147483780"/>
-            <pc:sldLayoutMk cId="171744047" sldId="2147483782"/>
-          </pc:sldLayoutMkLst>
-          <pc:spChg chg="mod">
-            <ac:chgData name="Xin Zou" userId="260b9726081dae15" providerId="LiveId" clId="{38676C1A-CF62-4DBE-B095-D63BA33FC8BE}" dt="2018-10-08T04:25:15.617" v="0"/>
-            <ac:spMkLst>
-              <pc:docMk/>
-              <pc:sldMasterMk cId="846276100" sldId="2147483780"/>
-              <pc:sldLayoutMk cId="171744047" sldId="2147483782"/>
-              <ac:spMk id="2" creationId="{00000000-0000-0000-0000-000000000000}"/>
-            </ac:spMkLst>
-          </pc:spChg>
-        </pc:sldLayoutChg>
-        <pc:sldLayoutChg chg="modSp">
-          <pc:chgData name="Xin Zou" userId="260b9726081dae15" providerId="LiveId" clId="{38676C1A-CF62-4DBE-B095-D63BA33FC8BE}" dt="2018-10-08T04:25:15.617" v="0"/>
-          <pc:sldLayoutMkLst>
-            <pc:docMk/>
-            <pc:sldMasterMk cId="846276100" sldId="2147483780"/>
-            <pc:sldLayoutMk cId="1101634726" sldId="2147483783"/>
-          </pc:sldLayoutMkLst>
-          <pc:spChg chg="mod">
-            <ac:chgData name="Xin Zou" userId="260b9726081dae15" providerId="LiveId" clId="{38676C1A-CF62-4DBE-B095-D63BA33FC8BE}" dt="2018-10-08T04:25:15.617" v="0"/>
-            <ac:spMkLst>
-              <pc:docMk/>
-              <pc:sldMasterMk cId="846276100" sldId="2147483780"/>
-              <pc:sldLayoutMk cId="1101634726" sldId="2147483783"/>
-              <ac:spMk id="2" creationId="{00000000-0000-0000-0000-000000000000}"/>
-            </ac:spMkLst>
-          </pc:spChg>
-          <pc:spChg chg="mod">
-            <ac:chgData name="Xin Zou" userId="260b9726081dae15" providerId="LiveId" clId="{38676C1A-CF62-4DBE-B095-D63BA33FC8BE}" dt="2018-10-08T04:25:15.617" v="0"/>
-            <ac:spMkLst>
-              <pc:docMk/>
-              <pc:sldMasterMk cId="846276100" sldId="2147483780"/>
-              <pc:sldLayoutMk cId="1101634726" sldId="2147483783"/>
-              <ac:spMk id="3" creationId="{00000000-0000-0000-0000-000000000000}"/>
-            </ac:spMkLst>
-          </pc:spChg>
-          <pc:spChg chg="mod">
-            <ac:chgData name="Xin Zou" userId="260b9726081dae15" providerId="LiveId" clId="{38676C1A-CF62-4DBE-B095-D63BA33FC8BE}" dt="2018-10-08T04:25:15.617" v="0"/>
-            <ac:spMkLst>
-              <pc:docMk/>
-              <pc:sldMasterMk cId="846276100" sldId="2147483780"/>
-              <pc:sldLayoutMk cId="1101634726" sldId="2147483783"/>
-              <ac:spMk id="9" creationId="{00000000-0000-0000-0000-000000000000}"/>
-            </ac:spMkLst>
-          </pc:spChg>
-          <pc:spChg chg="mod">
-            <ac:chgData name="Xin Zou" userId="260b9726081dae15" providerId="LiveId" clId="{38676C1A-CF62-4DBE-B095-D63BA33FC8BE}" dt="2018-10-08T04:25:15.617" v="0"/>
-            <ac:spMkLst>
-              <pc:docMk/>
-              <pc:sldMasterMk cId="846276100" sldId="2147483780"/>
-              <pc:sldLayoutMk cId="1101634726" sldId="2147483783"/>
-              <ac:spMk id="12" creationId="{00000000-0000-0000-0000-000000000000}"/>
-            </ac:spMkLst>
-          </pc:spChg>
-        </pc:sldLayoutChg>
-        <pc:sldLayoutChg chg="modSp">
-          <pc:chgData name="Xin Zou" userId="260b9726081dae15" providerId="LiveId" clId="{38676C1A-CF62-4DBE-B095-D63BA33FC8BE}" dt="2018-10-08T04:25:15.617" v="0"/>
-          <pc:sldLayoutMkLst>
-            <pc:docMk/>
-            <pc:sldMasterMk cId="846276100" sldId="2147483780"/>
-            <pc:sldLayoutMk cId="4182124218" sldId="2147483784"/>
-          </pc:sldLayoutMkLst>
-          <pc:spChg chg="mod">
-            <ac:chgData name="Xin Zou" userId="260b9726081dae15" providerId="LiveId" clId="{38676C1A-CF62-4DBE-B095-D63BA33FC8BE}" dt="2018-10-08T04:25:15.617" v="0"/>
-            <ac:spMkLst>
-              <pc:docMk/>
-              <pc:sldMasterMk cId="846276100" sldId="2147483780"/>
-              <pc:sldLayoutMk cId="4182124218" sldId="2147483784"/>
-              <ac:spMk id="3" creationId="{00000000-0000-0000-0000-000000000000}"/>
-            </ac:spMkLst>
-          </pc:spChg>
-          <pc:spChg chg="mod">
-            <ac:chgData name="Xin Zou" userId="260b9726081dae15" providerId="LiveId" clId="{38676C1A-CF62-4DBE-B095-D63BA33FC8BE}" dt="2018-10-08T04:25:15.617" v="0"/>
-            <ac:spMkLst>
-              <pc:docMk/>
-              <pc:sldMasterMk cId="846276100" sldId="2147483780"/>
-              <pc:sldLayoutMk cId="4182124218" sldId="2147483784"/>
-              <ac:spMk id="4" creationId="{00000000-0000-0000-0000-000000000000}"/>
-            </ac:spMkLst>
-          </pc:spChg>
-        </pc:sldLayoutChg>
-        <pc:sldLayoutChg chg="modSp">
-          <pc:chgData name="Xin Zou" userId="260b9726081dae15" providerId="LiveId" clId="{38676C1A-CF62-4DBE-B095-D63BA33FC8BE}" dt="2018-10-08T04:25:15.617" v="0"/>
-          <pc:sldLayoutMkLst>
-            <pc:docMk/>
-            <pc:sldMasterMk cId="846276100" sldId="2147483780"/>
-            <pc:sldLayoutMk cId="738730040" sldId="2147483785"/>
-          </pc:sldLayoutMkLst>
-          <pc:spChg chg="mod">
-            <ac:chgData name="Xin Zou" userId="260b9726081dae15" providerId="LiveId" clId="{38676C1A-CF62-4DBE-B095-D63BA33FC8BE}" dt="2018-10-08T04:25:15.617" v="0"/>
-            <ac:spMkLst>
-              <pc:docMk/>
-              <pc:sldMasterMk cId="846276100" sldId="2147483780"/>
-              <pc:sldLayoutMk cId="738730040" sldId="2147483785"/>
-              <ac:spMk id="3" creationId="{00000000-0000-0000-0000-000000000000}"/>
-            </ac:spMkLst>
-          </pc:spChg>
-          <pc:spChg chg="mod">
-            <ac:chgData name="Xin Zou" userId="260b9726081dae15" providerId="LiveId" clId="{38676C1A-CF62-4DBE-B095-D63BA33FC8BE}" dt="2018-10-08T04:25:15.617" v="0"/>
-            <ac:spMkLst>
-              <pc:docMk/>
-              <pc:sldMasterMk cId="846276100" sldId="2147483780"/>
-              <pc:sldLayoutMk cId="738730040" sldId="2147483785"/>
-              <ac:spMk id="4" creationId="{00000000-0000-0000-0000-000000000000}"/>
-            </ac:spMkLst>
-          </pc:spChg>
-          <pc:spChg chg="mod">
-            <ac:chgData name="Xin Zou" userId="260b9726081dae15" providerId="LiveId" clId="{38676C1A-CF62-4DBE-B095-D63BA33FC8BE}" dt="2018-10-08T04:25:15.617" v="0"/>
-            <ac:spMkLst>
-              <pc:docMk/>
-              <pc:sldMasterMk cId="846276100" sldId="2147483780"/>
-              <pc:sldLayoutMk cId="738730040" sldId="2147483785"/>
-              <ac:spMk id="5" creationId="{00000000-0000-0000-0000-000000000000}"/>
-            </ac:spMkLst>
-          </pc:spChg>
-          <pc:spChg chg="mod">
-            <ac:chgData name="Xin Zou" userId="260b9726081dae15" providerId="LiveId" clId="{38676C1A-CF62-4DBE-B095-D63BA33FC8BE}" dt="2018-10-08T04:25:15.617" v="0"/>
-            <ac:spMkLst>
-              <pc:docMk/>
-              <pc:sldMasterMk cId="846276100" sldId="2147483780"/>
-              <pc:sldLayoutMk cId="738730040" sldId="2147483785"/>
-              <ac:spMk id="6" creationId="{00000000-0000-0000-0000-000000000000}"/>
-            </ac:spMkLst>
-          </pc:spChg>
-        </pc:sldLayoutChg>
-        <pc:sldLayoutChg chg="modSp">
-          <pc:chgData name="Xin Zou" userId="260b9726081dae15" providerId="LiveId" clId="{38676C1A-CF62-4DBE-B095-D63BA33FC8BE}" dt="2018-10-08T04:25:15.617" v="0"/>
-          <pc:sldLayoutMkLst>
-            <pc:docMk/>
-            <pc:sldMasterMk cId="846276100" sldId="2147483780"/>
-            <pc:sldLayoutMk cId="116513520" sldId="2147483788"/>
-          </pc:sldLayoutMkLst>
-          <pc:spChg chg="mod">
-            <ac:chgData name="Xin Zou" userId="260b9726081dae15" providerId="LiveId" clId="{38676C1A-CF62-4DBE-B095-D63BA33FC8BE}" dt="2018-10-08T04:25:15.617" v="0"/>
-            <ac:spMkLst>
-              <pc:docMk/>
-              <pc:sldMasterMk cId="846276100" sldId="2147483780"/>
-              <pc:sldLayoutMk cId="116513520" sldId="2147483788"/>
-              <ac:spMk id="2" creationId="{00000000-0000-0000-0000-000000000000}"/>
-            </ac:spMkLst>
-          </pc:spChg>
-          <pc:spChg chg="mod">
-            <ac:chgData name="Xin Zou" userId="260b9726081dae15" providerId="LiveId" clId="{38676C1A-CF62-4DBE-B095-D63BA33FC8BE}" dt="2018-10-08T04:25:15.617" v="0"/>
-            <ac:spMkLst>
-              <pc:docMk/>
-              <pc:sldMasterMk cId="846276100" sldId="2147483780"/>
-              <pc:sldLayoutMk cId="116513520" sldId="2147483788"/>
-              <ac:spMk id="3" creationId="{00000000-0000-0000-0000-000000000000}"/>
-            </ac:spMkLst>
-          </pc:spChg>
-          <pc:spChg chg="mod">
-            <ac:chgData name="Xin Zou" userId="260b9726081dae15" providerId="LiveId" clId="{38676C1A-CF62-4DBE-B095-D63BA33FC8BE}" dt="2018-10-08T04:25:15.617" v="0"/>
-            <ac:spMkLst>
-              <pc:docMk/>
-              <pc:sldMasterMk cId="846276100" sldId="2147483780"/>
-              <pc:sldLayoutMk cId="116513520" sldId="2147483788"/>
-              <ac:spMk id="4" creationId="{00000000-0000-0000-0000-000000000000}"/>
-            </ac:spMkLst>
-          </pc:spChg>
-          <pc:spChg chg="mod">
-            <ac:chgData name="Xin Zou" userId="260b9726081dae15" providerId="LiveId" clId="{38676C1A-CF62-4DBE-B095-D63BA33FC8BE}" dt="2018-10-08T04:25:15.617" v="0"/>
-            <ac:spMkLst>
-              <pc:docMk/>
-              <pc:sldMasterMk cId="846276100" sldId="2147483780"/>
-              <pc:sldLayoutMk cId="116513520" sldId="2147483788"/>
-              <ac:spMk id="9" creationId="{00000000-0000-0000-0000-000000000000}"/>
-            </ac:spMkLst>
-          </pc:spChg>
-          <pc:spChg chg="mod">
-            <ac:chgData name="Xin Zou" userId="260b9726081dae15" providerId="LiveId" clId="{38676C1A-CF62-4DBE-B095-D63BA33FC8BE}" dt="2018-10-08T04:25:15.617" v="0"/>
-            <ac:spMkLst>
-              <pc:docMk/>
-              <pc:sldMasterMk cId="846276100" sldId="2147483780"/>
-              <pc:sldLayoutMk cId="116513520" sldId="2147483788"/>
-              <ac:spMk id="12" creationId="{00000000-0000-0000-0000-000000000000}"/>
-            </ac:spMkLst>
-          </pc:spChg>
-        </pc:sldLayoutChg>
-        <pc:sldLayoutChg chg="modSp">
-          <pc:chgData name="Xin Zou" userId="260b9726081dae15" providerId="LiveId" clId="{38676C1A-CF62-4DBE-B095-D63BA33FC8BE}" dt="2018-10-08T04:25:15.617" v="0"/>
-          <pc:sldLayoutMkLst>
-            <pc:docMk/>
-            <pc:sldMasterMk cId="846276100" sldId="2147483780"/>
-            <pc:sldLayoutMk cId="82185721" sldId="2147483789"/>
-          </pc:sldLayoutMkLst>
-          <pc:spChg chg="mod">
-            <ac:chgData name="Xin Zou" userId="260b9726081dae15" providerId="LiveId" clId="{38676C1A-CF62-4DBE-B095-D63BA33FC8BE}" dt="2018-10-08T04:25:15.617" v="0"/>
-            <ac:spMkLst>
-              <pc:docMk/>
-              <pc:sldMasterMk cId="846276100" sldId="2147483780"/>
-              <pc:sldLayoutMk cId="82185721" sldId="2147483789"/>
-              <ac:spMk id="2" creationId="{00000000-0000-0000-0000-000000000000}"/>
-            </ac:spMkLst>
-          </pc:spChg>
-          <pc:spChg chg="mod">
-            <ac:chgData name="Xin Zou" userId="260b9726081dae15" providerId="LiveId" clId="{38676C1A-CF62-4DBE-B095-D63BA33FC8BE}" dt="2018-10-08T04:25:15.617" v="0"/>
-            <ac:spMkLst>
-              <pc:docMk/>
-              <pc:sldMasterMk cId="846276100" sldId="2147483780"/>
-              <pc:sldLayoutMk cId="82185721" sldId="2147483789"/>
-              <ac:spMk id="3" creationId="{00000000-0000-0000-0000-000000000000}"/>
-            </ac:spMkLst>
-          </pc:spChg>
-          <pc:spChg chg="mod">
-            <ac:chgData name="Xin Zou" userId="260b9726081dae15" providerId="LiveId" clId="{38676C1A-CF62-4DBE-B095-D63BA33FC8BE}" dt="2018-10-08T04:25:15.617" v="0"/>
-            <ac:spMkLst>
-              <pc:docMk/>
-              <pc:sldMasterMk cId="846276100" sldId="2147483780"/>
-              <pc:sldLayoutMk cId="82185721" sldId="2147483789"/>
-              <ac:spMk id="4" creationId="{00000000-0000-0000-0000-000000000000}"/>
-            </ac:spMkLst>
-          </pc:spChg>
-          <pc:spChg chg="mod">
-            <ac:chgData name="Xin Zou" userId="260b9726081dae15" providerId="LiveId" clId="{38676C1A-CF62-4DBE-B095-D63BA33FC8BE}" dt="2018-10-08T04:25:15.617" v="0"/>
-            <ac:spMkLst>
-              <pc:docMk/>
-              <pc:sldMasterMk cId="846276100" sldId="2147483780"/>
-              <pc:sldLayoutMk cId="82185721" sldId="2147483789"/>
-              <ac:spMk id="5" creationId="{00000000-0000-0000-0000-000000000000}"/>
-            </ac:spMkLst>
-          </pc:spChg>
-          <pc:spChg chg="mod">
-            <ac:chgData name="Xin Zou" userId="260b9726081dae15" providerId="LiveId" clId="{38676C1A-CF62-4DBE-B095-D63BA33FC8BE}" dt="2018-10-08T04:25:15.617" v="0"/>
-            <ac:spMkLst>
-              <pc:docMk/>
-              <pc:sldMasterMk cId="846276100" sldId="2147483780"/>
-              <pc:sldLayoutMk cId="82185721" sldId="2147483789"/>
-              <ac:spMk id="6" creationId="{00000000-0000-0000-0000-000000000000}"/>
-            </ac:spMkLst>
-          </pc:spChg>
-          <pc:spChg chg="mod">
-            <ac:chgData name="Xin Zou" userId="260b9726081dae15" providerId="LiveId" clId="{38676C1A-CF62-4DBE-B095-D63BA33FC8BE}" dt="2018-10-08T04:25:15.617" v="0"/>
-            <ac:spMkLst>
-              <pc:docMk/>
-              <pc:sldMasterMk cId="846276100" sldId="2147483780"/>
-              <pc:sldLayoutMk cId="82185721" sldId="2147483789"/>
-              <ac:spMk id="7" creationId="{00000000-0000-0000-0000-000000000000}"/>
-            </ac:spMkLst>
-          </pc:spChg>
-          <pc:spChg chg="mod">
-            <ac:chgData name="Xin Zou" userId="260b9726081dae15" providerId="LiveId" clId="{38676C1A-CF62-4DBE-B095-D63BA33FC8BE}" dt="2018-10-08T04:25:15.617" v="0"/>
-            <ac:spMkLst>
-              <pc:docMk/>
-              <pc:sldMasterMk cId="846276100" sldId="2147483780"/>
-              <pc:sldLayoutMk cId="82185721" sldId="2147483789"/>
-              <ac:spMk id="9" creationId="{00000000-0000-0000-0000-000000000000}"/>
-            </ac:spMkLst>
-          </pc:spChg>
-          <pc:spChg chg="mod">
-            <ac:chgData name="Xin Zou" userId="260b9726081dae15" providerId="LiveId" clId="{38676C1A-CF62-4DBE-B095-D63BA33FC8BE}" dt="2018-10-08T04:25:15.617" v="0"/>
-            <ac:spMkLst>
-              <pc:docMk/>
-              <pc:sldMasterMk cId="846276100" sldId="2147483780"/>
-              <pc:sldLayoutMk cId="82185721" sldId="2147483789"/>
-              <ac:spMk id="11" creationId="{00000000-0000-0000-0000-000000000000}"/>
-            </ac:spMkLst>
-          </pc:spChg>
-        </pc:sldLayoutChg>
-        <pc:sldLayoutChg chg="modSp">
-          <pc:chgData name="Xin Zou" userId="260b9726081dae15" providerId="LiveId" clId="{38676C1A-CF62-4DBE-B095-D63BA33FC8BE}" dt="2018-10-08T04:25:15.617" v="0"/>
-          <pc:sldLayoutMkLst>
-            <pc:docMk/>
-            <pc:sldMasterMk cId="846276100" sldId="2147483780"/>
-            <pc:sldLayoutMk cId="3266833299" sldId="2147483791"/>
-          </pc:sldLayoutMkLst>
-          <pc:spChg chg="mod">
-            <ac:chgData name="Xin Zou" userId="260b9726081dae15" providerId="LiveId" clId="{38676C1A-CF62-4DBE-B095-D63BA33FC8BE}" dt="2018-10-08T04:25:15.617" v="0"/>
-            <ac:spMkLst>
-              <pc:docMk/>
-              <pc:sldMasterMk cId="846276100" sldId="2147483780"/>
-              <pc:sldLayoutMk cId="3266833299" sldId="2147483791"/>
-              <ac:spMk id="2" creationId="{00000000-0000-0000-0000-000000000000}"/>
-            </ac:spMkLst>
-          </pc:spChg>
-          <pc:spChg chg="mod">
-            <ac:chgData name="Xin Zou" userId="260b9726081dae15" providerId="LiveId" clId="{38676C1A-CF62-4DBE-B095-D63BA33FC8BE}" dt="2018-10-08T04:25:15.617" v="0"/>
-            <ac:spMkLst>
-              <pc:docMk/>
-              <pc:sldMasterMk cId="846276100" sldId="2147483780"/>
-              <pc:sldLayoutMk cId="3266833299" sldId="2147483791"/>
-              <ac:spMk id="3" creationId="{00000000-0000-0000-0000-000000000000}"/>
-            </ac:spMkLst>
-          </pc:spChg>
-          <pc:spChg chg="mod">
-            <ac:chgData name="Xin Zou" userId="260b9726081dae15" providerId="LiveId" clId="{38676C1A-CF62-4DBE-B095-D63BA33FC8BE}" dt="2018-10-08T04:25:15.617" v="0"/>
-            <ac:spMkLst>
-              <pc:docMk/>
-              <pc:sldMasterMk cId="846276100" sldId="2147483780"/>
-              <pc:sldLayoutMk cId="3266833299" sldId="2147483791"/>
-              <ac:spMk id="5" creationId="{00000000-0000-0000-0000-000000000000}"/>
-            </ac:spMkLst>
-          </pc:spChg>
-          <pc:spChg chg="mod">
-            <ac:chgData name="Xin Zou" userId="260b9726081dae15" providerId="LiveId" clId="{38676C1A-CF62-4DBE-B095-D63BA33FC8BE}" dt="2018-10-08T04:25:15.617" v="0"/>
-            <ac:spMkLst>
-              <pc:docMk/>
-              <pc:sldMasterMk cId="846276100" sldId="2147483780"/>
-              <pc:sldLayoutMk cId="3266833299" sldId="2147483791"/>
-              <ac:spMk id="8" creationId="{00000000-0000-0000-0000-000000000000}"/>
-            </ac:spMkLst>
-          </pc:spChg>
-          <pc:spChg chg="mod">
-            <ac:chgData name="Xin Zou" userId="260b9726081dae15" providerId="LiveId" clId="{38676C1A-CF62-4DBE-B095-D63BA33FC8BE}" dt="2018-10-08T04:25:15.617" v="0"/>
-            <ac:spMkLst>
-              <pc:docMk/>
-              <pc:sldMasterMk cId="846276100" sldId="2147483780"/>
-              <pc:sldLayoutMk cId="3266833299" sldId="2147483791"/>
-              <ac:spMk id="9" creationId="{00000000-0000-0000-0000-000000000000}"/>
-            </ac:spMkLst>
-          </pc:spChg>
-        </pc:sldLayoutChg>
-      </pc:sldMasterChg>
     </pc:docChg>
   </pc:docChgLst>
 </pc:chgInfo>
@@ -1214,7 +479,7 @@
             <a:fld id="{F04650A2-B221-45B7-8BFD-302FFBB7179C}" type="datetimeFigureOut">
               <a:rPr lang="en-US" smtClean="0"/>
               <a:pPr/>
-              <a:t>9/4/2019</a:t>
+              <a:t>5/6/2026</a:t>
             </a:fld>
             <a:endParaRPr lang="en-US"/>
           </a:p>
@@ -2412,7 +1677,7 @@
           <a:p>
             <a:fld id="{48A87A34-81AB-432B-8DAE-1953F412C126}" type="datetimeFigureOut">
               <a:rPr lang="en-US" smtClean="0"/>
-              <a:t>9/4/2019</a:t>
+              <a:t>5/6/2026</a:t>
             </a:fld>
             <a:endParaRPr lang="en-US" dirty="0"/>
           </a:p>
@@ -2694,7 +1959,7 @@
             <a:fld id="{48A87A34-81AB-432B-8DAE-1953F412C126}" type="datetimeFigureOut">
               <a:rPr lang="en-US" smtClean="0"/>
               <a:pPr/>
-              <a:t>9/4/2019</a:t>
+              <a:t>5/6/2026</a:t>
             </a:fld>
             <a:endParaRPr lang="en-US" dirty="0"/>
           </a:p>
@@ -2888,7 +2153,7 @@
             <a:fld id="{48A87A34-81AB-432B-8DAE-1953F412C126}" type="datetimeFigureOut">
               <a:rPr lang="en-US" smtClean="0"/>
               <a:pPr/>
-              <a:t>9/4/2019</a:t>
+              <a:t>5/6/2026</a:t>
             </a:fld>
             <a:endParaRPr lang="en-US" dirty="0"/>
           </a:p>
@@ -3151,7 +2416,7 @@
             <a:fld id="{48A87A34-81AB-432B-8DAE-1953F412C126}" type="datetimeFigureOut">
               <a:rPr lang="en-US" smtClean="0"/>
               <a:pPr/>
-              <a:t>9/4/2019</a:t>
+              <a:t>5/6/2026</a:t>
             </a:fld>
             <a:endParaRPr lang="en-US" dirty="0"/>
           </a:p>
@@ -3579,7 +2844,7 @@
             <a:fld id="{48A87A34-81AB-432B-8DAE-1953F412C126}" type="datetimeFigureOut">
               <a:rPr lang="en-US" smtClean="0"/>
               <a:pPr/>
-              <a:t>9/4/2019</a:t>
+              <a:t>5/6/2026</a:t>
             </a:fld>
             <a:endParaRPr lang="en-US" dirty="0"/>
           </a:p>
@@ -4127,7 +3392,7 @@
             <a:fld id="{48A87A34-81AB-432B-8DAE-1953F412C126}" type="datetimeFigureOut">
               <a:rPr lang="en-US" smtClean="0"/>
               <a:pPr/>
-              <a:t>9/4/2019</a:t>
+              <a:t>5/6/2026</a:t>
             </a:fld>
             <a:endParaRPr lang="en-US" dirty="0"/>
           </a:p>
@@ -4960,7 +4225,7 @@
             <a:fld id="{48A87A34-81AB-432B-8DAE-1953F412C126}" type="datetimeFigureOut">
               <a:rPr lang="en-US" smtClean="0"/>
               <a:pPr/>
-              <a:t>9/4/2019</a:t>
+              <a:t>5/6/2026</a:t>
             </a:fld>
             <a:endParaRPr lang="en-US" dirty="0"/>
           </a:p>
@@ -5131,7 +4396,7 @@
           <a:p>
             <a:fld id="{48A87A34-81AB-432B-8DAE-1953F412C126}" type="datetimeFigureOut">
               <a:rPr lang="en-US" smtClean="0"/>
-              <a:t>9/4/2019</a:t>
+              <a:t>5/6/2026</a:t>
             </a:fld>
             <a:endParaRPr lang="en-US" dirty="0"/>
           </a:p>
@@ -5311,7 +4576,7 @@
           <a:p>
             <a:fld id="{48A87A34-81AB-432B-8DAE-1953F412C126}" type="datetimeFigureOut">
               <a:rPr lang="en-US" smtClean="0"/>
-              <a:t>9/4/2019</a:t>
+              <a:t>5/6/2026</a:t>
             </a:fld>
             <a:endParaRPr lang="en-US" dirty="0"/>
           </a:p>
@@ -5481,7 +4746,7 @@
           <a:p>
             <a:fld id="{48A87A34-81AB-432B-8DAE-1953F412C126}" type="datetimeFigureOut">
               <a:rPr lang="en-US" smtClean="0"/>
-              <a:t>9/4/2019</a:t>
+              <a:t>5/6/2026</a:t>
             </a:fld>
             <a:endParaRPr lang="en-US" dirty="0"/>
           </a:p>
@@ -5738,7 +5003,7 @@
           <a:p>
             <a:fld id="{48A87A34-81AB-432B-8DAE-1953F412C126}" type="datetimeFigureOut">
               <a:rPr lang="en-US" smtClean="0"/>
-              <a:t>9/4/2019</a:t>
+              <a:t>5/6/2026</a:t>
             </a:fld>
             <a:endParaRPr lang="en-US" dirty="0"/>
           </a:p>
@@ -5970,7 +5235,7 @@
           <a:p>
             <a:fld id="{48A87A34-81AB-432B-8DAE-1953F412C126}" type="datetimeFigureOut">
               <a:rPr lang="en-US" smtClean="0"/>
-              <a:t>9/4/2019</a:t>
+              <a:t>5/6/2026</a:t>
             </a:fld>
             <a:endParaRPr lang="en-US" dirty="0"/>
           </a:p>
@@ -6363,7 +5628,7 @@
           <a:p>
             <a:fld id="{48A87A34-81AB-432B-8DAE-1953F412C126}" type="datetimeFigureOut">
               <a:rPr lang="en-US" smtClean="0"/>
-              <a:t>9/4/2019</a:t>
+              <a:t>5/6/2026</a:t>
             </a:fld>
             <a:endParaRPr lang="en-US" dirty="0"/>
           </a:p>
@@ -6481,7 +5746,7 @@
           <a:p>
             <a:fld id="{48A87A34-81AB-432B-8DAE-1953F412C126}" type="datetimeFigureOut">
               <a:rPr lang="en-US" smtClean="0"/>
-              <a:t>9/4/2019</a:t>
+              <a:t>5/6/2026</a:t>
             </a:fld>
             <a:endParaRPr lang="en-US" dirty="0"/>
           </a:p>
@@ -6576,7 +5841,7 @@
           <a:p>
             <a:fld id="{48A87A34-81AB-432B-8DAE-1953F412C126}" type="datetimeFigureOut">
               <a:rPr lang="en-US" smtClean="0"/>
-              <a:t>9/4/2019</a:t>
+              <a:t>5/6/2026</a:t>
             </a:fld>
             <a:endParaRPr lang="en-US" dirty="0"/>
           </a:p>
@@ -6849,7 +6114,7 @@
           <a:p>
             <a:fld id="{48A87A34-81AB-432B-8DAE-1953F412C126}" type="datetimeFigureOut">
               <a:rPr lang="en-US" smtClean="0"/>
-              <a:t>9/4/2019</a:t>
+              <a:t>5/6/2026</a:t>
             </a:fld>
             <a:endParaRPr lang="en-US" dirty="0"/>
           </a:p>
@@ -7130,7 +6395,7 @@
           <a:p>
             <a:fld id="{48A87A34-81AB-432B-8DAE-1953F412C126}" type="datetimeFigureOut">
               <a:rPr lang="en-US" smtClean="0"/>
-              <a:t>9/4/2019</a:t>
+              <a:t>5/6/2026</a:t>
             </a:fld>
             <a:endParaRPr lang="en-US" dirty="0"/>
           </a:p>
@@ -7371,7 +6636,7 @@
             <a:fld id="{48A87A34-81AB-432B-8DAE-1953F412C126}" type="datetimeFigureOut">
               <a:rPr lang="en-US" smtClean="0"/>
               <a:pPr/>
-              <a:t>9/4/2019</a:t>
+              <a:t>5/6/2026</a:t>
             </a:fld>
             <a:endParaRPr lang="en-US" dirty="0"/>
           </a:p>
@@ -12615,6 +11880,529 @@
     </p:bg>
     <p:spTree>
       <p:nvGrpSpPr>
+        <p:cNvPr id="1" name="">
+          <a:extLst>
+            <a:ext uri="{FF2B5EF4-FFF2-40B4-BE49-F238E27FC236}">
+              <a16:creationId xmlns:a16="http://schemas.microsoft.com/office/drawing/2014/main" id="{81E62C2C-6DE6-523E-489E-0098EB8BD1E2}"/>
+            </a:ext>
+          </a:extLst>
+        </p:cNvPr>
+        <p:cNvGrpSpPr/>
+        <p:nvPr/>
+      </p:nvGrpSpPr>
+      <p:grpSpPr>
+        <a:xfrm>
+          <a:off x="0" y="0"/>
+          <a:ext cx="0" cy="0"/>
+          <a:chOff x="0" y="0"/>
+          <a:chExt cx="0" cy="0"/>
+        </a:xfrm>
+      </p:grpSpPr>
+      <p:sp>
+        <p:nvSpPr>
+          <p:cNvPr id="8" name="Rectangle 10">
+            <a:extLst>
+              <a:ext uri="{FF2B5EF4-FFF2-40B4-BE49-F238E27FC236}">
+                <a16:creationId xmlns:a16="http://schemas.microsoft.com/office/drawing/2014/main" id="{4A079BE1-ED93-4445-AD4A-0D67109702E7}"/>
+              </a:ext>
+              <a:ext uri="{C183D7F6-B498-43B3-948B-1728B52AA6E4}">
+                <adec:decorative xmlns:adec="http://schemas.microsoft.com/office/drawing/2017/decorative" val="1"/>
+              </a:ext>
+            </a:extLst>
+          </p:cNvPr>
+          <p:cNvSpPr>
+            <a:spLocks noGrp="1" noRot="1" noChangeAspect="1" noMove="1" noResize="1" noEditPoints="1" noAdjustHandles="1" noChangeArrowheads="1" noChangeShapeType="1" noTextEdit="1"/>
+          </p:cNvSpPr>
+          <p:nvPr>
+            <p:extLst>
+              <p:ext uri="{386F3935-93C4-4BCD-93E2-E3B085C9AB24}">
+                <p16:designElem xmlns:p16="http://schemas.microsoft.com/office/powerpoint/2015/main" val="1"/>
+              </p:ext>
+            </p:extLst>
+          </p:nvPr>
+        </p:nvSpPr>
+        <p:spPr>
+          <a:xfrm>
+            <a:off x="0" y="0"/>
+            <a:ext cx="12192000" cy="4571998"/>
+          </a:xfrm>
+          <a:prstGeom prst="rect">
+            <a:avLst/>
+          </a:prstGeom>
+          <a:solidFill>
+            <a:schemeClr val="bg1">
+              <a:alpha val="10000"/>
+            </a:schemeClr>
+          </a:solidFill>
+          <a:ln>
+            <a:noFill/>
+          </a:ln>
+          <a:effectLst>
+            <a:innerShdw blurRad="139700" dist="50800" dir="5400000">
+              <a:prstClr val="black">
+                <a:alpha val="20000"/>
+              </a:prstClr>
+            </a:innerShdw>
+          </a:effectLst>
+        </p:spPr>
+        <p:style>
+          <a:lnRef idx="2">
+            <a:schemeClr val="accent1">
+              <a:shade val="50000"/>
+            </a:schemeClr>
+          </a:lnRef>
+          <a:fillRef idx="1">
+            <a:schemeClr val="accent1"/>
+          </a:fillRef>
+          <a:effectRef idx="0">
+            <a:schemeClr val="accent1"/>
+          </a:effectRef>
+          <a:fontRef idx="minor">
+            <a:schemeClr val="lt1"/>
+          </a:fontRef>
+        </p:style>
+        <p:txBody>
+          <a:bodyPr rtlCol="0" anchor="ctr"/>
+          <a:lstStyle/>
+          <a:p>
+            <a:pPr algn="ctr"/>
+            <a:endParaRPr lang="en-US"/>
+          </a:p>
+        </p:txBody>
+      </p:sp>
+      <p:sp useBgFill="1">
+        <p:nvSpPr>
+          <p:cNvPr id="13" name="Rectangle 12">
+            <a:extLst>
+              <a:ext uri="{FF2B5EF4-FFF2-40B4-BE49-F238E27FC236}">
+                <a16:creationId xmlns:a16="http://schemas.microsoft.com/office/drawing/2014/main" id="{3F6C79BF-A4E0-4CC8-952B-C736485CAFF4}"/>
+              </a:ext>
+              <a:ext uri="{C183D7F6-B498-43B3-948B-1728B52AA6E4}">
+                <adec:decorative xmlns:adec="http://schemas.microsoft.com/office/drawing/2017/decorative" val="1"/>
+              </a:ext>
+            </a:extLst>
+          </p:cNvPr>
+          <p:cNvSpPr>
+            <a:spLocks noGrp="1" noRot="1" noChangeAspect="1" noMove="1" noResize="1" noEditPoints="1" noAdjustHandles="1" noChangeArrowheads="1" noChangeShapeType="1" noTextEdit="1"/>
+          </p:cNvSpPr>
+          <p:nvPr>
+            <p:extLst>
+              <p:ext uri="{386F3935-93C4-4BCD-93E2-E3B085C9AB24}">
+                <p16:designElem xmlns:p16="http://schemas.microsoft.com/office/powerpoint/2015/main" val="1"/>
+              </p:ext>
+            </p:extLst>
+          </p:nvPr>
+        </p:nvSpPr>
+        <p:spPr>
+          <a:xfrm>
+            <a:off x="0" y="4571997"/>
+            <a:ext cx="12192000" cy="2285999"/>
+          </a:xfrm>
+          <a:prstGeom prst="rect">
+            <a:avLst/>
+          </a:prstGeom>
+          <a:ln>
+            <a:noFill/>
+          </a:ln>
+          <a:effectLst>
+            <a:outerShdw blurRad="50800" dist="38100" dir="16200000" rotWithShape="0">
+              <a:prstClr val="black">
+                <a:alpha val="40000"/>
+              </a:prstClr>
+            </a:outerShdw>
+          </a:effectLst>
+        </p:spPr>
+        <p:style>
+          <a:lnRef idx="2">
+            <a:schemeClr val="accent1">
+              <a:shade val="50000"/>
+            </a:schemeClr>
+          </a:lnRef>
+          <a:fillRef idx="1">
+            <a:schemeClr val="accent1"/>
+          </a:fillRef>
+          <a:effectRef idx="0">
+            <a:schemeClr val="accent1"/>
+          </a:effectRef>
+          <a:fontRef idx="minor">
+            <a:schemeClr val="lt1"/>
+          </a:fontRef>
+        </p:style>
+        <p:txBody>
+          <a:bodyPr rtlCol="0" anchor="ctr"/>
+          <a:lstStyle/>
+          <a:p>
+            <a:pPr algn="ctr"/>
+            <a:endParaRPr lang="en-US"/>
+          </a:p>
+        </p:txBody>
+      </p:sp>
+      <p:sp>
+        <p:nvSpPr>
+          <p:cNvPr id="2" name="标题 1">
+            <a:extLst>
+              <a:ext uri="{FF2B5EF4-FFF2-40B4-BE49-F238E27FC236}">
+                <a16:creationId xmlns:a16="http://schemas.microsoft.com/office/drawing/2014/main" id="{1BCB5A19-B3AF-1A55-223F-75EC51F317B0}"/>
+              </a:ext>
+            </a:extLst>
+          </p:cNvPr>
+          <p:cNvSpPr>
+            <a:spLocks noGrp="1"/>
+          </p:cNvSpPr>
+          <p:nvPr>
+            <p:ph type="title"/>
+          </p:nvPr>
+        </p:nvSpPr>
+        <p:spPr>
+          <a:xfrm>
+            <a:off x="643467" y="4736441"/>
+            <a:ext cx="1853005" cy="1395140"/>
+          </a:xfrm>
+        </p:spPr>
+        <p:txBody>
+          <a:bodyPr anchor="ctr">
+            <a:normAutofit/>
+          </a:bodyPr>
+          <a:lstStyle/>
+          <a:p>
+            <a:pPr algn="r"/>
+            <a:r>
+              <a:rPr lang="zh-CN" altLang="en-US" sz="3200" dirty="0">
+                <a:solidFill>
+                  <a:schemeClr val="tx1"/>
+                </a:solidFill>
+              </a:rPr>
+              <a:t>各种方法</a:t>
+            </a:r>
+            <a:endParaRPr lang="en-US" sz="3200" dirty="0">
+              <a:solidFill>
+                <a:schemeClr val="tx1"/>
+              </a:solidFill>
+            </a:endParaRPr>
+          </a:p>
+        </p:txBody>
+      </p:sp>
+      <p:pic>
+        <p:nvPicPr>
+          <p:cNvPr id="6" name="图片 5">
+            <a:extLst>
+              <a:ext uri="{FF2B5EF4-FFF2-40B4-BE49-F238E27FC236}">
+                <a16:creationId xmlns:a16="http://schemas.microsoft.com/office/drawing/2014/main" id="{0CC04E94-6A1A-51C3-A6BF-3AF6CB38147F}"/>
+              </a:ext>
+            </a:extLst>
+          </p:cNvPr>
+          <p:cNvPicPr>
+            <a:picLocks noChangeAspect="1"/>
+          </p:cNvPicPr>
+          <p:nvPr/>
+        </p:nvPicPr>
+        <p:blipFill>
+          <a:blip r:embed="rId3"/>
+          <a:stretch>
+            <a:fillRect/>
+          </a:stretch>
+        </p:blipFill>
+        <p:spPr>
+          <a:xfrm>
+            <a:off x="643467" y="1025014"/>
+            <a:ext cx="10905066" cy="2835316"/>
+          </a:xfrm>
+          <a:prstGeom prst="rect">
+            <a:avLst/>
+          </a:prstGeom>
+        </p:spPr>
+      </p:pic>
+      <p:sp>
+        <p:nvSpPr>
+          <p:cNvPr id="3" name="内容占位符 2">
+            <a:extLst>
+              <a:ext uri="{FF2B5EF4-FFF2-40B4-BE49-F238E27FC236}">
+                <a16:creationId xmlns:a16="http://schemas.microsoft.com/office/drawing/2014/main" id="{7A831B99-4A25-0C5C-4637-898826B64E22}"/>
+              </a:ext>
+            </a:extLst>
+          </p:cNvPr>
+          <p:cNvSpPr>
+            <a:spLocks noGrp="1"/>
+          </p:cNvSpPr>
+          <p:nvPr>
+            <p:ph idx="1"/>
+          </p:nvPr>
+        </p:nvSpPr>
+        <p:spPr>
+          <a:xfrm>
+            <a:off x="2783163" y="4736439"/>
+            <a:ext cx="6894237" cy="1957111"/>
+          </a:xfrm>
+        </p:spPr>
+        <p:txBody>
+          <a:bodyPr anchor="ctr">
+            <a:normAutofit/>
+          </a:bodyPr>
+          <a:lstStyle/>
+          <a:p>
+            <a:r>
+              <a:rPr lang="zh-CN" altLang="en-US" sz="1400" dirty="0">
+                <a:gradFill>
+                  <a:gsLst>
+                    <a:gs pos="34000">
+                      <a:schemeClr val="tx1">
+                        <a:lumMod val="93000"/>
+                      </a:schemeClr>
+                    </a:gs>
+                    <a:gs pos="0">
+                      <a:schemeClr val="bg1">
+                        <a:lumMod val="25000"/>
+                        <a:lumOff val="75000"/>
+                      </a:schemeClr>
+                    </a:gs>
+                    <a:gs pos="100000">
+                      <a:schemeClr val="tx1"/>
+                    </a:gs>
+                  </a:gsLst>
+                  <a:lin ang="4800000" scaled="0"/>
+                </a:gradFill>
+                <a:latin typeface="+mj-ea"/>
+                <a:ea typeface="+mj-ea"/>
+              </a:rPr>
+              <a:t>根据工作量？根据工作时间？根据资历？ 大锅饭？ 比效率？比不犯错误？ 队友评估？</a:t>
+            </a:r>
+            <a:endParaRPr lang="en-US" altLang="zh-CN" sz="1400" dirty="0">
+              <a:gradFill>
+                <a:gsLst>
+                  <a:gs pos="34000">
+                    <a:schemeClr val="tx1">
+                      <a:lumMod val="93000"/>
+                    </a:schemeClr>
+                  </a:gs>
+                  <a:gs pos="0">
+                    <a:schemeClr val="bg1">
+                      <a:lumMod val="25000"/>
+                      <a:lumOff val="75000"/>
+                    </a:schemeClr>
+                  </a:gs>
+                  <a:gs pos="100000">
+                    <a:schemeClr val="tx1"/>
+                  </a:gs>
+                </a:gsLst>
+                <a:lin ang="4800000" scaled="0"/>
+              </a:gradFill>
+              <a:latin typeface="+mj-ea"/>
+              <a:ea typeface="+mj-ea"/>
+            </a:endParaRPr>
+          </a:p>
+          <a:p>
+            <a:r>
+              <a:rPr lang="en-US" altLang="zh-CN" sz="1400" dirty="0">
+                <a:gradFill>
+                  <a:gsLst>
+                    <a:gs pos="34000">
+                      <a:schemeClr val="tx1">
+                        <a:lumMod val="93000"/>
+                      </a:schemeClr>
+                    </a:gs>
+                    <a:gs pos="0">
+                      <a:schemeClr val="bg1">
+                        <a:lumMod val="25000"/>
+                        <a:lumOff val="75000"/>
+                      </a:schemeClr>
+                    </a:gs>
+                    <a:gs pos="100000">
+                      <a:schemeClr val="tx1"/>
+                    </a:gs>
+                  </a:gsLst>
+                  <a:lin ang="4800000" scaled="0"/>
+                </a:gradFill>
+                <a:latin typeface="+mj-ea"/>
+                <a:ea typeface="+mj-ea"/>
+              </a:rPr>
+              <a:t>20 / 70 / 10 </a:t>
+            </a:r>
+            <a:r>
+              <a:rPr lang="zh-CN" altLang="en-US" sz="1400" dirty="0">
+                <a:gradFill>
+                  <a:gsLst>
+                    <a:gs pos="34000">
+                      <a:schemeClr val="tx1">
+                        <a:lumMod val="93000"/>
+                      </a:schemeClr>
+                    </a:gs>
+                    <a:gs pos="0">
+                      <a:schemeClr val="bg1">
+                        <a:lumMod val="25000"/>
+                        <a:lumOff val="75000"/>
+                      </a:schemeClr>
+                    </a:gs>
+                    <a:gs pos="100000">
+                      <a:schemeClr val="tx1"/>
+                    </a:gs>
+                  </a:gsLst>
+                  <a:lin ang="4800000" scaled="0"/>
+                </a:gradFill>
+                <a:latin typeface="+mj-ea"/>
+                <a:ea typeface="+mj-ea"/>
+              </a:rPr>
+              <a:t>分档次？</a:t>
+            </a:r>
+            <a:endParaRPr lang="en-US" altLang="zh-CN" sz="1400" dirty="0">
+              <a:gradFill>
+                <a:gsLst>
+                  <a:gs pos="34000">
+                    <a:schemeClr val="tx1">
+                      <a:lumMod val="93000"/>
+                    </a:schemeClr>
+                  </a:gs>
+                  <a:gs pos="0">
+                    <a:schemeClr val="bg1">
+                      <a:lumMod val="25000"/>
+                      <a:lumOff val="75000"/>
+                    </a:schemeClr>
+                  </a:gs>
+                  <a:gs pos="100000">
+                    <a:schemeClr val="tx1"/>
+                  </a:gs>
+                </a:gsLst>
+                <a:lin ang="4800000" scaled="0"/>
+              </a:gradFill>
+              <a:latin typeface="+mj-ea"/>
+              <a:ea typeface="+mj-ea"/>
+            </a:endParaRPr>
+          </a:p>
+          <a:p>
+            <a:r>
+              <a:rPr lang="zh-CN" altLang="en-US" sz="1400" dirty="0">
+                <a:gradFill>
+                  <a:gsLst>
+                    <a:gs pos="34000">
+                      <a:schemeClr val="tx1">
+                        <a:lumMod val="93000"/>
+                      </a:schemeClr>
+                    </a:gs>
+                    <a:gs pos="0">
+                      <a:schemeClr val="bg1">
+                        <a:lumMod val="25000"/>
+                        <a:lumOff val="75000"/>
+                      </a:schemeClr>
+                    </a:gs>
+                    <a:gs pos="100000">
+                      <a:schemeClr val="tx1"/>
+                    </a:gs>
+                  </a:gsLst>
+                  <a:lin ang="4800000" scaled="0"/>
+                </a:gradFill>
+                <a:latin typeface="+mj-ea"/>
+                <a:ea typeface="+mj-ea"/>
+              </a:rPr>
+              <a:t>二维表格判定工作结果和影响力？</a:t>
+            </a:r>
+            <a:endParaRPr lang="en-US" altLang="zh-CN" sz="1400" dirty="0">
+              <a:gradFill>
+                <a:gsLst>
+                  <a:gs pos="34000">
+                    <a:schemeClr val="tx1">
+                      <a:lumMod val="93000"/>
+                    </a:schemeClr>
+                  </a:gs>
+                  <a:gs pos="0">
+                    <a:schemeClr val="bg1">
+                      <a:lumMod val="25000"/>
+                      <a:lumOff val="75000"/>
+                    </a:schemeClr>
+                  </a:gs>
+                  <a:gs pos="100000">
+                    <a:schemeClr val="tx1"/>
+                  </a:gs>
+                </a:gsLst>
+                <a:lin ang="4800000" scaled="0"/>
+              </a:gradFill>
+              <a:latin typeface="+mj-ea"/>
+              <a:ea typeface="+mj-ea"/>
+            </a:endParaRPr>
+          </a:p>
+          <a:p>
+            <a:r>
+              <a:rPr lang="zh-CN" altLang="en-US" sz="1400" dirty="0">
+                <a:gradFill>
+                  <a:gsLst>
+                    <a:gs pos="34000">
+                      <a:schemeClr val="tx1">
+                        <a:lumMod val="93000"/>
+                      </a:schemeClr>
+                    </a:gs>
+                    <a:gs pos="0">
+                      <a:schemeClr val="bg1">
+                        <a:lumMod val="25000"/>
+                        <a:lumOff val="75000"/>
+                      </a:schemeClr>
+                    </a:gs>
+                    <a:gs pos="100000">
+                      <a:schemeClr val="tx1"/>
+                    </a:gs>
+                  </a:gsLst>
+                  <a:lin ang="4800000" scaled="0"/>
+                </a:gradFill>
+                <a:latin typeface="+mj-ea"/>
+                <a:ea typeface="+mj-ea"/>
+              </a:rPr>
+              <a:t>划分等级，公开刺激？闷声发大财</a:t>
+            </a:r>
+            <a:endParaRPr lang="en-US" sz="1400" dirty="0">
+              <a:gradFill>
+                <a:gsLst>
+                  <a:gs pos="34000">
+                    <a:schemeClr val="tx1">
+                      <a:lumMod val="93000"/>
+                    </a:schemeClr>
+                  </a:gs>
+                  <a:gs pos="0">
+                    <a:schemeClr val="bg1">
+                      <a:lumMod val="25000"/>
+                      <a:lumOff val="75000"/>
+                    </a:schemeClr>
+                  </a:gs>
+                  <a:gs pos="100000">
+                    <a:schemeClr val="tx1"/>
+                  </a:gs>
+                </a:gsLst>
+                <a:lin ang="4800000" scaled="0"/>
+              </a:gradFill>
+              <a:latin typeface="+mj-ea"/>
+              <a:ea typeface="+mj-ea"/>
+            </a:endParaRPr>
+          </a:p>
+        </p:txBody>
+      </p:sp>
+    </p:spTree>
+    <p:extLst>
+      <p:ext uri="{BB962C8B-B14F-4D97-AF65-F5344CB8AC3E}">
+        <p14:creationId xmlns:p14="http://schemas.microsoft.com/office/powerpoint/2010/main" val="2423002010"/>
+      </p:ext>
+    </p:extLst>
+  </p:cSld>
+  <p:clrMapOvr>
+    <a:masterClrMapping/>
+  </p:clrMapOvr>
+</p:sld>
+</file>
+
+<file path=ppt/slides/slide33.xml><?xml version="1.0" encoding="utf-8"?>
+<p:sld xmlns:a="http://schemas.openxmlformats.org/drawingml/2006/main" xmlns:r="http://schemas.openxmlformats.org/officeDocument/2006/relationships" xmlns:p="http://schemas.openxmlformats.org/presentationml/2006/main">
+  <p:cSld>
+    <p:bg>
+      <p:bgPr>
+        <a:blipFill dpi="0" rotWithShape="1">
+          <a:blip r:embed="rId2">
+            <a:lum/>
+          </a:blip>
+          <a:srcRect/>
+          <a:stretch>
+            <a:fillRect/>
+          </a:stretch>
+        </a:blipFill>
+        <a:effectLst/>
+      </p:bgPr>
+    </p:bg>
+    <p:spTree>
+      <p:nvGrpSpPr>
         <p:cNvPr id="1" name=""/>
         <p:cNvGrpSpPr/>
         <p:nvPr/>
@@ -12819,7 +12607,7 @@
 </p:sld>
 </file>
 
-<file path=ppt/slides/slide33.xml><?xml version="1.0" encoding="utf-8"?>
+<file path=ppt/slides/slide34.xml><?xml version="1.0" encoding="utf-8"?>
 <p:sld xmlns:a="http://schemas.openxmlformats.org/drawingml/2006/main" xmlns:r="http://schemas.openxmlformats.org/officeDocument/2006/relationships" xmlns:p="http://schemas.openxmlformats.org/presentationml/2006/main">
   <p:cSld>
     <p:spTree>
@@ -12919,7 +12707,7 @@
 </p:sld>
 </file>
 
-<file path=ppt/slides/slide34.xml><?xml version="1.0" encoding="utf-8"?>
+<file path=ppt/slides/slide35.xml><?xml version="1.0" encoding="utf-8"?>
 <p:sld xmlns:a="http://schemas.openxmlformats.org/drawingml/2006/main" xmlns:r="http://schemas.openxmlformats.org/officeDocument/2006/relationships" xmlns:p="http://schemas.openxmlformats.org/presentationml/2006/main">
   <p:cSld>
     <p:spTree>
@@ -13079,7 +12867,7 @@
 </p:sld>
 </file>
 
-<file path=ppt/slides/slide35.xml><?xml version="1.0" encoding="utf-8"?>
+<file path=ppt/slides/slide36.xml><?xml version="1.0" encoding="utf-8"?>
 <p:sld xmlns:a="http://schemas.openxmlformats.org/drawingml/2006/main" xmlns:r="http://schemas.openxmlformats.org/officeDocument/2006/relationships" xmlns:p="http://schemas.openxmlformats.org/presentationml/2006/main">
   <p:cSld>
     <p:bg>
@@ -13536,277 +13324,6 @@
 </p:sld>
 </file>
 
-<file path=ppt/slides/slide36.xml><?xml version="1.0" encoding="utf-8"?>
-<p:sld xmlns:a="http://schemas.openxmlformats.org/drawingml/2006/main" xmlns:r="http://schemas.openxmlformats.org/officeDocument/2006/relationships" xmlns:p="http://schemas.openxmlformats.org/presentationml/2006/main">
-  <p:cSld>
-    <p:spTree>
-      <p:nvGrpSpPr>
-        <p:cNvPr id="1" name=""/>
-        <p:cNvGrpSpPr/>
-        <p:nvPr/>
-      </p:nvGrpSpPr>
-      <p:grpSpPr>
-        <a:xfrm>
-          <a:off x="0" y="0"/>
-          <a:ext cx="0" cy="0"/>
-          <a:chOff x="0" y="0"/>
-          <a:chExt cx="0" cy="0"/>
-        </a:xfrm>
-      </p:grpSpPr>
-      <p:sp>
-        <p:nvSpPr>
-          <p:cNvPr id="2" name="标题 1"/>
-          <p:cNvSpPr>
-            <a:spLocks noGrp="1"/>
-          </p:cNvSpPr>
-          <p:nvPr>
-            <p:ph type="title"/>
-          </p:nvPr>
-        </p:nvSpPr>
-        <p:spPr/>
-        <p:txBody>
-          <a:bodyPr/>
-          <a:lstStyle/>
-          <a:p>
-            <a:r>
-              <a:rPr lang="zh-CN" altLang="en-US" dirty="0"/>
-              <a:t>合作伙伴评分</a:t>
-            </a:r>
-            <a:endParaRPr lang="en-US" dirty="0"/>
-          </a:p>
-        </p:txBody>
-      </p:sp>
-      <p:sp>
-        <p:nvSpPr>
-          <p:cNvPr id="3" name="内容占位符 2"/>
-          <p:cNvSpPr>
-            <a:spLocks noGrp="1"/>
-          </p:cNvSpPr>
-          <p:nvPr>
-            <p:ph idx="1"/>
-          </p:nvPr>
-        </p:nvSpPr>
-        <p:spPr/>
-        <p:txBody>
-          <a:bodyPr>
-            <a:normAutofit fontScale="55000" lnSpcReduction="20000"/>
-          </a:bodyPr>
-          <a:lstStyle/>
-          <a:p>
-            <a:pPr marL="118872" indent="0">
-              <a:lnSpc>
-                <a:spcPct val="120000"/>
-              </a:lnSpc>
-              <a:buNone/>
-            </a:pPr>
-            <a:r>
-              <a:rPr lang="zh-CN" altLang="en-US" dirty="0"/>
-              <a:t>在这个软件工程课上，你有机会和</a:t>
-            </a:r>
-            <a:r>
-              <a:rPr lang="en-US" altLang="zh-CN" dirty="0"/>
-              <a:t>5–7</a:t>
-            </a:r>
-            <a:r>
-              <a:rPr lang="zh-CN" altLang="en-US" dirty="0"/>
-              <a:t>名同学进行了深度的合作，那么，谁的合作精神好？ 在课程的最后阶段，每个人列出一个一维的名单，你自己也在里面，从合作精神最高到最低排列，没有并列。</a:t>
-            </a:r>
-          </a:p>
-          <a:p>
-            <a:pPr marL="896112" lvl="3" indent="0">
-              <a:lnSpc>
-                <a:spcPct val="120000"/>
-              </a:lnSpc>
-              <a:buNone/>
-            </a:pPr>
-            <a:r>
-              <a:rPr lang="zh-CN" altLang="en-US" dirty="0"/>
-              <a:t>小伙伴</a:t>
-            </a:r>
-            <a:r>
-              <a:rPr lang="en-US" altLang="zh-CN" dirty="0"/>
-              <a:t>1 </a:t>
-            </a:r>
-          </a:p>
-          <a:p>
-            <a:pPr marL="896112" lvl="3" indent="0">
-              <a:lnSpc>
-                <a:spcPct val="120000"/>
-              </a:lnSpc>
-              <a:buNone/>
-            </a:pPr>
-            <a:r>
-              <a:rPr lang="zh-CN" altLang="en-US" dirty="0"/>
-              <a:t>小伙伴</a:t>
-            </a:r>
-            <a:r>
-              <a:rPr lang="en-US" altLang="zh-CN" dirty="0"/>
-              <a:t>2 </a:t>
-            </a:r>
-          </a:p>
-          <a:p>
-            <a:pPr marL="896112" lvl="3" indent="0">
-              <a:lnSpc>
-                <a:spcPct val="120000"/>
-              </a:lnSpc>
-              <a:buNone/>
-            </a:pPr>
-            <a:r>
-              <a:rPr lang="en-US" altLang="zh-CN" dirty="0"/>
-              <a:t>…</a:t>
-            </a:r>
-          </a:p>
-          <a:p>
-            <a:pPr marL="896112" lvl="3" indent="0">
-              <a:lnSpc>
-                <a:spcPct val="120000"/>
-              </a:lnSpc>
-              <a:buNone/>
-            </a:pPr>
-            <a:r>
-              <a:rPr lang="zh-CN" altLang="en-US" b="1" dirty="0"/>
-              <a:t>本人 </a:t>
-            </a:r>
-            <a:r>
-              <a:rPr lang="en-US" altLang="zh-CN" b="1" dirty="0"/>
-              <a:t>(0 </a:t>
-            </a:r>
-            <a:r>
-              <a:rPr lang="zh-CN" altLang="en-US" b="1"/>
-              <a:t>分）</a:t>
-            </a:r>
-            <a:endParaRPr lang="en-US" altLang="zh-CN" b="1" dirty="0"/>
-          </a:p>
-          <a:p>
-            <a:pPr marL="896112" lvl="3" indent="0">
-              <a:lnSpc>
-                <a:spcPct val="120000"/>
-              </a:lnSpc>
-              <a:buNone/>
-            </a:pPr>
-            <a:r>
-              <a:rPr lang="zh-CN" altLang="en-US" dirty="0"/>
-              <a:t>小伙伴</a:t>
-            </a:r>
-            <a:r>
-              <a:rPr lang="en-US" altLang="zh-CN" dirty="0"/>
-              <a:t>3</a:t>
-            </a:r>
-          </a:p>
-          <a:p>
-            <a:pPr marL="896112" lvl="3" indent="0">
-              <a:lnSpc>
-                <a:spcPct val="120000"/>
-              </a:lnSpc>
-              <a:buNone/>
-            </a:pPr>
-            <a:r>
-              <a:rPr lang="en-US" altLang="zh-CN" dirty="0"/>
-              <a:t> ...</a:t>
-            </a:r>
-          </a:p>
-          <a:p>
-            <a:pPr marL="118872" indent="0">
-              <a:lnSpc>
-                <a:spcPct val="120000"/>
-              </a:lnSpc>
-              <a:buNone/>
-            </a:pPr>
-            <a:endParaRPr lang="en-US" altLang="zh-CN" dirty="0"/>
-          </a:p>
-          <a:p>
-            <a:pPr marL="118872" indent="0">
-              <a:lnSpc>
-                <a:spcPct val="120000"/>
-              </a:lnSpc>
-              <a:buNone/>
-            </a:pPr>
-            <a:r>
-              <a:rPr lang="zh-CN" altLang="en-US" dirty="0"/>
-              <a:t>如何打分？</a:t>
-            </a:r>
-            <a:endParaRPr lang="en-US" altLang="zh-CN" dirty="0"/>
-          </a:p>
-          <a:p>
-            <a:pPr marL="411480" lvl="1" indent="0">
-              <a:lnSpc>
-                <a:spcPct val="120000"/>
-              </a:lnSpc>
-              <a:buNone/>
-            </a:pPr>
-            <a:r>
-              <a:rPr lang="zh-CN" altLang="en-US" dirty="0"/>
-              <a:t>“本人”得到</a:t>
-            </a:r>
-            <a:r>
-              <a:rPr lang="en-US" altLang="zh-CN" dirty="0"/>
-              <a:t>0</a:t>
-            </a:r>
-            <a:r>
-              <a:rPr lang="zh-CN" altLang="en-US" dirty="0"/>
-              <a:t>分，比“本人”高一个名次，则加</a:t>
-            </a:r>
-            <a:r>
-              <a:rPr lang="en-US" altLang="zh-CN" dirty="0"/>
-              <a:t>1</a:t>
-            </a:r>
-            <a:r>
-              <a:rPr lang="zh-CN" altLang="en-US" dirty="0"/>
-              <a:t>分，低一个名次，则减</a:t>
-            </a:r>
-            <a:r>
-              <a:rPr lang="en-US" altLang="zh-CN" dirty="0"/>
-              <a:t>1</a:t>
-            </a:r>
-            <a:r>
-              <a:rPr lang="zh-CN" altLang="en-US" dirty="0"/>
-              <a:t>分， 以此类推。</a:t>
-            </a:r>
-            <a:r>
-              <a:rPr lang="en-US" altLang="zh-CN" dirty="0"/>
-              <a:t>TA</a:t>
-            </a:r>
-            <a:r>
-              <a:rPr lang="zh-CN" altLang="en-US" dirty="0"/>
-              <a:t>拿到全部人的提名后，给所有人统计分数。然后公布。</a:t>
-            </a:r>
-          </a:p>
-          <a:p>
-            <a:pPr marL="118872" indent="0">
-              <a:lnSpc>
-                <a:spcPct val="120000"/>
-              </a:lnSpc>
-              <a:buNone/>
-            </a:pPr>
-            <a:endParaRPr lang="en-US" altLang="zh-CN" dirty="0"/>
-          </a:p>
-          <a:p>
-            <a:pPr marL="118872" indent="0">
-              <a:lnSpc>
-                <a:spcPct val="120000"/>
-              </a:lnSpc>
-              <a:buNone/>
-            </a:pPr>
-            <a:r>
-              <a:rPr lang="zh-CN" altLang="en-US" dirty="0"/>
-              <a:t>任课老师决定是否给得分最高的部分同学某种奖励分。</a:t>
-            </a:r>
-          </a:p>
-        </p:txBody>
-      </p:sp>
-    </p:spTree>
-    <p:extLst>
-      <p:ext uri="{BB962C8B-B14F-4D97-AF65-F5344CB8AC3E}">
-        <p14:creationId xmlns:p14="http://schemas.microsoft.com/office/powerpoint/2010/main" val="3587831306"/>
-      </p:ext>
-    </p:extLst>
-  </p:cSld>
-  <p:clrMapOvr>
-    <a:masterClrMapping/>
-  </p:clrMapOvr>
-</p:sld>
-</file>
-
 <file path=ppt/slides/slide37.xml><?xml version="1.0" encoding="utf-8"?>
 <p:sld xmlns:a="http://schemas.openxmlformats.org/drawingml/2006/main" xmlns:r="http://schemas.openxmlformats.org/officeDocument/2006/relationships" xmlns:p="http://schemas.openxmlformats.org/presentationml/2006/main">
   <p:cSld>
@@ -13841,6 +13358,277 @@
           <a:p>
             <a:r>
               <a:rPr lang="zh-CN" altLang="en-US" dirty="0"/>
+              <a:t>合作伙伴评分</a:t>
+            </a:r>
+            <a:endParaRPr lang="en-US" dirty="0"/>
+          </a:p>
+        </p:txBody>
+      </p:sp>
+      <p:sp>
+        <p:nvSpPr>
+          <p:cNvPr id="3" name="内容占位符 2"/>
+          <p:cNvSpPr>
+            <a:spLocks noGrp="1"/>
+          </p:cNvSpPr>
+          <p:nvPr>
+            <p:ph idx="1"/>
+          </p:nvPr>
+        </p:nvSpPr>
+        <p:spPr/>
+        <p:txBody>
+          <a:bodyPr>
+            <a:normAutofit fontScale="55000" lnSpcReduction="20000"/>
+          </a:bodyPr>
+          <a:lstStyle/>
+          <a:p>
+            <a:pPr marL="118872" indent="0">
+              <a:lnSpc>
+                <a:spcPct val="120000"/>
+              </a:lnSpc>
+              <a:buNone/>
+            </a:pPr>
+            <a:r>
+              <a:rPr lang="zh-CN" altLang="en-US" dirty="0"/>
+              <a:t>在这个软件工程课上，你有机会和</a:t>
+            </a:r>
+            <a:r>
+              <a:rPr lang="en-US" altLang="zh-CN" dirty="0"/>
+              <a:t>5–7</a:t>
+            </a:r>
+            <a:r>
+              <a:rPr lang="zh-CN" altLang="en-US" dirty="0"/>
+              <a:t>名同学进行了深度的合作，那么，谁的合作精神好？ 在课程的最后阶段，每个人列出一个一维的名单，你自己也在里面，从合作精神最高到最低排列，没有并列。</a:t>
+            </a:r>
+          </a:p>
+          <a:p>
+            <a:pPr marL="896112" lvl="3" indent="0">
+              <a:lnSpc>
+                <a:spcPct val="120000"/>
+              </a:lnSpc>
+              <a:buNone/>
+            </a:pPr>
+            <a:r>
+              <a:rPr lang="zh-CN" altLang="en-US" dirty="0"/>
+              <a:t>小伙伴</a:t>
+            </a:r>
+            <a:r>
+              <a:rPr lang="en-US" altLang="zh-CN" dirty="0"/>
+              <a:t>1 </a:t>
+            </a:r>
+          </a:p>
+          <a:p>
+            <a:pPr marL="896112" lvl="3" indent="0">
+              <a:lnSpc>
+                <a:spcPct val="120000"/>
+              </a:lnSpc>
+              <a:buNone/>
+            </a:pPr>
+            <a:r>
+              <a:rPr lang="zh-CN" altLang="en-US" dirty="0"/>
+              <a:t>小伙伴</a:t>
+            </a:r>
+            <a:r>
+              <a:rPr lang="en-US" altLang="zh-CN" dirty="0"/>
+              <a:t>2 </a:t>
+            </a:r>
+          </a:p>
+          <a:p>
+            <a:pPr marL="896112" lvl="3" indent="0">
+              <a:lnSpc>
+                <a:spcPct val="120000"/>
+              </a:lnSpc>
+              <a:buNone/>
+            </a:pPr>
+            <a:r>
+              <a:rPr lang="en-US" altLang="zh-CN" dirty="0"/>
+              <a:t>…</a:t>
+            </a:r>
+          </a:p>
+          <a:p>
+            <a:pPr marL="896112" lvl="3" indent="0">
+              <a:lnSpc>
+                <a:spcPct val="120000"/>
+              </a:lnSpc>
+              <a:buNone/>
+            </a:pPr>
+            <a:r>
+              <a:rPr lang="zh-CN" altLang="en-US" b="1" dirty="0"/>
+              <a:t>本人 </a:t>
+            </a:r>
+            <a:r>
+              <a:rPr lang="en-US" altLang="zh-CN" b="1" dirty="0"/>
+              <a:t>(0 </a:t>
+            </a:r>
+            <a:r>
+              <a:rPr lang="zh-CN" altLang="en-US" b="1"/>
+              <a:t>分）</a:t>
+            </a:r>
+            <a:endParaRPr lang="en-US" altLang="zh-CN" b="1" dirty="0"/>
+          </a:p>
+          <a:p>
+            <a:pPr marL="896112" lvl="3" indent="0">
+              <a:lnSpc>
+                <a:spcPct val="120000"/>
+              </a:lnSpc>
+              <a:buNone/>
+            </a:pPr>
+            <a:r>
+              <a:rPr lang="zh-CN" altLang="en-US" dirty="0"/>
+              <a:t>小伙伴</a:t>
+            </a:r>
+            <a:r>
+              <a:rPr lang="en-US" altLang="zh-CN" dirty="0"/>
+              <a:t>3</a:t>
+            </a:r>
+          </a:p>
+          <a:p>
+            <a:pPr marL="896112" lvl="3" indent="0">
+              <a:lnSpc>
+                <a:spcPct val="120000"/>
+              </a:lnSpc>
+              <a:buNone/>
+            </a:pPr>
+            <a:r>
+              <a:rPr lang="en-US" altLang="zh-CN" dirty="0"/>
+              <a:t> ...</a:t>
+            </a:r>
+          </a:p>
+          <a:p>
+            <a:pPr marL="118872" indent="0">
+              <a:lnSpc>
+                <a:spcPct val="120000"/>
+              </a:lnSpc>
+              <a:buNone/>
+            </a:pPr>
+            <a:endParaRPr lang="en-US" altLang="zh-CN" dirty="0"/>
+          </a:p>
+          <a:p>
+            <a:pPr marL="118872" indent="0">
+              <a:lnSpc>
+                <a:spcPct val="120000"/>
+              </a:lnSpc>
+              <a:buNone/>
+            </a:pPr>
+            <a:r>
+              <a:rPr lang="zh-CN" altLang="en-US" dirty="0"/>
+              <a:t>如何打分？</a:t>
+            </a:r>
+            <a:endParaRPr lang="en-US" altLang="zh-CN" dirty="0"/>
+          </a:p>
+          <a:p>
+            <a:pPr marL="411480" lvl="1" indent="0">
+              <a:lnSpc>
+                <a:spcPct val="120000"/>
+              </a:lnSpc>
+              <a:buNone/>
+            </a:pPr>
+            <a:r>
+              <a:rPr lang="zh-CN" altLang="en-US" dirty="0"/>
+              <a:t>“本人”得到</a:t>
+            </a:r>
+            <a:r>
+              <a:rPr lang="en-US" altLang="zh-CN" dirty="0"/>
+              <a:t>0</a:t>
+            </a:r>
+            <a:r>
+              <a:rPr lang="zh-CN" altLang="en-US" dirty="0"/>
+              <a:t>分，比“本人”高一个名次，则加</a:t>
+            </a:r>
+            <a:r>
+              <a:rPr lang="en-US" altLang="zh-CN" dirty="0"/>
+              <a:t>1</a:t>
+            </a:r>
+            <a:r>
+              <a:rPr lang="zh-CN" altLang="en-US" dirty="0"/>
+              <a:t>分，低一个名次，则减</a:t>
+            </a:r>
+            <a:r>
+              <a:rPr lang="en-US" altLang="zh-CN" dirty="0"/>
+              <a:t>1</a:t>
+            </a:r>
+            <a:r>
+              <a:rPr lang="zh-CN" altLang="en-US" dirty="0"/>
+              <a:t>分， 以此类推。</a:t>
+            </a:r>
+            <a:r>
+              <a:rPr lang="en-US" altLang="zh-CN" dirty="0"/>
+              <a:t>TA</a:t>
+            </a:r>
+            <a:r>
+              <a:rPr lang="zh-CN" altLang="en-US" dirty="0"/>
+              <a:t>拿到全部人的提名后，给所有人统计分数。然后公布。</a:t>
+            </a:r>
+          </a:p>
+          <a:p>
+            <a:pPr marL="118872" indent="0">
+              <a:lnSpc>
+                <a:spcPct val="120000"/>
+              </a:lnSpc>
+              <a:buNone/>
+            </a:pPr>
+            <a:endParaRPr lang="en-US" altLang="zh-CN" dirty="0"/>
+          </a:p>
+          <a:p>
+            <a:pPr marL="118872" indent="0">
+              <a:lnSpc>
+                <a:spcPct val="120000"/>
+              </a:lnSpc>
+              <a:buNone/>
+            </a:pPr>
+            <a:r>
+              <a:rPr lang="zh-CN" altLang="en-US" dirty="0"/>
+              <a:t>任课老师决定是否给得分最高的部分同学某种奖励分。</a:t>
+            </a:r>
+          </a:p>
+        </p:txBody>
+      </p:sp>
+    </p:spTree>
+    <p:extLst>
+      <p:ext uri="{BB962C8B-B14F-4D97-AF65-F5344CB8AC3E}">
+        <p14:creationId xmlns:p14="http://schemas.microsoft.com/office/powerpoint/2010/main" val="3587831306"/>
+      </p:ext>
+    </p:extLst>
+  </p:cSld>
+  <p:clrMapOvr>
+    <a:masterClrMapping/>
+  </p:clrMapOvr>
+</p:sld>
+</file>
+
+<file path=ppt/slides/slide38.xml><?xml version="1.0" encoding="utf-8"?>
+<p:sld xmlns:a="http://schemas.openxmlformats.org/drawingml/2006/main" xmlns:r="http://schemas.openxmlformats.org/officeDocument/2006/relationships" xmlns:p="http://schemas.openxmlformats.org/presentationml/2006/main">
+  <p:cSld>
+    <p:spTree>
+      <p:nvGrpSpPr>
+        <p:cNvPr id="1" name=""/>
+        <p:cNvGrpSpPr/>
+        <p:nvPr/>
+      </p:nvGrpSpPr>
+      <p:grpSpPr>
+        <a:xfrm>
+          <a:off x="0" y="0"/>
+          <a:ext cx="0" cy="0"/>
+          <a:chOff x="0" y="0"/>
+          <a:chExt cx="0" cy="0"/>
+        </a:xfrm>
+      </p:grpSpPr>
+      <p:sp>
+        <p:nvSpPr>
+          <p:cNvPr id="2" name="标题 1"/>
+          <p:cNvSpPr>
+            <a:spLocks noGrp="1"/>
+          </p:cNvSpPr>
+          <p:nvPr>
+            <p:ph type="title"/>
+          </p:nvPr>
+        </p:nvSpPr>
+        <p:spPr/>
+        <p:txBody>
+          <a:bodyPr/>
+          <a:lstStyle/>
+          <a:p>
+            <a:r>
+              <a:rPr lang="zh-CN" altLang="en-US" dirty="0"/>
               <a:t>课堂讨论</a:t>
             </a:r>
             <a:endParaRPr lang="en-US" dirty="0"/>
@@ -13891,7 +13679,7 @@
 </p:sld>
 </file>
 
-<file path=ppt/slides/slide38.xml><?xml version="1.0" encoding="utf-8"?>
+<file path=ppt/slides/slide39.xml><?xml version="1.0" encoding="utf-8"?>
 <p:sld xmlns:a="http://schemas.openxmlformats.org/drawingml/2006/main" xmlns:r="http://schemas.openxmlformats.org/officeDocument/2006/relationships" xmlns:p="http://schemas.openxmlformats.org/presentationml/2006/main">
   <p:cSld>
     <p:spTree>
@@ -15642,6 +15430,21 @@
 </file>
 
 <file path=customXml/item1.xml><?xml version="1.0" encoding="utf-8"?>
+<p:properties xmlns:p="http://schemas.microsoft.com/office/2006/metadata/properties" xmlns:xsi="http://www.w3.org/2001/XMLSchema-instance" xmlns:pc="http://schemas.microsoft.com/office/infopath/2007/PartnerControls">
+  <documentManagement/>
+</p:properties>
+</file>
+
+<file path=customXml/item2.xml><?xml version="1.0" encoding="utf-8"?>
+<?mso-contentType ?>
+<FormTemplates xmlns="http://schemas.microsoft.com/sharepoint/v3/contenttype/forms">
+  <Display>DocumentLibraryForm</Display>
+  <Edit>DocumentLibraryForm</Edit>
+  <New>DocumentLibraryForm</New>
+</FormTemplates>
+</file>
+
+<file path=customXml/item3.xml><?xml version="1.0" encoding="utf-8"?>
 <ct:contentTypeSchema xmlns:ct="http://schemas.microsoft.com/office/2006/metadata/contentType" xmlns:ma="http://schemas.microsoft.com/office/2006/metadata/properties/metaAttributes" ct:_="" ma:_="" ma:contentTypeName="Document" ma:contentTypeID="0x0101006371182FA640024E8A2815D490E1EF25" ma:contentTypeVersion="0" ma:contentTypeDescription="Create a new document." ma:contentTypeScope="" ma:versionID="3591aab47f172a2900f307f59d422227">
   <xsd:schema xmlns:xsd="http://www.w3.org/2001/XMLSchema" xmlns:xs="http://www.w3.org/2001/XMLSchema" xmlns:p="http://schemas.microsoft.com/office/2006/metadata/properties" targetNamespace="http://schemas.microsoft.com/office/2006/metadata/properties" ma:root="true" ma:fieldsID="1f28ea01430cdfb20a10736313f817e3">
     <xsd:element name="properties">
@@ -15755,22 +15558,24 @@
 </ct:contentTypeSchema>
 </file>
 
-<file path=customXml/item2.xml><?xml version="1.0" encoding="utf-8"?>
-<p:properties xmlns:p="http://schemas.microsoft.com/office/2006/metadata/properties" xmlns:xsi="http://www.w3.org/2001/XMLSchema-instance" xmlns:pc="http://schemas.microsoft.com/office/infopath/2007/PartnerControls">
-  <documentManagement/>
-</p:properties>
+<file path=customXml/itemProps1.xml><?xml version="1.0" encoding="utf-8"?>
+<ds:datastoreItem xmlns:ds="http://schemas.openxmlformats.org/officeDocument/2006/customXml" ds:itemID="{5C132C8A-B094-42C9-8FEB-6C14EB442EF6}">
+  <ds:schemaRefs>
+    <ds:schemaRef ds:uri="http://schemas.microsoft.com/office/2006/metadata/properties"/>
+    <ds:schemaRef ds:uri="http://schemas.microsoft.com/office/infopath/2007/PartnerControls"/>
+  </ds:schemaRefs>
+</ds:datastoreItem>
 </file>
 
-<file path=customXml/item3.xml><?xml version="1.0" encoding="utf-8"?>
-<?mso-contentType ?>
-<FormTemplates xmlns="http://schemas.microsoft.com/sharepoint/v3/contenttype/forms">
-  <Display>DocumentLibraryForm</Display>
-  <Edit>DocumentLibraryForm</Edit>
-  <New>DocumentLibraryForm</New>
-</FormTemplates>
+<file path=customXml/itemProps2.xml><?xml version="1.0" encoding="utf-8"?>
+<ds:datastoreItem xmlns:ds="http://schemas.openxmlformats.org/officeDocument/2006/customXml" ds:itemID="{B59B624C-3232-4AA7-B231-042BE14D924C}">
+  <ds:schemaRefs>
+    <ds:schemaRef ds:uri="http://schemas.microsoft.com/sharepoint/v3/contenttype/forms"/>
+  </ds:schemaRefs>
+</ds:datastoreItem>
 </file>
 
-<file path=customXml/itemProps1.xml><?xml version="1.0" encoding="utf-8"?>
+<file path=customXml/itemProps3.xml><?xml version="1.0" encoding="utf-8"?>
 <ds:datastoreItem xmlns:ds="http://schemas.openxmlformats.org/officeDocument/2006/customXml" ds:itemID="{0FBAD3CE-F083-4C4D-9639-2A686804FC72}">
   <ds:schemaRefs>
     <ds:schemaRef ds:uri="http://schemas.microsoft.com/office/2006/metadata/contentType"/>
@@ -15784,21 +15589,4 @@
     <ds:schemaRef ds:uri="http://schemas.microsoft.com/office/infopath/2007/PartnerControls"/>
   </ds:schemaRefs>
 </ds:datastoreItem>
-</file>
-
-<file path=customXml/itemProps2.xml><?xml version="1.0" encoding="utf-8"?>
-<ds:datastoreItem xmlns:ds="http://schemas.openxmlformats.org/officeDocument/2006/customXml" ds:itemID="{5C132C8A-B094-42C9-8FEB-6C14EB442EF6}">
-  <ds:schemaRefs>
-    <ds:schemaRef ds:uri="http://schemas.microsoft.com/office/2006/metadata/properties"/>
-    <ds:schemaRef ds:uri="http://schemas.microsoft.com/office/infopath/2007/PartnerControls"/>
-  </ds:schemaRefs>
-</ds:datastoreItem>
-</file>
-
-<file path=customXml/itemProps3.xml><?xml version="1.0" encoding="utf-8"?>
-<ds:datastoreItem xmlns:ds="http://schemas.openxmlformats.org/officeDocument/2006/customXml" ds:itemID="{B59B624C-3232-4AA7-B231-042BE14D924C}">
-  <ds:schemaRefs>
-    <ds:schemaRef ds:uri="http://schemas.microsoft.com/sharepoint/v3/contenttype/forms"/>
-  </ds:schemaRefs>
-</ds:datastoreItem>
 </file>
--- a/chapter17/ASE_17_People_Performance.pptx
+++ b/chapter17/ASE_17_People_Performance.pptx
@@ -1,52 +1,52 @@
 
 <file path=ppt/presentation.xml><?xml version="1.0" encoding="utf-8"?>
-<p:presentation xmlns:a="http://schemas.openxmlformats.org/drawingml/2006/main" xmlns:r="http://schemas.openxmlformats.org/officeDocument/2006/relationships" xmlns:p="http://schemas.openxmlformats.org/presentationml/2006/main" saveSubsetFonts="1">
+<p:presentation xmlns:a="http://schemas.openxmlformats.org/drawingml/2006/main" xmlns:r="http://schemas.openxmlformats.org/officeDocument/2006/relationships" xmlns:p="http://schemas.openxmlformats.org/presentationml/2006/main">
   <p:sldMasterIdLst>
-    <p:sldMasterId id="2147483792" r:id="rId4"/>
+    <p:sldMasterId id="2147483648" r:id="rId1"/>
   </p:sldMasterIdLst>
   <p:notesMasterIdLst>
-    <p:notesMasterId r:id="rId44"/>
+    <p:notesMasterId r:id="rId4"/>
   </p:notesMasterIdLst>
   <p:sldIdLst>
-    <p:sldId id="256" r:id="rId5"/>
-    <p:sldId id="257" r:id="rId6"/>
-    <p:sldId id="375" r:id="rId7"/>
-    <p:sldId id="390" r:id="rId8"/>
-    <p:sldId id="391" r:id="rId9"/>
-    <p:sldId id="392" r:id="rId10"/>
-    <p:sldId id="394" r:id="rId11"/>
-    <p:sldId id="395" r:id="rId12"/>
-    <p:sldId id="396" r:id="rId13"/>
-    <p:sldId id="397" r:id="rId14"/>
-    <p:sldId id="398" r:id="rId15"/>
-    <p:sldId id="399" r:id="rId16"/>
-    <p:sldId id="400" r:id="rId17"/>
-    <p:sldId id="401" r:id="rId18"/>
-    <p:sldId id="402" r:id="rId19"/>
-    <p:sldId id="276" r:id="rId20"/>
-    <p:sldId id="277" r:id="rId21"/>
-    <p:sldId id="411" r:id="rId22"/>
-    <p:sldId id="409" r:id="rId23"/>
-    <p:sldId id="410" r:id="rId24"/>
-    <p:sldId id="407" r:id="rId25"/>
-    <p:sldId id="408" r:id="rId26"/>
-    <p:sldId id="278" r:id="rId27"/>
-    <p:sldId id="279" r:id="rId28"/>
-    <p:sldId id="412" r:id="rId29"/>
-    <p:sldId id="413" r:id="rId30"/>
-    <p:sldId id="258" r:id="rId31"/>
-    <p:sldId id="259" r:id="rId32"/>
-    <p:sldId id="260" r:id="rId33"/>
-    <p:sldId id="261" r:id="rId34"/>
-    <p:sldId id="262" r:id="rId35"/>
-    <p:sldId id="415" r:id="rId36"/>
-    <p:sldId id="263" r:id="rId37"/>
-    <p:sldId id="264" r:id="rId38"/>
-    <p:sldId id="266" r:id="rId39"/>
-    <p:sldId id="414" r:id="rId40"/>
-    <p:sldId id="267" r:id="rId41"/>
-    <p:sldId id="268" r:id="rId42"/>
-    <p:sldId id="374" r:id="rId43"/>
+    <p:sldId id="256" r:id="rId3"/>
+    <p:sldId id="257" r:id="rId5"/>
+    <p:sldId id="375" r:id="rId6"/>
+    <p:sldId id="390" r:id="rId7"/>
+    <p:sldId id="391" r:id="rId8"/>
+    <p:sldId id="392" r:id="rId9"/>
+    <p:sldId id="394" r:id="rId10"/>
+    <p:sldId id="395" r:id="rId11"/>
+    <p:sldId id="396" r:id="rId12"/>
+    <p:sldId id="397" r:id="rId13"/>
+    <p:sldId id="398" r:id="rId14"/>
+    <p:sldId id="399" r:id="rId15"/>
+    <p:sldId id="400" r:id="rId16"/>
+    <p:sldId id="401" r:id="rId17"/>
+    <p:sldId id="402" r:id="rId18"/>
+    <p:sldId id="276" r:id="rId19"/>
+    <p:sldId id="277" r:id="rId20"/>
+    <p:sldId id="411" r:id="rId21"/>
+    <p:sldId id="409" r:id="rId22"/>
+    <p:sldId id="410" r:id="rId23"/>
+    <p:sldId id="407" r:id="rId24"/>
+    <p:sldId id="408" r:id="rId25"/>
+    <p:sldId id="278" r:id="rId26"/>
+    <p:sldId id="279" r:id="rId27"/>
+    <p:sldId id="412" r:id="rId28"/>
+    <p:sldId id="413" r:id="rId29"/>
+    <p:sldId id="258" r:id="rId30"/>
+    <p:sldId id="259" r:id="rId31"/>
+    <p:sldId id="260" r:id="rId32"/>
+    <p:sldId id="261" r:id="rId33"/>
+    <p:sldId id="262" r:id="rId34"/>
+    <p:sldId id="415" r:id="rId35"/>
+    <p:sldId id="263" r:id="rId36"/>
+    <p:sldId id="264" r:id="rId37"/>
+    <p:sldId id="266" r:id="rId38"/>
+    <p:sldId id="414" r:id="rId39"/>
+    <p:sldId id="267" r:id="rId40"/>
+    <p:sldId id="268" r:id="rId41"/>
+    <p:sldId id="374" r:id="rId42"/>
   </p:sldIdLst>
   <p:sldSz cx="12192000" cy="6858000"/>
   <p:notesSz cx="6858000" cy="9144000"/>
@@ -153,7 +153,7 @@
             <a:srgbClr val="A4A3A4"/>
           </p15:clr>
         </p15:guide>
-        <p15:guide id="2" pos="3840" userDrawn="1">
+        <p15:guide id="2" pos="3864" userDrawn="1">
           <p15:clr>
             <a:srgbClr val="A4A3A4"/>
           </p15:clr>
@@ -162,238 +162,6 @@
     </p:ext>
   </p:extLst>
 </p:presentation>
-</file>
-
-<file path=ppt/revisionInfo.xml><?xml version="1.0" encoding="utf-8"?>
-<p1510:revInfo xmlns:a="http://schemas.openxmlformats.org/drawingml/2006/main" xmlns:r="http://schemas.openxmlformats.org/officeDocument/2006/relationships" xmlns:p1510="http://schemas.microsoft.com/office/powerpoint/2015/10/main">
-  <p1510:revLst>
-    <p1510:client id="{B5B6ADE1-DDD4-4951-A3A9-0FEB8418E745}" v="3" dt="2026-05-06T13:19:09.208"/>
-  </p1510:revLst>
-</p1510:revInfo>
-</file>
-
-<file path=ppt/changesInfos/changesInfo1.xml><?xml version="1.0" encoding="utf-8"?>
-<pc:chgInfo xmlns:a="http://schemas.openxmlformats.org/drawingml/2006/main" xmlns:r="http://schemas.openxmlformats.org/officeDocument/2006/relationships" xmlns:ac="http://schemas.microsoft.com/office/drawing/2013/main/command" xmlns:pc="http://schemas.microsoft.com/office/powerpoint/2013/main/command">
-  <pc:docChgLst>
-    <pc:chgData name="Xin Zou" userId="260b9726081dae15" providerId="LiveId" clId="{9D297BCE-98D2-4025-9670-F2ABFDE5436C}"/>
-    <pc:docChg chg="undo custSel addSld delSld modSld">
-      <pc:chgData name="Xin Zou" userId="260b9726081dae15" providerId="LiveId" clId="{9D297BCE-98D2-4025-9670-F2ABFDE5436C}" dt="2026-05-06T13:21:31.718" v="54" actId="1076"/>
-      <pc:docMkLst>
-        <pc:docMk/>
-      </pc:docMkLst>
-      <pc:sldChg chg="addSp delSp modSp add mod setBg delDesignElem">
-        <pc:chgData name="Xin Zou" userId="260b9726081dae15" providerId="LiveId" clId="{9D297BCE-98D2-4025-9670-F2ABFDE5436C}" dt="2026-05-06T13:21:31.718" v="54" actId="1076"/>
-        <pc:sldMkLst>
-          <pc:docMk/>
-          <pc:sldMk cId="2423002010" sldId="415"/>
-        </pc:sldMkLst>
-        <pc:spChg chg="mod">
-          <ac:chgData name="Xin Zou" userId="260b9726081dae15" providerId="LiveId" clId="{9D297BCE-98D2-4025-9670-F2ABFDE5436C}" dt="2026-05-06T13:21:31.718" v="54" actId="1076"/>
-          <ac:spMkLst>
-            <pc:docMk/>
-            <pc:sldMk cId="2423002010" sldId="415"/>
-            <ac:spMk id="2" creationId="{1BCB5A19-B3AF-1A55-223F-75EC51F317B0}"/>
-          </ac:spMkLst>
-        </pc:spChg>
-        <pc:spChg chg="mod ord">
-          <ac:chgData name="Xin Zou" userId="260b9726081dae15" providerId="LiveId" clId="{9D297BCE-98D2-4025-9670-F2ABFDE5436C}" dt="2026-05-06T13:21:31.718" v="54" actId="1076"/>
-          <ac:spMkLst>
-            <pc:docMk/>
-            <pc:sldMk cId="2423002010" sldId="415"/>
-            <ac:spMk id="3" creationId="{7A831B99-4A25-0C5C-4637-898826B64E22}"/>
-          </ac:spMkLst>
-        </pc:spChg>
-        <pc:spChg chg="add">
-          <ac:chgData name="Xin Zou" userId="260b9726081dae15" providerId="LiveId" clId="{9D297BCE-98D2-4025-9670-F2ABFDE5436C}" dt="2026-05-06T13:19:50.661" v="8" actId="26606"/>
-          <ac:spMkLst>
-            <pc:docMk/>
-            <pc:sldMk cId="2423002010" sldId="415"/>
-            <ac:spMk id="8" creationId="{4A079BE1-ED93-4445-AD4A-0D67109702E7}"/>
-          </ac:spMkLst>
-        </pc:spChg>
-        <pc:spChg chg="del">
-          <ac:chgData name="Xin Zou" userId="260b9726081dae15" providerId="LiveId" clId="{9D297BCE-98D2-4025-9670-F2ABFDE5436C}" dt="2026-05-06T13:19:09.207" v="5"/>
-          <ac:spMkLst>
-            <pc:docMk/>
-            <pc:sldMk cId="2423002010" sldId="415"/>
-            <ac:spMk id="9" creationId="{72AAF801-C771-C97A-BFAD-B52E74CF88D8}"/>
-          </ac:spMkLst>
-        </pc:spChg>
-        <pc:spChg chg="del">
-          <ac:chgData name="Xin Zou" userId="260b9726081dae15" providerId="LiveId" clId="{9D297BCE-98D2-4025-9670-F2ABFDE5436C}" dt="2026-05-06T13:19:09.207" v="5"/>
-          <ac:spMkLst>
-            <pc:docMk/>
-            <pc:sldMk cId="2423002010" sldId="415"/>
-            <ac:spMk id="11" creationId="{976EB60C-D4AF-5043-B011-3459951DFE43}"/>
-          </ac:spMkLst>
-        </pc:spChg>
-        <pc:spChg chg="add">
-          <ac:chgData name="Xin Zou" userId="260b9726081dae15" providerId="LiveId" clId="{9D297BCE-98D2-4025-9670-F2ABFDE5436C}" dt="2026-05-06T13:19:50.661" v="8" actId="26606"/>
-          <ac:spMkLst>
-            <pc:docMk/>
-            <pc:sldMk cId="2423002010" sldId="415"/>
-            <ac:spMk id="13" creationId="{3F6C79BF-A4E0-4CC8-952B-C736485CAFF4}"/>
-          </ac:spMkLst>
-        </pc:spChg>
-        <pc:picChg chg="del">
-          <ac:chgData name="Xin Zou" userId="260b9726081dae15" providerId="LiveId" clId="{9D297BCE-98D2-4025-9670-F2ABFDE5436C}" dt="2026-05-06T13:19:13.700" v="6" actId="478"/>
-          <ac:picMkLst>
-            <pc:docMk/>
-            <pc:sldMk cId="2423002010" sldId="415"/>
-            <ac:picMk id="4" creationId="{ECC677AF-4564-818B-3E5D-B766968A9F1B}"/>
-          </ac:picMkLst>
-        </pc:picChg>
-        <pc:picChg chg="add mod">
-          <ac:chgData name="Xin Zou" userId="260b9726081dae15" providerId="LiveId" clId="{9D297BCE-98D2-4025-9670-F2ABFDE5436C}" dt="2026-05-06T13:19:50.661" v="8" actId="26606"/>
-          <ac:picMkLst>
-            <pc:docMk/>
-            <pc:sldMk cId="2423002010" sldId="415"/>
-            <ac:picMk id="6" creationId="{0CC04E94-6A1A-51C3-A6BF-3AF6CB38147F}"/>
-          </ac:picMkLst>
-        </pc:picChg>
-      </pc:sldChg>
-      <pc:sldChg chg="add del">
-        <pc:chgData name="Xin Zou" userId="260b9726081dae15" providerId="LiveId" clId="{9D297BCE-98D2-4025-9670-F2ABFDE5436C}" dt="2026-05-06T13:19:03.532" v="3"/>
-        <pc:sldMkLst>
-          <pc:docMk/>
-          <pc:sldMk cId="4184760010" sldId="480"/>
-        </pc:sldMkLst>
-      </pc:sldChg>
-      <pc:sldChg chg="addSp delSp add del setBg delDesignElem">
-        <pc:chgData name="Xin Zou" userId="260b9726081dae15" providerId="LiveId" clId="{9D297BCE-98D2-4025-9670-F2ABFDE5436C}" dt="2026-05-06T13:19:03.532" v="3"/>
-        <pc:sldMkLst>
-          <pc:docMk/>
-          <pc:sldMk cId="135712492" sldId="10087"/>
-        </pc:sldMkLst>
-        <pc:spChg chg="add del">
-          <ac:chgData name="Xin Zou" userId="260b9726081dae15" providerId="LiveId" clId="{9D297BCE-98D2-4025-9670-F2ABFDE5436C}" dt="2026-05-06T13:19:03.532" v="3"/>
-          <ac:spMkLst>
-            <pc:docMk/>
-            <pc:sldMk cId="135712492" sldId="10087"/>
-            <ac:spMk id="1031" creationId="{593A179E-9739-4A6A-BFC0-9792A47FF15B}"/>
-          </ac:spMkLst>
-        </pc:spChg>
-        <pc:spChg chg="add del">
-          <ac:chgData name="Xin Zou" userId="260b9726081dae15" providerId="LiveId" clId="{9D297BCE-98D2-4025-9670-F2ABFDE5436C}" dt="2026-05-06T13:19:03.532" v="3"/>
-          <ac:spMkLst>
-            <pc:docMk/>
-            <pc:sldMk cId="135712492" sldId="10087"/>
-            <ac:spMk id="1033" creationId="{64B5D730-0F03-4E18-B5E2-A3AFEE4CB1D0}"/>
-          </ac:spMkLst>
-        </pc:spChg>
-        <pc:spChg chg="add del">
-          <ac:chgData name="Xin Zou" userId="260b9726081dae15" providerId="LiveId" clId="{9D297BCE-98D2-4025-9670-F2ABFDE5436C}" dt="2026-05-06T13:19:03.532" v="3"/>
-          <ac:spMkLst>
-            <pc:docMk/>
-            <pc:sldMk cId="135712492" sldId="10087"/>
-            <ac:spMk id="1035" creationId="{99BCAAE7-0794-4AF7-8A50-AB589BEC99E0}"/>
-          </ac:spMkLst>
-        </pc:spChg>
-        <pc:spChg chg="add del">
-          <ac:chgData name="Xin Zou" userId="260b9726081dae15" providerId="LiveId" clId="{9D297BCE-98D2-4025-9670-F2ABFDE5436C}" dt="2026-05-06T13:19:03.532" v="3"/>
-          <ac:spMkLst>
-            <pc:docMk/>
-            <pc:sldMk cId="135712492" sldId="10087"/>
-            <ac:spMk id="1037" creationId="{89D3435D-9A48-4791-925E-91DC45F7930C}"/>
-          </ac:spMkLst>
-        </pc:spChg>
-        <pc:spChg chg="add del">
-          <ac:chgData name="Xin Zou" userId="260b9726081dae15" providerId="LiveId" clId="{9D297BCE-98D2-4025-9670-F2ABFDE5436C}" dt="2026-05-06T13:19:03.532" v="3"/>
-          <ac:spMkLst>
-            <pc:docMk/>
-            <pc:sldMk cId="135712492" sldId="10087"/>
-            <ac:spMk id="1039" creationId="{D1D20898-4E05-4678-AF40-ADD3390C0669}"/>
-          </ac:spMkLst>
-        </pc:spChg>
-      </pc:sldChg>
-      <pc:sldChg chg="add del">
-        <pc:chgData name="Xin Zou" userId="260b9726081dae15" providerId="LiveId" clId="{9D297BCE-98D2-4025-9670-F2ABFDE5436C}" dt="2026-05-06T13:19:03.532" v="3"/>
-        <pc:sldMkLst>
-          <pc:docMk/>
-          <pc:sldMk cId="251502843" sldId="10088"/>
-        </pc:sldMkLst>
-      </pc:sldChg>
-      <pc:sldChg chg="add del">
-        <pc:chgData name="Xin Zou" userId="260b9726081dae15" providerId="LiveId" clId="{9D297BCE-98D2-4025-9670-F2ABFDE5436C}" dt="2026-05-06T13:19:03.532" v="3"/>
-        <pc:sldMkLst>
-          <pc:docMk/>
-          <pc:sldMk cId="1333485985" sldId="10090"/>
-        </pc:sldMkLst>
-      </pc:sldChg>
-      <pc:sldChg chg="add del">
-        <pc:chgData name="Xin Zou" userId="260b9726081dae15" providerId="LiveId" clId="{9D297BCE-98D2-4025-9670-F2ABFDE5436C}" dt="2026-05-06T13:19:03.532" v="3"/>
-        <pc:sldMkLst>
-          <pc:docMk/>
-          <pc:sldMk cId="2238410139" sldId="10092"/>
-        </pc:sldMkLst>
-      </pc:sldChg>
-      <pc:sldChg chg="add del">
-        <pc:chgData name="Xin Zou" userId="260b9726081dae15" providerId="LiveId" clId="{9D297BCE-98D2-4025-9670-F2ABFDE5436C}" dt="2026-05-06T13:19:03.532" v="3"/>
-        <pc:sldMkLst>
-          <pc:docMk/>
-          <pc:sldMk cId="3652109019" sldId="10093"/>
-        </pc:sldMkLst>
-      </pc:sldChg>
-      <pc:sldChg chg="add del">
-        <pc:chgData name="Xin Zou" userId="260b9726081dae15" providerId="LiveId" clId="{9D297BCE-98D2-4025-9670-F2ABFDE5436C}" dt="2026-05-06T13:19:03.532" v="3"/>
-        <pc:sldMkLst>
-          <pc:docMk/>
-          <pc:sldMk cId="3858371046" sldId="10096"/>
-        </pc:sldMkLst>
-      </pc:sldChg>
-      <pc:sldChg chg="add del">
-        <pc:chgData name="Xin Zou" userId="260b9726081dae15" providerId="LiveId" clId="{9D297BCE-98D2-4025-9670-F2ABFDE5436C}" dt="2026-05-06T13:19:03.532" v="3"/>
-        <pc:sldMkLst>
-          <pc:docMk/>
-          <pc:sldMk cId="3967604562" sldId="10097"/>
-        </pc:sldMkLst>
-      </pc:sldChg>
-      <pc:sldChg chg="add del">
-        <pc:chgData name="Xin Zou" userId="260b9726081dae15" providerId="LiveId" clId="{9D297BCE-98D2-4025-9670-F2ABFDE5436C}" dt="2026-05-06T13:19:03.532" v="3"/>
-        <pc:sldMkLst>
-          <pc:docMk/>
-          <pc:sldMk cId="2237320997" sldId="10098"/>
-        </pc:sldMkLst>
-      </pc:sldChg>
-      <pc:sldChg chg="add del">
-        <pc:chgData name="Xin Zou" userId="260b9726081dae15" providerId="LiveId" clId="{9D297BCE-98D2-4025-9670-F2ABFDE5436C}" dt="2026-05-06T13:19:03.532" v="3"/>
-        <pc:sldMkLst>
-          <pc:docMk/>
-          <pc:sldMk cId="141476521" sldId="10099"/>
-        </pc:sldMkLst>
-      </pc:sldChg>
-      <pc:sldChg chg="addSp delSp add del setBg delDesignElem">
-        <pc:chgData name="Xin Zou" userId="260b9726081dae15" providerId="LiveId" clId="{9D297BCE-98D2-4025-9670-F2ABFDE5436C}" dt="2026-05-06T13:19:03.532" v="3"/>
-        <pc:sldMkLst>
-          <pc:docMk/>
-          <pc:sldMk cId="1360776781" sldId="10100"/>
-        </pc:sldMkLst>
-        <pc:spChg chg="add del">
-          <ac:chgData name="Xin Zou" userId="260b9726081dae15" providerId="LiveId" clId="{9D297BCE-98D2-4025-9670-F2ABFDE5436C}" dt="2026-05-06T13:19:03.532" v="3"/>
-          <ac:spMkLst>
-            <pc:docMk/>
-            <pc:sldMk cId="1360776781" sldId="10100"/>
-            <ac:spMk id="1028" creationId="{F7F9F02B-DB04-4B60-859E-78BED6F401B9}"/>
-          </ac:spMkLst>
-        </pc:spChg>
-      </pc:sldChg>
-      <pc:sldChg chg="add del">
-        <pc:chgData name="Xin Zou" userId="260b9726081dae15" providerId="LiveId" clId="{9D297BCE-98D2-4025-9670-F2ABFDE5436C}" dt="2026-05-06T13:19:03.532" v="3"/>
-        <pc:sldMkLst>
-          <pc:docMk/>
-          <pc:sldMk cId="3467653473" sldId="10117"/>
-        </pc:sldMkLst>
-      </pc:sldChg>
-      <pc:sldChg chg="add del">
-        <pc:chgData name="Xin Zou" userId="260b9726081dae15" providerId="LiveId" clId="{9D297BCE-98D2-4025-9670-F2ABFDE5436C}" dt="2026-05-06T13:19:03.532" v="3"/>
-        <pc:sldMkLst>
-          <pc:docMk/>
-          <pc:sldMk cId="593912656" sldId="10118"/>
-        </pc:sldMkLst>
-      </pc:sldChg>
-    </pc:docChg>
-  </pc:docChgLst>
-</pc:chgInfo>
 </file>
 
 <file path=ppt/notesMasters/notesMaster1.xml><?xml version="1.0" encoding="utf-8"?>
@@ -478,8 +246,6 @@
           <a:p>
             <a:fld id="{F04650A2-B221-45B7-8BFD-302FFBB7179C}" type="datetimeFigureOut">
               <a:rPr lang="en-US" smtClean="0"/>
-              <a:pPr/>
-              <a:t>5/6/2026</a:t>
             </a:fld>
             <a:endParaRPr lang="en-US"/>
           </a:p>
@@ -548,6 +314,7 @@
               <a:rPr lang="en-US"/>
               <a:t>Click to edit Master text styles</a:t>
             </a:r>
+            <a:endParaRPr lang="en-US"/>
           </a:p>
           <a:p>
             <a:pPr lvl="1"/>
@@ -555,6 +322,7 @@
               <a:rPr lang="en-US"/>
               <a:t>Second level</a:t>
             </a:r>
+            <a:endParaRPr lang="en-US"/>
           </a:p>
           <a:p>
             <a:pPr lvl="2"/>
@@ -562,6 +330,7 @@
               <a:rPr lang="en-US"/>
               <a:t>Third level</a:t>
             </a:r>
+            <a:endParaRPr lang="en-US"/>
           </a:p>
           <a:p>
             <a:pPr lvl="3"/>
@@ -569,6 +338,7 @@
               <a:rPr lang="en-US"/>
               <a:t>Fourth level</a:t>
             </a:r>
+            <a:endParaRPr lang="en-US"/>
           </a:p>
           <a:p>
             <a:pPr lvl="4"/>
@@ -576,6 +346,7 @@
               <a:rPr lang="en-US"/>
               <a:t>Fifth level</a:t>
             </a:r>
+            <a:endParaRPr lang="en-US"/>
           </a:p>
         </p:txBody>
       </p:sp>
@@ -639,19 +410,12 @@
           <a:p>
             <a:fld id="{347179E1-1FAE-4667-A618-B3C44D7B1E80}" type="slidenum">
               <a:rPr lang="en-US" smtClean="0"/>
-              <a:pPr/>
-              <a:t>‹#›</a:t>
             </a:fld>
             <a:endParaRPr lang="en-US"/>
           </a:p>
         </p:txBody>
       </p:sp>
     </p:spTree>
-    <p:extLst>
-      <p:ext uri="{BB962C8B-B14F-4D97-AF65-F5344CB8AC3E}">
-        <p14:creationId xmlns:p14="http://schemas.microsoft.com/office/powerpoint/2010/main" val="649827044"/>
-      </p:ext>
-    </p:extLst>
   </p:cSld>
   <p:clrMap bg1="lt1" tx1="dk1" bg2="lt2" tx2="dk2" accent1="accent1" accent2="accent2" accent3="accent3" accent4="accent4" accent5="accent5" accent6="accent6" hlink="hlink" folHlink="folHlink"/>
   <p:notesStyle>
@@ -804,18 +568,21 @@
               <a:rPr lang="en-US" dirty="0"/>
               <a:t>Originally from Ambrosio Blanco</a:t>
             </a:r>
+            <a:endParaRPr lang="en-US" dirty="0"/>
           </a:p>
           <a:p>
             <a:r>
               <a:rPr lang="en-US" dirty="0"/>
               <a:t>MSRA</a:t>
             </a:r>
+            <a:endParaRPr lang="en-US" dirty="0"/>
           </a:p>
           <a:p>
             <a:r>
               <a:rPr lang="en-US" dirty="0"/>
               <a:t>Test Manager</a:t>
             </a:r>
+            <a:endParaRPr lang="en-US" dirty="0"/>
           </a:p>
           <a:p>
             <a:endParaRPr lang="en-US" dirty="0"/>
@@ -839,19 +606,12 @@
           <a:p>
             <a:fld id="{347179E1-1FAE-4667-A618-B3C44D7B1E80}" type="slidenum">
               <a:rPr lang="en-US" smtClean="0"/>
-              <a:pPr/>
-              <a:t>1</a:t>
             </a:fld>
             <a:endParaRPr lang="en-US"/>
           </a:p>
         </p:txBody>
       </p:sp>
     </p:spTree>
-    <p:extLst>
-      <p:ext uri="{BB962C8B-B14F-4D97-AF65-F5344CB8AC3E}">
-        <p14:creationId xmlns:p14="http://schemas.microsoft.com/office/powerpoint/2010/main" val="2989632398"/>
-      </p:ext>
-    </p:extLst>
   </p:cSld>
   <p:clrMapOvr>
     <a:masterClrMapping/>
@@ -931,19 +691,12 @@
           <a:p>
             <a:fld id="{347179E1-1FAE-4667-A618-B3C44D7B1E80}" type="slidenum">
               <a:rPr lang="en-US" smtClean="0"/>
-              <a:pPr/>
-              <a:t>2</a:t>
             </a:fld>
             <a:endParaRPr lang="en-US"/>
           </a:p>
         </p:txBody>
       </p:sp>
     </p:spTree>
-    <p:extLst>
-      <p:ext uri="{BB962C8B-B14F-4D97-AF65-F5344CB8AC3E}">
-        <p14:creationId xmlns:p14="http://schemas.microsoft.com/office/powerpoint/2010/main" val="1079084570"/>
-      </p:ext>
-    </p:extLst>
   </p:cSld>
   <p:clrMapOvr>
     <a:masterClrMapping/>
@@ -1095,6 +848,7 @@
               <a:rPr lang="zh-CN" altLang="en-US" dirty="0"/>
               <a:t>。</a:t>
             </a:r>
+            <a:endParaRPr lang="zh-CN" altLang="en-US" dirty="0"/>
           </a:p>
           <a:p>
             <a:endParaRPr lang="en-US" dirty="0"/>
@@ -1118,18 +872,12 @@
           <a:p>
             <a:fld id="{F35C7EE1-DFFA-4275-BC15-03F63508087A}" type="slidenum">
               <a:rPr lang="en-US" smtClean="0"/>
-              <a:t>16</a:t>
             </a:fld>
             <a:endParaRPr lang="en-US"/>
           </a:p>
         </p:txBody>
       </p:sp>
     </p:spTree>
-    <p:extLst>
-      <p:ext uri="{BB962C8B-B14F-4D97-AF65-F5344CB8AC3E}">
-        <p14:creationId xmlns:p14="http://schemas.microsoft.com/office/powerpoint/2010/main" val="3056186036"/>
-      </p:ext>
-    </p:extLst>
   </p:cSld>
   <p:clrMapOvr>
     <a:masterClrMapping/>
@@ -1202,18 +950,12 @@
           <a:p>
             <a:fld id="{F35C7EE1-DFFA-4275-BC15-03F63508087A}" type="slidenum">
               <a:rPr lang="en-US" smtClean="0"/>
-              <a:t>18</a:t>
             </a:fld>
             <a:endParaRPr lang="en-US"/>
           </a:p>
         </p:txBody>
       </p:sp>
     </p:spTree>
-    <p:extLst>
-      <p:ext uri="{BB962C8B-B14F-4D97-AF65-F5344CB8AC3E}">
-        <p14:creationId xmlns:p14="http://schemas.microsoft.com/office/powerpoint/2010/main" val="4265454519"/>
-      </p:ext>
-    </p:extLst>
   </p:cSld>
   <p:clrMapOvr>
     <a:masterClrMapping/>
@@ -1286,18 +1028,12 @@
           <a:p>
             <a:fld id="{F35C7EE1-DFFA-4275-BC15-03F63508087A}" type="slidenum">
               <a:rPr lang="en-US" smtClean="0"/>
-              <a:t>24</a:t>
             </a:fld>
             <a:endParaRPr lang="en-US"/>
           </a:p>
         </p:txBody>
       </p:sp>
     </p:spTree>
-    <p:extLst>
-      <p:ext uri="{BB962C8B-B14F-4D97-AF65-F5344CB8AC3E}">
-        <p14:creationId xmlns:p14="http://schemas.microsoft.com/office/powerpoint/2010/main" val="1548777244"/>
-      </p:ext>
-    </p:extLst>
   </p:cSld>
   <p:clrMapOvr>
     <a:masterClrMapping/>
@@ -1370,18 +1106,12 @@
           <a:p>
             <a:fld id="{F35C7EE1-DFFA-4275-BC15-03F63508087A}" type="slidenum">
               <a:rPr lang="en-US" smtClean="0"/>
-              <a:t>25</a:t>
             </a:fld>
             <a:endParaRPr lang="en-US"/>
           </a:p>
         </p:txBody>
       </p:sp>
     </p:spTree>
-    <p:extLst>
-      <p:ext uri="{BB962C8B-B14F-4D97-AF65-F5344CB8AC3E}">
-        <p14:creationId xmlns:p14="http://schemas.microsoft.com/office/powerpoint/2010/main" val="3052535791"/>
-      </p:ext>
-    </p:extLst>
   </p:cSld>
   <p:clrMapOvr>
     <a:masterClrMapping/>
@@ -1461,19 +1191,12 @@
           <a:p>
             <a:fld id="{347179E1-1FAE-4667-A618-B3C44D7B1E80}" type="slidenum">
               <a:rPr lang="en-US" smtClean="0"/>
-              <a:pPr/>
-              <a:t>27</a:t>
             </a:fld>
             <a:endParaRPr lang="en-US"/>
           </a:p>
         </p:txBody>
       </p:sp>
     </p:spTree>
-    <p:extLst>
-      <p:ext uri="{BB962C8B-B14F-4D97-AF65-F5344CB8AC3E}">
-        <p14:creationId xmlns:p14="http://schemas.microsoft.com/office/powerpoint/2010/main" val="3112964912"/>
-      </p:ext>
-    </p:extLst>
   </p:cSld>
   <p:clrMapOvr>
     <a:masterClrMapping/>
@@ -1677,7 +1400,6 @@
           <a:p>
             <a:fld id="{48A87A34-81AB-432B-8DAE-1953F412C126}" type="datetimeFigureOut">
               <a:rPr lang="en-US" smtClean="0"/>
-              <a:t>5/6/2026</a:t>
             </a:fld>
             <a:endParaRPr lang="en-US" dirty="0"/>
           </a:p>
@@ -1719,18 +1441,12 @@
           <a:p>
             <a:fld id="{6D22F896-40B5-4ADD-8801-0D06FADFA095}" type="slidenum">
               <a:rPr lang="en-US" smtClean="0"/>
-              <a:t>‹#›</a:t>
             </a:fld>
             <a:endParaRPr lang="en-US" dirty="0"/>
           </a:p>
         </p:txBody>
       </p:sp>
     </p:spTree>
-    <p:extLst>
-      <p:ext uri="{BB962C8B-B14F-4D97-AF65-F5344CB8AC3E}">
-        <p14:creationId xmlns:p14="http://schemas.microsoft.com/office/powerpoint/2010/main" val="1466041232"/>
-      </p:ext>
-    </p:extLst>
   </p:cSld>
   <p:clrMapOvr>
     <a:masterClrMapping/>
@@ -1938,6 +1654,7 @@
               <a:rPr lang="en-US"/>
               <a:t>Edit Master text styles</a:t>
             </a:r>
+            <a:endParaRPr lang="en-US"/>
           </a:p>
         </p:txBody>
       </p:sp>
@@ -1958,8 +1675,6 @@
           <a:p>
             <a:fld id="{48A87A34-81AB-432B-8DAE-1953F412C126}" type="datetimeFigureOut">
               <a:rPr lang="en-US" smtClean="0"/>
-              <a:pPr/>
-              <a:t>5/6/2026</a:t>
             </a:fld>
             <a:endParaRPr lang="en-US" dirty="0"/>
           </a:p>
@@ -2001,19 +1716,12 @@
           <a:p>
             <a:fld id="{6D22F896-40B5-4ADD-8801-0D06FADFA095}" type="slidenum">
               <a:rPr lang="en-US" smtClean="0"/>
-              <a:pPr/>
-              <a:t>‹#›</a:t>
             </a:fld>
             <a:endParaRPr lang="en-US" dirty="0"/>
           </a:p>
         </p:txBody>
       </p:sp>
     </p:spTree>
-    <p:extLst>
-      <p:ext uri="{BB962C8B-B14F-4D97-AF65-F5344CB8AC3E}">
-        <p14:creationId xmlns:p14="http://schemas.microsoft.com/office/powerpoint/2010/main" val="3870422250"/>
-      </p:ext>
-    </p:extLst>
   </p:cSld>
   <p:clrMapOvr>
     <a:masterClrMapping/>
@@ -2132,6 +1840,7 @@
               <a:rPr lang="en-US"/>
               <a:t>Edit Master text styles</a:t>
             </a:r>
+            <a:endParaRPr lang="en-US"/>
           </a:p>
         </p:txBody>
       </p:sp>
@@ -2152,8 +1861,6 @@
           <a:p>
             <a:fld id="{48A87A34-81AB-432B-8DAE-1953F412C126}" type="datetimeFigureOut">
               <a:rPr lang="en-US" smtClean="0"/>
-              <a:pPr/>
-              <a:t>5/6/2026</a:t>
             </a:fld>
             <a:endParaRPr lang="en-US" dirty="0"/>
           </a:p>
@@ -2195,19 +1902,12 @@
           <a:p>
             <a:fld id="{6D22F896-40B5-4ADD-8801-0D06FADFA095}" type="slidenum">
               <a:rPr lang="en-US" smtClean="0"/>
-              <a:pPr/>
-              <a:t>‹#›</a:t>
             </a:fld>
             <a:endParaRPr lang="en-US" dirty="0"/>
           </a:p>
         </p:txBody>
       </p:sp>
     </p:spTree>
-    <p:extLst>
-      <p:ext uri="{BB962C8B-B14F-4D97-AF65-F5344CB8AC3E}">
-        <p14:creationId xmlns:p14="http://schemas.microsoft.com/office/powerpoint/2010/main" val="2954018111"/>
-      </p:ext>
-    </p:extLst>
   </p:cSld>
   <p:clrMapOvr>
     <a:masterClrMapping/>
@@ -2328,6 +2028,7 @@
               <a:rPr lang="en-US"/>
               <a:t>Edit Master text styles</a:t>
             </a:r>
+            <a:endParaRPr lang="en-US"/>
           </a:p>
         </p:txBody>
       </p:sp>
@@ -2395,6 +2096,7 @@
               <a:rPr lang="en-US"/>
               <a:t>Edit Master text styles</a:t>
             </a:r>
+            <a:endParaRPr lang="en-US"/>
           </a:p>
         </p:txBody>
       </p:sp>
@@ -2415,8 +2117,6 @@
           <a:p>
             <a:fld id="{48A87A34-81AB-432B-8DAE-1953F412C126}" type="datetimeFigureOut">
               <a:rPr lang="en-US" smtClean="0"/>
-              <a:pPr/>
-              <a:t>5/6/2026</a:t>
             </a:fld>
             <a:endParaRPr lang="en-US" dirty="0"/>
           </a:p>
@@ -2458,8 +2158,6 @@
           <a:p>
             <a:fld id="{6D22F896-40B5-4ADD-8801-0D06FADFA095}" type="slidenum">
               <a:rPr lang="en-US" smtClean="0"/>
-              <a:pPr/>
-              <a:t>‹#›</a:t>
             </a:fld>
             <a:endParaRPr lang="en-US" dirty="0"/>
           </a:p>
@@ -2578,6 +2276,12 @@
               </a:rPr>
               <a:t>“</a:t>
             </a:r>
+            <a:endParaRPr lang="en-US" sz="8000" dirty="0">
+              <a:solidFill>
+                <a:schemeClr val="tx1"/>
+              </a:solidFill>
+              <a:effectLst/>
+            </a:endParaRPr>
           </a:p>
         </p:txBody>
       </p:sp>
@@ -2694,15 +2398,16 @@
               </a:rPr>
               <a:t>”</a:t>
             </a:r>
+            <a:endParaRPr lang="en-US" sz="8000" dirty="0">
+              <a:solidFill>
+                <a:schemeClr val="tx1"/>
+              </a:solidFill>
+              <a:effectLst/>
+            </a:endParaRPr>
           </a:p>
         </p:txBody>
       </p:sp>
     </p:spTree>
-    <p:extLst>
-      <p:ext uri="{BB962C8B-B14F-4D97-AF65-F5344CB8AC3E}">
-        <p14:creationId xmlns:p14="http://schemas.microsoft.com/office/powerpoint/2010/main" val="1627185708"/>
-      </p:ext>
-    </p:extLst>
   </p:cSld>
   <p:clrMapOvr>
     <a:masterClrMapping/>
@@ -2823,6 +2528,7 @@
               <a:rPr lang="en-US"/>
               <a:t>Edit Master text styles</a:t>
             </a:r>
+            <a:endParaRPr lang="en-US"/>
           </a:p>
         </p:txBody>
       </p:sp>
@@ -2843,8 +2549,6 @@
           <a:p>
             <a:fld id="{48A87A34-81AB-432B-8DAE-1953F412C126}" type="datetimeFigureOut">
               <a:rPr lang="en-US" smtClean="0"/>
-              <a:pPr/>
-              <a:t>5/6/2026</a:t>
             </a:fld>
             <a:endParaRPr lang="en-US" dirty="0"/>
           </a:p>
@@ -2886,19 +2590,12 @@
           <a:p>
             <a:fld id="{6D22F896-40B5-4ADD-8801-0D06FADFA095}" type="slidenum">
               <a:rPr lang="en-US" smtClean="0"/>
-              <a:pPr/>
-              <a:t>‹#›</a:t>
             </a:fld>
             <a:endParaRPr lang="en-US" dirty="0"/>
           </a:p>
         </p:txBody>
       </p:sp>
     </p:spTree>
-    <p:extLst>
-      <p:ext uri="{BB962C8B-B14F-4D97-AF65-F5344CB8AC3E}">
-        <p14:creationId xmlns:p14="http://schemas.microsoft.com/office/powerpoint/2010/main" val="3799769888"/>
-      </p:ext>
-    </p:extLst>
   </p:cSld>
   <p:clrMapOvr>
     <a:masterClrMapping/>
@@ -3042,6 +2739,7 @@
               <a:rPr lang="en-US"/>
               <a:t>Edit Master text styles</a:t>
             </a:r>
+            <a:endParaRPr lang="en-US"/>
           </a:p>
         </p:txBody>
       </p:sp>
@@ -3109,6 +2807,7 @@
               <a:rPr lang="en-US"/>
               <a:t>Edit Master text styles</a:t>
             </a:r>
+            <a:endParaRPr lang="en-US"/>
           </a:p>
         </p:txBody>
       </p:sp>
@@ -3173,6 +2872,7 @@
               <a:rPr lang="en-US"/>
               <a:t>Edit Master text styles</a:t>
             </a:r>
+            <a:endParaRPr lang="en-US"/>
           </a:p>
         </p:txBody>
       </p:sp>
@@ -3240,6 +2940,7 @@
               <a:rPr lang="en-US"/>
               <a:t>Edit Master text styles</a:t>
             </a:r>
+            <a:endParaRPr lang="en-US"/>
           </a:p>
         </p:txBody>
       </p:sp>
@@ -3304,6 +3005,7 @@
               <a:rPr lang="en-US"/>
               <a:t>Edit Master text styles</a:t>
             </a:r>
+            <a:endParaRPr lang="en-US"/>
           </a:p>
         </p:txBody>
       </p:sp>
@@ -3371,6 +3073,7 @@
               <a:rPr lang="en-US"/>
               <a:t>Edit Master text styles</a:t>
             </a:r>
+            <a:endParaRPr lang="en-US"/>
           </a:p>
         </p:txBody>
       </p:sp>
@@ -3391,8 +3094,6 @@
           <a:p>
             <a:fld id="{48A87A34-81AB-432B-8DAE-1953F412C126}" type="datetimeFigureOut">
               <a:rPr lang="en-US" smtClean="0"/>
-              <a:pPr/>
-              <a:t>5/6/2026</a:t>
             </a:fld>
             <a:endParaRPr lang="en-US" dirty="0"/>
           </a:p>
@@ -3434,19 +3135,12 @@
           <a:p>
             <a:fld id="{6D22F896-40B5-4ADD-8801-0D06FADFA095}" type="slidenum">
               <a:rPr lang="en-US" smtClean="0"/>
-              <a:pPr/>
-              <a:t>‹#›</a:t>
             </a:fld>
             <a:endParaRPr lang="en-US" dirty="0"/>
           </a:p>
         </p:txBody>
       </p:sp>
     </p:spTree>
-    <p:extLst>
-      <p:ext uri="{BB962C8B-B14F-4D97-AF65-F5344CB8AC3E}">
-        <p14:creationId xmlns:p14="http://schemas.microsoft.com/office/powerpoint/2010/main" val="366689954"/>
-      </p:ext>
-    </p:extLst>
   </p:cSld>
   <p:clrMapOvr>
     <a:masterClrMapping/>
@@ -3586,6 +3280,7 @@
               <a:rPr lang="en-US"/>
               <a:t>Edit Master text styles</a:t>
             </a:r>
+            <a:endParaRPr lang="en-US"/>
           </a:p>
         </p:txBody>
       </p:sp>
@@ -3732,6 +3427,7 @@
               <a:rPr lang="en-US"/>
               <a:t>Edit Master text styles</a:t>
             </a:r>
+            <a:endParaRPr lang="en-US"/>
           </a:p>
         </p:txBody>
       </p:sp>
@@ -3822,6 +3518,7 @@
               <a:rPr lang="en-US"/>
               <a:t>Edit Master text styles</a:t>
             </a:r>
+            <a:endParaRPr lang="en-US"/>
           </a:p>
         </p:txBody>
       </p:sp>
@@ -3968,6 +3665,7 @@
               <a:rPr lang="en-US"/>
               <a:t>Edit Master text styles</a:t>
             </a:r>
+            <a:endParaRPr lang="en-US"/>
           </a:p>
         </p:txBody>
       </p:sp>
@@ -4058,6 +3756,7 @@
               <a:rPr lang="en-US"/>
               <a:t>Edit Master text styles</a:t>
             </a:r>
+            <a:endParaRPr lang="en-US"/>
           </a:p>
         </p:txBody>
       </p:sp>
@@ -4204,6 +3903,7 @@
               <a:rPr lang="en-US"/>
               <a:t>Edit Master text styles</a:t>
             </a:r>
+            <a:endParaRPr lang="en-US"/>
           </a:p>
         </p:txBody>
       </p:sp>
@@ -4224,8 +3924,6 @@
           <a:p>
             <a:fld id="{48A87A34-81AB-432B-8DAE-1953F412C126}" type="datetimeFigureOut">
               <a:rPr lang="en-US" smtClean="0"/>
-              <a:pPr/>
-              <a:t>5/6/2026</a:t>
             </a:fld>
             <a:endParaRPr lang="en-US" dirty="0"/>
           </a:p>
@@ -4267,19 +3965,12 @@
           <a:p>
             <a:fld id="{6D22F896-40B5-4ADD-8801-0D06FADFA095}" type="slidenum">
               <a:rPr lang="en-US" smtClean="0"/>
-              <a:pPr/>
-              <a:t>‹#›</a:t>
             </a:fld>
             <a:endParaRPr lang="en-US" dirty="0"/>
           </a:p>
         </p:txBody>
       </p:sp>
     </p:spTree>
-    <p:extLst>
-      <p:ext uri="{BB962C8B-B14F-4D97-AF65-F5344CB8AC3E}">
-        <p14:creationId xmlns:p14="http://schemas.microsoft.com/office/powerpoint/2010/main" val="3611831392"/>
-      </p:ext>
-    </p:extLst>
   </p:cSld>
   <p:clrMapOvr>
     <a:masterClrMapping/>
@@ -4347,6 +4038,7 @@
               <a:rPr lang="en-US"/>
               <a:t>Edit Master text styles</a:t>
             </a:r>
+            <a:endParaRPr lang="en-US"/>
           </a:p>
           <a:p>
             <a:pPr lvl="1"/>
@@ -4354,6 +4046,7 @@
               <a:rPr lang="en-US"/>
               <a:t>Second level</a:t>
             </a:r>
+            <a:endParaRPr lang="en-US"/>
           </a:p>
           <a:p>
             <a:pPr lvl="2"/>
@@ -4361,6 +4054,7 @@
               <a:rPr lang="en-US"/>
               <a:t>Third level</a:t>
             </a:r>
+            <a:endParaRPr lang="en-US"/>
           </a:p>
           <a:p>
             <a:pPr lvl="3"/>
@@ -4368,6 +4062,7 @@
               <a:rPr lang="en-US"/>
               <a:t>Fourth level</a:t>
             </a:r>
+            <a:endParaRPr lang="en-US"/>
           </a:p>
           <a:p>
             <a:pPr lvl="4"/>
@@ -4396,7 +4091,6 @@
           <a:p>
             <a:fld id="{48A87A34-81AB-432B-8DAE-1953F412C126}" type="datetimeFigureOut">
               <a:rPr lang="en-US" smtClean="0"/>
-              <a:t>5/6/2026</a:t>
             </a:fld>
             <a:endParaRPr lang="en-US" dirty="0"/>
           </a:p>
@@ -4438,18 +4132,12 @@
           <a:p>
             <a:fld id="{6D22F896-40B5-4ADD-8801-0D06FADFA095}" type="slidenum">
               <a:rPr lang="en-US" smtClean="0"/>
-              <a:t>‹#›</a:t>
             </a:fld>
             <a:endParaRPr lang="en-US" dirty="0"/>
           </a:p>
         </p:txBody>
       </p:sp>
     </p:spTree>
-    <p:extLst>
-      <p:ext uri="{BB962C8B-B14F-4D97-AF65-F5344CB8AC3E}">
-        <p14:creationId xmlns:p14="http://schemas.microsoft.com/office/powerpoint/2010/main" val="188884939"/>
-      </p:ext>
-    </p:extLst>
   </p:cSld>
   <p:clrMapOvr>
     <a:masterClrMapping/>
@@ -4527,6 +4215,7 @@
               <a:rPr lang="en-US"/>
               <a:t>Edit Master text styles</a:t>
             </a:r>
+            <a:endParaRPr lang="en-US"/>
           </a:p>
           <a:p>
             <a:pPr lvl="1"/>
@@ -4534,6 +4223,7 @@
               <a:rPr lang="en-US"/>
               <a:t>Second level</a:t>
             </a:r>
+            <a:endParaRPr lang="en-US"/>
           </a:p>
           <a:p>
             <a:pPr lvl="2"/>
@@ -4541,6 +4231,7 @@
               <a:rPr lang="en-US"/>
               <a:t>Third level</a:t>
             </a:r>
+            <a:endParaRPr lang="en-US"/>
           </a:p>
           <a:p>
             <a:pPr lvl="3"/>
@@ -4548,6 +4239,7 @@
               <a:rPr lang="en-US"/>
               <a:t>Fourth level</a:t>
             </a:r>
+            <a:endParaRPr lang="en-US"/>
           </a:p>
           <a:p>
             <a:pPr lvl="4"/>
@@ -4576,7 +4268,6 @@
           <a:p>
             <a:fld id="{48A87A34-81AB-432B-8DAE-1953F412C126}" type="datetimeFigureOut">
               <a:rPr lang="en-US" smtClean="0"/>
-              <a:t>5/6/2026</a:t>
             </a:fld>
             <a:endParaRPr lang="en-US" dirty="0"/>
           </a:p>
@@ -4618,18 +4309,12 @@
           <a:p>
             <a:fld id="{6D22F896-40B5-4ADD-8801-0D06FADFA095}" type="slidenum">
               <a:rPr lang="en-US" smtClean="0"/>
-              <a:t>‹#›</a:t>
             </a:fld>
             <a:endParaRPr lang="en-US" dirty="0"/>
           </a:p>
         </p:txBody>
       </p:sp>
     </p:spTree>
-    <p:extLst>
-      <p:ext uri="{BB962C8B-B14F-4D97-AF65-F5344CB8AC3E}">
-        <p14:creationId xmlns:p14="http://schemas.microsoft.com/office/powerpoint/2010/main" val="1974988419"/>
-      </p:ext>
-    </p:extLst>
   </p:cSld>
   <p:clrMapOvr>
     <a:masterClrMapping/>
@@ -4697,6 +4382,7 @@
               <a:rPr lang="en-US"/>
               <a:t>Edit Master text styles</a:t>
             </a:r>
+            <a:endParaRPr lang="en-US"/>
           </a:p>
           <a:p>
             <a:pPr lvl="1"/>
@@ -4704,6 +4390,7 @@
               <a:rPr lang="en-US"/>
               <a:t>Second level</a:t>
             </a:r>
+            <a:endParaRPr lang="en-US"/>
           </a:p>
           <a:p>
             <a:pPr lvl="2"/>
@@ -4711,6 +4398,7 @@
               <a:rPr lang="en-US"/>
               <a:t>Third level</a:t>
             </a:r>
+            <a:endParaRPr lang="en-US"/>
           </a:p>
           <a:p>
             <a:pPr lvl="3"/>
@@ -4718,6 +4406,7 @@
               <a:rPr lang="en-US"/>
               <a:t>Fourth level</a:t>
             </a:r>
+            <a:endParaRPr lang="en-US"/>
           </a:p>
           <a:p>
             <a:pPr lvl="4"/>
@@ -4746,7 +4435,6 @@
           <a:p>
             <a:fld id="{48A87A34-81AB-432B-8DAE-1953F412C126}" type="datetimeFigureOut">
               <a:rPr lang="en-US" smtClean="0"/>
-              <a:t>5/6/2026</a:t>
             </a:fld>
             <a:endParaRPr lang="en-US" dirty="0"/>
           </a:p>
@@ -4788,18 +4476,12 @@
           <a:p>
             <a:fld id="{6D22F896-40B5-4ADD-8801-0D06FADFA095}" type="slidenum">
               <a:rPr lang="en-US" smtClean="0"/>
-              <a:t>‹#›</a:t>
             </a:fld>
             <a:endParaRPr lang="en-US" dirty="0"/>
           </a:p>
         </p:txBody>
       </p:sp>
     </p:spTree>
-    <p:extLst>
-      <p:ext uri="{BB962C8B-B14F-4D97-AF65-F5344CB8AC3E}">
-        <p14:creationId xmlns:p14="http://schemas.microsoft.com/office/powerpoint/2010/main" val="4038753593"/>
-      </p:ext>
-    </p:extLst>
   </p:cSld>
   <p:clrMapOvr>
     <a:masterClrMapping/>
@@ -5003,7 +4685,6 @@
           <a:p>
             <a:fld id="{48A87A34-81AB-432B-8DAE-1953F412C126}" type="datetimeFigureOut">
               <a:rPr lang="en-US" smtClean="0"/>
-              <a:t>5/6/2026</a:t>
             </a:fld>
             <a:endParaRPr lang="en-US" dirty="0"/>
           </a:p>
@@ -5045,18 +4726,12 @@
           <a:p>
             <a:fld id="{6D22F896-40B5-4ADD-8801-0D06FADFA095}" type="slidenum">
               <a:rPr lang="en-US" smtClean="0"/>
-              <a:t>‹#›</a:t>
             </a:fld>
             <a:endParaRPr lang="en-US" dirty="0"/>
           </a:p>
         </p:txBody>
       </p:sp>
     </p:spTree>
-    <p:extLst>
-      <p:ext uri="{BB962C8B-B14F-4D97-AF65-F5344CB8AC3E}">
-        <p14:creationId xmlns:p14="http://schemas.microsoft.com/office/powerpoint/2010/main" val="2803417745"/>
-      </p:ext>
-    </p:extLst>
   </p:cSld>
   <p:clrMapOvr>
     <a:masterClrMapping/>
@@ -5129,6 +4804,7 @@
               <a:rPr lang="en-US"/>
               <a:t>Edit Master text styles</a:t>
             </a:r>
+            <a:endParaRPr lang="en-US"/>
           </a:p>
           <a:p>
             <a:pPr lvl="1"/>
@@ -5136,6 +4812,7 @@
               <a:rPr lang="en-US"/>
               <a:t>Second level</a:t>
             </a:r>
+            <a:endParaRPr lang="en-US"/>
           </a:p>
           <a:p>
             <a:pPr lvl="2"/>
@@ -5143,6 +4820,7 @@
               <a:rPr lang="en-US"/>
               <a:t>Third level</a:t>
             </a:r>
+            <a:endParaRPr lang="en-US"/>
           </a:p>
           <a:p>
             <a:pPr lvl="3"/>
@@ -5150,6 +4828,7 @@
               <a:rPr lang="en-US"/>
               <a:t>Fourth level</a:t>
             </a:r>
+            <a:endParaRPr lang="en-US"/>
           </a:p>
           <a:p>
             <a:pPr lvl="4"/>
@@ -5186,6 +4865,7 @@
               <a:rPr lang="en-US"/>
               <a:t>Edit Master text styles</a:t>
             </a:r>
+            <a:endParaRPr lang="en-US"/>
           </a:p>
           <a:p>
             <a:pPr lvl="1"/>
@@ -5193,6 +4873,7 @@
               <a:rPr lang="en-US"/>
               <a:t>Second level</a:t>
             </a:r>
+            <a:endParaRPr lang="en-US"/>
           </a:p>
           <a:p>
             <a:pPr lvl="2"/>
@@ -5200,6 +4881,7 @@
               <a:rPr lang="en-US"/>
               <a:t>Third level</a:t>
             </a:r>
+            <a:endParaRPr lang="en-US"/>
           </a:p>
           <a:p>
             <a:pPr lvl="3"/>
@@ -5207,6 +4889,7 @@
               <a:rPr lang="en-US"/>
               <a:t>Fourth level</a:t>
             </a:r>
+            <a:endParaRPr lang="en-US"/>
           </a:p>
           <a:p>
             <a:pPr lvl="4"/>
@@ -5235,7 +4918,6 @@
           <a:p>
             <a:fld id="{48A87A34-81AB-432B-8DAE-1953F412C126}" type="datetimeFigureOut">
               <a:rPr lang="en-US" smtClean="0"/>
-              <a:t>5/6/2026</a:t>
             </a:fld>
             <a:endParaRPr lang="en-US" dirty="0"/>
           </a:p>
@@ -5277,18 +4959,12 @@
           <a:p>
             <a:fld id="{6D22F896-40B5-4ADD-8801-0D06FADFA095}" type="slidenum">
               <a:rPr lang="en-US" smtClean="0"/>
-              <a:t>‹#›</a:t>
             </a:fld>
             <a:endParaRPr lang="en-US" dirty="0"/>
           </a:p>
         </p:txBody>
       </p:sp>
     </p:spTree>
-    <p:extLst>
-      <p:ext uri="{BB962C8B-B14F-4D97-AF65-F5344CB8AC3E}">
-        <p14:creationId xmlns:p14="http://schemas.microsoft.com/office/powerpoint/2010/main" val="2132323165"/>
-      </p:ext>
-    </p:extLst>
   </p:cSld>
   <p:clrMapOvr>
     <a:masterClrMapping/>
@@ -5430,6 +5106,7 @@
               <a:rPr lang="en-US"/>
               <a:t>Edit Master text styles</a:t>
             </a:r>
+            <a:endParaRPr lang="en-US"/>
           </a:p>
         </p:txBody>
       </p:sp>
@@ -5458,6 +5135,7 @@
               <a:rPr lang="en-US"/>
               <a:t>Edit Master text styles</a:t>
             </a:r>
+            <a:endParaRPr lang="en-US"/>
           </a:p>
           <a:p>
             <a:pPr lvl="1"/>
@@ -5465,6 +5143,7 @@
               <a:rPr lang="en-US"/>
               <a:t>Second level</a:t>
             </a:r>
+            <a:endParaRPr lang="en-US"/>
           </a:p>
           <a:p>
             <a:pPr lvl="2"/>
@@ -5472,6 +5151,7 @@
               <a:rPr lang="en-US"/>
               <a:t>Third level</a:t>
             </a:r>
+            <a:endParaRPr lang="en-US"/>
           </a:p>
           <a:p>
             <a:pPr lvl="3"/>
@@ -5479,6 +5159,7 @@
               <a:rPr lang="en-US"/>
               <a:t>Fourth level</a:t>
             </a:r>
+            <a:endParaRPr lang="en-US"/>
           </a:p>
           <a:p>
             <a:pPr lvl="4"/>
@@ -5551,6 +5232,7 @@
               <a:rPr lang="en-US"/>
               <a:t>Edit Master text styles</a:t>
             </a:r>
+            <a:endParaRPr lang="en-US"/>
           </a:p>
         </p:txBody>
       </p:sp>
@@ -5579,6 +5261,7 @@
               <a:rPr lang="en-US"/>
               <a:t>Edit Master text styles</a:t>
             </a:r>
+            <a:endParaRPr lang="en-US"/>
           </a:p>
           <a:p>
             <a:pPr lvl="1"/>
@@ -5586,6 +5269,7 @@
               <a:rPr lang="en-US"/>
               <a:t>Second level</a:t>
             </a:r>
+            <a:endParaRPr lang="en-US"/>
           </a:p>
           <a:p>
             <a:pPr lvl="2"/>
@@ -5593,6 +5277,7 @@
               <a:rPr lang="en-US"/>
               <a:t>Third level</a:t>
             </a:r>
+            <a:endParaRPr lang="en-US"/>
           </a:p>
           <a:p>
             <a:pPr lvl="3"/>
@@ -5600,6 +5285,7 @@
               <a:rPr lang="en-US"/>
               <a:t>Fourth level</a:t>
             </a:r>
+            <a:endParaRPr lang="en-US"/>
           </a:p>
           <a:p>
             <a:pPr lvl="4"/>
@@ -5628,7 +5314,6 @@
           <a:p>
             <a:fld id="{48A87A34-81AB-432B-8DAE-1953F412C126}" type="datetimeFigureOut">
               <a:rPr lang="en-US" smtClean="0"/>
-              <a:t>5/6/2026</a:t>
             </a:fld>
             <a:endParaRPr lang="en-US" dirty="0"/>
           </a:p>
@@ -5670,18 +5355,12 @@
           <a:p>
             <a:fld id="{6D22F896-40B5-4ADD-8801-0D06FADFA095}" type="slidenum">
               <a:rPr lang="en-US" smtClean="0"/>
-              <a:t>‹#›</a:t>
             </a:fld>
             <a:endParaRPr lang="en-US" dirty="0"/>
           </a:p>
         </p:txBody>
       </p:sp>
     </p:spTree>
-    <p:extLst>
-      <p:ext uri="{BB962C8B-B14F-4D97-AF65-F5344CB8AC3E}">
-        <p14:creationId xmlns:p14="http://schemas.microsoft.com/office/powerpoint/2010/main" val="4083085902"/>
-      </p:ext>
-    </p:extLst>
   </p:cSld>
   <p:clrMapOvr>
     <a:masterClrMapping/>
@@ -5746,7 +5425,6 @@
           <a:p>
             <a:fld id="{48A87A34-81AB-432B-8DAE-1953F412C126}" type="datetimeFigureOut">
               <a:rPr lang="en-US" smtClean="0"/>
-              <a:t>5/6/2026</a:t>
             </a:fld>
             <a:endParaRPr lang="en-US" dirty="0"/>
           </a:p>
@@ -5788,18 +5466,12 @@
           <a:p>
             <a:fld id="{6D22F896-40B5-4ADD-8801-0D06FADFA095}" type="slidenum">
               <a:rPr lang="en-US" smtClean="0"/>
-              <a:t>‹#›</a:t>
             </a:fld>
             <a:endParaRPr lang="en-US" dirty="0"/>
           </a:p>
         </p:txBody>
       </p:sp>
     </p:spTree>
-    <p:extLst>
-      <p:ext uri="{BB962C8B-B14F-4D97-AF65-F5344CB8AC3E}">
-        <p14:creationId xmlns:p14="http://schemas.microsoft.com/office/powerpoint/2010/main" val="1252756955"/>
-      </p:ext>
-    </p:extLst>
   </p:cSld>
   <p:clrMapOvr>
     <a:masterClrMapping/>
@@ -5841,7 +5513,6 @@
           <a:p>
             <a:fld id="{48A87A34-81AB-432B-8DAE-1953F412C126}" type="datetimeFigureOut">
               <a:rPr lang="en-US" smtClean="0"/>
-              <a:t>5/6/2026</a:t>
             </a:fld>
             <a:endParaRPr lang="en-US" dirty="0"/>
           </a:p>
@@ -5883,18 +5554,12 @@
           <a:p>
             <a:fld id="{6D22F896-40B5-4ADD-8801-0D06FADFA095}" type="slidenum">
               <a:rPr lang="en-US" smtClean="0"/>
-              <a:t>‹#›</a:t>
             </a:fld>
             <a:endParaRPr lang="en-US" dirty="0"/>
           </a:p>
         </p:txBody>
       </p:sp>
     </p:spTree>
-    <p:extLst>
-      <p:ext uri="{BB962C8B-B14F-4D97-AF65-F5344CB8AC3E}">
-        <p14:creationId xmlns:p14="http://schemas.microsoft.com/office/powerpoint/2010/main" val="1622456484"/>
-      </p:ext>
-    </p:extLst>
   </p:cSld>
   <p:clrMapOvr>
     <a:masterClrMapping/>
@@ -5976,6 +5641,7 @@
               <a:rPr lang="en-US"/>
               <a:t>Edit Master text styles</a:t>
             </a:r>
+            <a:endParaRPr lang="en-US"/>
           </a:p>
           <a:p>
             <a:pPr lvl="1"/>
@@ -5983,6 +5649,7 @@
               <a:rPr lang="en-US"/>
               <a:t>Second level</a:t>
             </a:r>
+            <a:endParaRPr lang="en-US"/>
           </a:p>
           <a:p>
             <a:pPr lvl="2"/>
@@ -5990,6 +5657,7 @@
               <a:rPr lang="en-US"/>
               <a:t>Third level</a:t>
             </a:r>
+            <a:endParaRPr lang="en-US"/>
           </a:p>
           <a:p>
             <a:pPr lvl="3"/>
@@ -5997,6 +5665,7 @@
               <a:rPr lang="en-US"/>
               <a:t>Fourth level</a:t>
             </a:r>
+            <a:endParaRPr lang="en-US"/>
           </a:p>
           <a:p>
             <a:pPr lvl="4"/>
@@ -6094,6 +5763,7 @@
               <a:rPr lang="en-US"/>
               <a:t>Edit Master text styles</a:t>
             </a:r>
+            <a:endParaRPr lang="en-US"/>
           </a:p>
         </p:txBody>
       </p:sp>
@@ -6114,7 +5784,6 @@
           <a:p>
             <a:fld id="{48A87A34-81AB-432B-8DAE-1953F412C126}" type="datetimeFigureOut">
               <a:rPr lang="en-US" smtClean="0"/>
-              <a:t>5/6/2026</a:t>
             </a:fld>
             <a:endParaRPr lang="en-US" dirty="0"/>
           </a:p>
@@ -6156,18 +5825,12 @@
           <a:p>
             <a:fld id="{6D22F896-40B5-4ADD-8801-0D06FADFA095}" type="slidenum">
               <a:rPr lang="en-US" smtClean="0"/>
-              <a:t>‹#›</a:t>
             </a:fld>
             <a:endParaRPr lang="en-US" dirty="0"/>
           </a:p>
         </p:txBody>
       </p:sp>
     </p:spTree>
-    <p:extLst>
-      <p:ext uri="{BB962C8B-B14F-4D97-AF65-F5344CB8AC3E}">
-        <p14:creationId xmlns:p14="http://schemas.microsoft.com/office/powerpoint/2010/main" val="2165551576"/>
-      </p:ext>
-    </p:extLst>
   </p:cSld>
   <p:clrMapOvr>
     <a:masterClrMapping/>
@@ -6375,6 +6038,7 @@
               <a:rPr lang="en-US"/>
               <a:t>Edit Master text styles</a:t>
             </a:r>
+            <a:endParaRPr lang="en-US"/>
           </a:p>
         </p:txBody>
       </p:sp>
@@ -6395,7 +6059,6 @@
           <a:p>
             <a:fld id="{48A87A34-81AB-432B-8DAE-1953F412C126}" type="datetimeFigureOut">
               <a:rPr lang="en-US" smtClean="0"/>
-              <a:t>5/6/2026</a:t>
             </a:fld>
             <a:endParaRPr lang="en-US" dirty="0"/>
           </a:p>
@@ -6437,18 +6100,12 @@
           <a:p>
             <a:fld id="{6D22F896-40B5-4ADD-8801-0D06FADFA095}" type="slidenum">
               <a:rPr lang="en-US" smtClean="0"/>
-              <a:t>‹#›</a:t>
             </a:fld>
             <a:endParaRPr lang="en-US" dirty="0"/>
           </a:p>
         </p:txBody>
       </p:sp>
     </p:spTree>
-    <p:extLst>
-      <p:ext uri="{BB962C8B-B14F-4D97-AF65-F5344CB8AC3E}">
-        <p14:creationId xmlns:p14="http://schemas.microsoft.com/office/powerpoint/2010/main" val="1594367443"/>
-      </p:ext>
-    </p:extLst>
   </p:cSld>
   <p:clrMapOvr>
     <a:masterClrMapping/>
@@ -6462,7 +6119,7 @@
     <p:bg>
       <p:bgPr>
         <a:blipFill dpi="0" rotWithShape="1">
-          <a:blip r:embed="rId19">
+          <a:blip r:embed="rId18">
             <a:lum/>
           </a:blip>
           <a:srcRect/>
@@ -6550,6 +6207,7 @@
               <a:rPr lang="en-US"/>
               <a:t>Edit Master text styles</a:t>
             </a:r>
+            <a:endParaRPr lang="en-US"/>
           </a:p>
           <a:p>
             <a:pPr lvl="1"/>
@@ -6557,6 +6215,7 @@
               <a:rPr lang="en-US"/>
               <a:t>Second level</a:t>
             </a:r>
+            <a:endParaRPr lang="en-US"/>
           </a:p>
           <a:p>
             <a:pPr lvl="2"/>
@@ -6564,6 +6223,7 @@
               <a:rPr lang="en-US"/>
               <a:t>Third level</a:t>
             </a:r>
+            <a:endParaRPr lang="en-US"/>
           </a:p>
           <a:p>
             <a:pPr lvl="3"/>
@@ -6571,6 +6231,7 @@
               <a:rPr lang="en-US"/>
               <a:t>Fourth level</a:t>
             </a:r>
+            <a:endParaRPr lang="en-US"/>
           </a:p>
           <a:p>
             <a:pPr lvl="4"/>
@@ -6635,8 +6296,6 @@
           <a:p>
             <a:fld id="{48A87A34-81AB-432B-8DAE-1953F412C126}" type="datetimeFigureOut">
               <a:rPr lang="en-US" smtClean="0"/>
-              <a:pPr/>
-              <a:t>5/6/2026</a:t>
             </a:fld>
             <a:endParaRPr lang="en-US" dirty="0"/>
           </a:p>
@@ -6750,39 +6409,32 @@
           <a:p>
             <a:fld id="{6D22F896-40B5-4ADD-8801-0D06FADFA095}" type="slidenum">
               <a:rPr lang="en-US" smtClean="0"/>
-              <a:pPr/>
-              <a:t>‹#›</a:t>
             </a:fld>
             <a:endParaRPr lang="en-US" dirty="0"/>
           </a:p>
         </p:txBody>
       </p:sp>
     </p:spTree>
-    <p:extLst>
-      <p:ext uri="{BB962C8B-B14F-4D97-AF65-F5344CB8AC3E}">
-        <p14:creationId xmlns:p14="http://schemas.microsoft.com/office/powerpoint/2010/main" val="2317993254"/>
-      </p:ext>
-    </p:extLst>
   </p:cSld>
   <p:clrMap bg1="dk1" tx1="lt1" bg2="dk2" tx2="lt2" accent1="accent1" accent2="accent2" accent3="accent3" accent4="accent4" accent5="accent5" accent6="accent6" hlink="hlink" folHlink="folHlink"/>
   <p:sldLayoutIdLst>
-    <p:sldLayoutId id="2147483793" r:id="rId1"/>
-    <p:sldLayoutId id="2147483794" r:id="rId2"/>
-    <p:sldLayoutId id="2147483795" r:id="rId3"/>
-    <p:sldLayoutId id="2147483796" r:id="rId4"/>
-    <p:sldLayoutId id="2147483797" r:id="rId5"/>
-    <p:sldLayoutId id="2147483798" r:id="rId6"/>
-    <p:sldLayoutId id="2147483799" r:id="rId7"/>
-    <p:sldLayoutId id="2147483800" r:id="rId8"/>
-    <p:sldLayoutId id="2147483801" r:id="rId9"/>
-    <p:sldLayoutId id="2147483802" r:id="rId10"/>
-    <p:sldLayoutId id="2147483803" r:id="rId11"/>
-    <p:sldLayoutId id="2147483804" r:id="rId12"/>
-    <p:sldLayoutId id="2147483805" r:id="rId13"/>
-    <p:sldLayoutId id="2147483806" r:id="rId14"/>
-    <p:sldLayoutId id="2147483807" r:id="rId15"/>
-    <p:sldLayoutId id="2147483808" r:id="rId16"/>
-    <p:sldLayoutId id="2147483809" r:id="rId17"/>
+    <p:sldLayoutId id="2147483649" r:id="rId1"/>
+    <p:sldLayoutId id="2147483650" r:id="rId2"/>
+    <p:sldLayoutId id="2147483651" r:id="rId3"/>
+    <p:sldLayoutId id="2147483652" r:id="rId4"/>
+    <p:sldLayoutId id="2147483653" r:id="rId5"/>
+    <p:sldLayoutId id="2147483654" r:id="rId6"/>
+    <p:sldLayoutId id="2147483655" r:id="rId7"/>
+    <p:sldLayoutId id="2147483656" r:id="rId8"/>
+    <p:sldLayoutId id="2147483657" r:id="rId9"/>
+    <p:sldLayoutId id="2147483658" r:id="rId10"/>
+    <p:sldLayoutId id="2147483659" r:id="rId11"/>
+    <p:sldLayoutId id="2147483660" r:id="rId12"/>
+    <p:sldLayoutId id="2147483661" r:id="rId13"/>
+    <p:sldLayoutId id="2147483662" r:id="rId14"/>
+    <p:sldLayoutId id="2147483663" r:id="rId15"/>
+    <p:sldLayoutId id="2147483664" r:id="rId16"/>
+    <p:sldLayoutId id="2147483665" r:id="rId17"/>
   </p:sldLayoutIdLst>
   <p:txStyles>
     <p:titleStyle>
@@ -7281,6 +6933,7 @@
               <a:rPr lang="en-US" dirty="0"/>
               <a:t>2019</a:t>
             </a:r>
+            <a:endParaRPr lang="en-US" dirty="0"/>
           </a:p>
         </p:txBody>
       </p:sp>
@@ -7311,13 +6964,7 @@
       </p:grpSpPr>
       <p:sp>
         <p:nvSpPr>
-          <p:cNvPr id="2" name="Title 1">
-            <a:extLst>
-              <a:ext uri="{FF2B5EF4-FFF2-40B4-BE49-F238E27FC236}">
-                <a16:creationId xmlns:a16="http://schemas.microsoft.com/office/drawing/2014/main" id="{EA2EC305-12FD-4CC5-A8DD-C8E72DBC8D4D}"/>
-              </a:ext>
-            </a:extLst>
-          </p:cNvPr>
+          <p:cNvPr id="2" name="Title 1"/>
           <p:cNvSpPr>
             <a:spLocks noGrp="1"/>
           </p:cNvSpPr>
@@ -7340,13 +6987,7 @@
       </p:sp>
       <p:sp>
         <p:nvSpPr>
-          <p:cNvPr id="3" name="Content Placeholder 2">
-            <a:extLst>
-              <a:ext uri="{FF2B5EF4-FFF2-40B4-BE49-F238E27FC236}">
-                <a16:creationId xmlns:a16="http://schemas.microsoft.com/office/drawing/2014/main" id="{6CE96EE2-6CCA-4992-AB4B-224790C6CB2C}"/>
-              </a:ext>
-            </a:extLst>
-          </p:cNvPr>
+          <p:cNvPr id="3" name="Content Placeholder 2"/>
           <p:cNvSpPr>
             <a:spLocks noGrp="1"/>
           </p:cNvSpPr>
@@ -7400,6 +7041,7 @@
               <a:rPr lang="zh-CN" altLang="en-US" dirty="0"/>
               <a:t>目标衡量员工已经取得的进步；认可员工的工作，保 证不放弃员工，鼓励他们不要放弃自己。</a:t>
             </a:r>
+            <a:endParaRPr lang="zh-CN" altLang="en-US" dirty="0"/>
           </a:p>
           <a:p>
             <a:endParaRPr lang="en-US" dirty="0"/>
@@ -7407,11 +7049,6 @@
         </p:txBody>
       </p:sp>
     </p:spTree>
-    <p:extLst>
-      <p:ext uri="{BB962C8B-B14F-4D97-AF65-F5344CB8AC3E}">
-        <p14:creationId xmlns:p14="http://schemas.microsoft.com/office/powerpoint/2010/main" val="1481050817"/>
-      </p:ext>
-    </p:extLst>
   </p:cSld>
   <p:clrMapOvr>
     <a:masterClrMapping/>
@@ -7438,13 +7075,7 @@
       </p:grpSpPr>
       <p:sp>
         <p:nvSpPr>
-          <p:cNvPr id="2" name="Title 1">
-            <a:extLst>
-              <a:ext uri="{FF2B5EF4-FFF2-40B4-BE49-F238E27FC236}">
-                <a16:creationId xmlns:a16="http://schemas.microsoft.com/office/drawing/2014/main" id="{48482CD1-B145-480E-8233-FDEC5AA7F71B}"/>
-              </a:ext>
-            </a:extLst>
-          </p:cNvPr>
+          <p:cNvPr id="2" name="Title 1"/>
           <p:cNvSpPr>
             <a:spLocks noGrp="1"/>
           </p:cNvSpPr>
@@ -7483,20 +7114,14 @@
       </p:sp>
       <p:pic>
         <p:nvPicPr>
-          <p:cNvPr id="4" name="Content Placeholder 3">
-            <a:extLst>
-              <a:ext uri="{FF2B5EF4-FFF2-40B4-BE49-F238E27FC236}">
-                <a16:creationId xmlns:a16="http://schemas.microsoft.com/office/drawing/2014/main" id="{B7C38B23-8B30-4EC3-B5CD-E6E502912802}"/>
-              </a:ext>
-            </a:extLst>
-          </p:cNvPr>
+          <p:cNvPr id="4" name="Content Placeholder 3"/>
           <p:cNvPicPr>
             <a:picLocks noChangeAspect="1"/>
           </p:cNvPicPr>
           <p:nvPr/>
         </p:nvPicPr>
         <p:blipFill>
-          <a:blip r:embed="rId2"/>
+          <a:blip r:embed="rId1"/>
           <a:stretch>
             <a:fillRect/>
           </a:stretch>
@@ -7513,13 +7138,7 @@
       </p:pic>
       <p:sp>
         <p:nvSpPr>
-          <p:cNvPr id="3" name="Content Placeholder 2">
-            <a:extLst>
-              <a:ext uri="{FF2B5EF4-FFF2-40B4-BE49-F238E27FC236}">
-                <a16:creationId xmlns:a16="http://schemas.microsoft.com/office/drawing/2014/main" id="{28AEC8AB-610C-41DA-81CB-478A26F98AF9}"/>
-              </a:ext>
-            </a:extLst>
-          </p:cNvPr>
+          <p:cNvPr id="3" name="Content Placeholder 2"/>
           <p:cNvSpPr>
             <a:spLocks noGrp="1"/>
           </p:cNvSpPr>
@@ -7801,6 +7420,27 @@
               </a:rPr>
               <a:t>我为何这么辛苦地干活？</a:t>
             </a:r>
+            <a:endParaRPr lang="zh-CN" altLang="en-US" sz="1600" dirty="0">
+              <a:gradFill>
+                <a:gsLst>
+                  <a:gs pos="34000">
+                    <a:schemeClr val="tx1">
+                      <a:lumMod val="93000"/>
+                    </a:schemeClr>
+                  </a:gs>
+                  <a:gs pos="0">
+                    <a:schemeClr val="bg1">
+                      <a:lumMod val="25000"/>
+                      <a:lumOff val="75000"/>
+                    </a:schemeClr>
+                  </a:gs>
+                  <a:gs pos="100000">
+                    <a:schemeClr val="tx1"/>
+                  </a:gs>
+                </a:gsLst>
+                <a:lin ang="4800000" scaled="0"/>
+              </a:gradFill>
+            </a:endParaRPr>
           </a:p>
           <a:p>
             <a:pPr marL="0" indent="0">
@@ -7831,11 +7471,6 @@
         </p:txBody>
       </p:sp>
     </p:spTree>
-    <p:extLst>
-      <p:ext uri="{BB962C8B-B14F-4D97-AF65-F5344CB8AC3E}">
-        <p14:creationId xmlns:p14="http://schemas.microsoft.com/office/powerpoint/2010/main" val="1040950805"/>
-      </p:ext>
-    </p:extLst>
   </p:cSld>
   <p:clrMapOvr>
     <a:masterClrMapping/>
@@ -7862,13 +7497,7 @@
       </p:grpSpPr>
       <p:sp>
         <p:nvSpPr>
-          <p:cNvPr id="2" name="Title 1">
-            <a:extLst>
-              <a:ext uri="{FF2B5EF4-FFF2-40B4-BE49-F238E27FC236}">
-                <a16:creationId xmlns:a16="http://schemas.microsoft.com/office/drawing/2014/main" id="{C198CAE0-A7FF-4829-A691-D4140A69F820}"/>
-              </a:ext>
-            </a:extLst>
-          </p:cNvPr>
+          <p:cNvPr id="2" name="Title 1"/>
           <p:cNvSpPr>
             <a:spLocks noGrp="1"/>
           </p:cNvSpPr>
@@ -7891,13 +7520,7 @@
       </p:sp>
       <p:sp>
         <p:nvSpPr>
-          <p:cNvPr id="3" name="Content Placeholder 2">
-            <a:extLst>
-              <a:ext uri="{FF2B5EF4-FFF2-40B4-BE49-F238E27FC236}">
-                <a16:creationId xmlns:a16="http://schemas.microsoft.com/office/drawing/2014/main" id="{D19E2CD4-F623-4C4A-8E2F-C74BD08C52F8}"/>
-              </a:ext>
-            </a:extLst>
-          </p:cNvPr>
+          <p:cNvPr id="3" name="Content Placeholder 2"/>
           <p:cNvSpPr>
             <a:spLocks noGrp="1"/>
           </p:cNvSpPr>
@@ -7914,6 +7537,7 @@
               <a:rPr lang="zh-CN" altLang="en-US" dirty="0"/>
               <a:t>能力方面的帮助：让他们在拿手的领域发挥更多作用，让他们在拿手的领域做得更完 善，并增加交流的机会 （代码复审，设计复审） </a:t>
             </a:r>
+            <a:endParaRPr lang="zh-CN" altLang="en-US" dirty="0"/>
           </a:p>
           <a:p>
             <a:r>
@@ -7942,6 +7566,7 @@
               <a:rPr lang="zh-CN" altLang="en-US" dirty="0"/>
               <a:t>目标，和领导商定检查的节奏。</a:t>
             </a:r>
+            <a:endParaRPr lang="zh-CN" altLang="en-US" dirty="0"/>
           </a:p>
           <a:p>
             <a:endParaRPr lang="en-US" dirty="0"/>
@@ -7949,11 +7574,6 @@
         </p:txBody>
       </p:sp>
     </p:spTree>
-    <p:extLst>
-      <p:ext uri="{BB962C8B-B14F-4D97-AF65-F5344CB8AC3E}">
-        <p14:creationId xmlns:p14="http://schemas.microsoft.com/office/powerpoint/2010/main" val="2480698082"/>
-      </p:ext>
-    </p:extLst>
   </p:cSld>
   <p:clrMapOvr>
     <a:masterClrMapping/>
@@ -7980,13 +7600,7 @@
       </p:grpSpPr>
       <p:sp>
         <p:nvSpPr>
-          <p:cNvPr id="2" name="Title 1">
-            <a:extLst>
-              <a:ext uri="{FF2B5EF4-FFF2-40B4-BE49-F238E27FC236}">
-                <a16:creationId xmlns:a16="http://schemas.microsoft.com/office/drawing/2014/main" id="{48482CD1-B145-480E-8233-FDEC5AA7F71B}"/>
-              </a:ext>
-            </a:extLst>
-          </p:cNvPr>
+          <p:cNvPr id="2" name="Title 1"/>
           <p:cNvSpPr>
             <a:spLocks noGrp="1"/>
           </p:cNvSpPr>
@@ -8025,20 +7639,14 @@
       </p:sp>
       <p:pic>
         <p:nvPicPr>
-          <p:cNvPr id="4" name="Content Placeholder 3">
-            <a:extLst>
-              <a:ext uri="{FF2B5EF4-FFF2-40B4-BE49-F238E27FC236}">
-                <a16:creationId xmlns:a16="http://schemas.microsoft.com/office/drawing/2014/main" id="{B7C38B23-8B30-4EC3-B5CD-E6E502912802}"/>
-              </a:ext>
-            </a:extLst>
-          </p:cNvPr>
+          <p:cNvPr id="4" name="Content Placeholder 3"/>
           <p:cNvPicPr>
             <a:picLocks noChangeAspect="1"/>
           </p:cNvPicPr>
           <p:nvPr/>
         </p:nvPicPr>
         <p:blipFill>
-          <a:blip r:embed="rId2"/>
+          <a:blip r:embed="rId1"/>
           <a:stretch>
             <a:fillRect/>
           </a:stretch>
@@ -8055,13 +7663,7 @@
       </p:pic>
       <p:sp>
         <p:nvSpPr>
-          <p:cNvPr id="3" name="Content Placeholder 2">
-            <a:extLst>
-              <a:ext uri="{FF2B5EF4-FFF2-40B4-BE49-F238E27FC236}">
-                <a16:creationId xmlns:a16="http://schemas.microsoft.com/office/drawing/2014/main" id="{28AEC8AB-610C-41DA-81CB-478A26F98AF9}"/>
-              </a:ext>
-            </a:extLst>
-          </p:cNvPr>
+          <p:cNvPr id="3" name="Content Placeholder 2"/>
           <p:cNvSpPr>
             <a:spLocks noGrp="1"/>
           </p:cNvSpPr>
@@ -8206,15 +7808,31 @@
               </a:rPr>
               <a:t>） </a:t>
             </a:r>
+            <a:endParaRPr lang="zh-CN" altLang="en-US" sz="1600" dirty="0">
+              <a:gradFill>
+                <a:gsLst>
+                  <a:gs pos="34000">
+                    <a:schemeClr val="tx1">
+                      <a:lumMod val="93000"/>
+                    </a:schemeClr>
+                  </a:gs>
+                  <a:gs pos="0">
+                    <a:schemeClr val="bg1">
+                      <a:lumMod val="25000"/>
+                      <a:lumOff val="75000"/>
+                    </a:schemeClr>
+                  </a:gs>
+                  <a:gs pos="100000">
+                    <a:schemeClr val="tx1"/>
+                  </a:gs>
+                </a:gsLst>
+                <a:lin ang="4800000" scaled="0"/>
+              </a:gradFill>
+            </a:endParaRPr>
           </a:p>
         </p:txBody>
       </p:sp>
     </p:spTree>
-    <p:extLst>
-      <p:ext uri="{BB962C8B-B14F-4D97-AF65-F5344CB8AC3E}">
-        <p14:creationId xmlns:p14="http://schemas.microsoft.com/office/powerpoint/2010/main" val="852902275"/>
-      </p:ext>
-    </p:extLst>
   </p:cSld>
   <p:clrMapOvr>
     <a:masterClrMapping/>
@@ -8241,13 +7859,7 @@
       </p:grpSpPr>
       <p:sp>
         <p:nvSpPr>
-          <p:cNvPr id="2" name="Title 1">
-            <a:extLst>
-              <a:ext uri="{FF2B5EF4-FFF2-40B4-BE49-F238E27FC236}">
-                <a16:creationId xmlns:a16="http://schemas.microsoft.com/office/drawing/2014/main" id="{41E9493B-B6D3-4CE8-94A5-8D41AD563FE6}"/>
-              </a:ext>
-            </a:extLst>
-          </p:cNvPr>
+          <p:cNvPr id="2" name="Title 1"/>
           <p:cNvSpPr>
             <a:spLocks noGrp="1"/>
           </p:cNvSpPr>
@@ -8270,13 +7882,7 @@
       </p:sp>
       <p:sp>
         <p:nvSpPr>
-          <p:cNvPr id="3" name="Content Placeholder 2">
-            <a:extLst>
-              <a:ext uri="{FF2B5EF4-FFF2-40B4-BE49-F238E27FC236}">
-                <a16:creationId xmlns:a16="http://schemas.microsoft.com/office/drawing/2014/main" id="{E4D7A289-A1C3-47C2-9863-6A26ADEAF14F}"/>
-              </a:ext>
-            </a:extLst>
-          </p:cNvPr>
+          <p:cNvPr id="3" name="Content Placeholder 2"/>
           <p:cNvSpPr>
             <a:spLocks noGrp="1"/>
           </p:cNvSpPr>
@@ -8314,6 +7920,7 @@
               <a:rPr lang="zh-CN" altLang="en-US" dirty="0"/>
               <a:t>检查和反馈：阶段性的检查，看重结果。</a:t>
             </a:r>
+            <a:endParaRPr lang="zh-CN" altLang="en-US" dirty="0"/>
           </a:p>
           <a:p>
             <a:endParaRPr lang="en-US" dirty="0"/>
@@ -8321,11 +7928,6 @@
         </p:txBody>
       </p:sp>
     </p:spTree>
-    <p:extLst>
-      <p:ext uri="{BB962C8B-B14F-4D97-AF65-F5344CB8AC3E}">
-        <p14:creationId xmlns:p14="http://schemas.microsoft.com/office/powerpoint/2010/main" val="1281493869"/>
-      </p:ext>
-    </p:extLst>
   </p:cSld>
   <p:clrMapOvr>
     <a:masterClrMapping/>
@@ -8352,13 +7954,7 @@
       </p:grpSpPr>
       <p:sp>
         <p:nvSpPr>
-          <p:cNvPr id="2" name="Title 1">
-            <a:extLst>
-              <a:ext uri="{FF2B5EF4-FFF2-40B4-BE49-F238E27FC236}">
-                <a16:creationId xmlns:a16="http://schemas.microsoft.com/office/drawing/2014/main" id="{921C21EB-F2E8-4DC1-8006-214546ADC988}"/>
-              </a:ext>
-            </a:extLst>
-          </p:cNvPr>
+          <p:cNvPr id="2" name="Title 1"/>
           <p:cNvSpPr>
             <a:spLocks noGrp="1"/>
           </p:cNvSpPr>
@@ -8393,13 +7989,7 @@
       </p:sp>
       <p:sp>
         <p:nvSpPr>
-          <p:cNvPr id="3" name="Content Placeholder 2">
-            <a:extLst>
-              <a:ext uri="{FF2B5EF4-FFF2-40B4-BE49-F238E27FC236}">
-                <a16:creationId xmlns:a16="http://schemas.microsoft.com/office/drawing/2014/main" id="{B19DA566-870A-49A2-889C-0EBB18DDB6FD}"/>
-              </a:ext>
-            </a:extLst>
-          </p:cNvPr>
+          <p:cNvPr id="3" name="Content Placeholder 2"/>
           <p:cNvSpPr>
             <a:spLocks noGrp="1"/>
           </p:cNvSpPr>
@@ -8417,11 +8007,6 @@
         </p:txBody>
       </p:sp>
     </p:spTree>
-    <p:extLst>
-      <p:ext uri="{BB962C8B-B14F-4D97-AF65-F5344CB8AC3E}">
-        <p14:creationId xmlns:p14="http://schemas.microsoft.com/office/powerpoint/2010/main" val="3345101463"/>
-      </p:ext>
-    </p:extLst>
   </p:cSld>
   <p:clrMapOvr>
     <a:masterClrMapping/>
@@ -8487,7 +8072,7 @@
           </p:nvPr>
         </p:nvPicPr>
         <p:blipFill>
-          <a:blip r:embed="rId3" cstate="print"/>
+          <a:blip r:embed="rId1" cstate="print"/>
           <a:stretch>
             <a:fillRect/>
           </a:stretch>
@@ -8566,7 +8151,7 @@
           </p:nvPr>
         </p:nvPicPr>
         <p:blipFill>
-          <a:blip r:embed="rId2" cstate="print"/>
+          <a:blip r:embed="rId1" cstate="print"/>
           <a:stretch>
             <a:fillRect/>
           </a:stretch>
@@ -8606,13 +8191,7 @@
       </p:grpSpPr>
       <p:sp>
         <p:nvSpPr>
-          <p:cNvPr id="2" name="Title 1">
-            <a:extLst>
-              <a:ext uri="{FF2B5EF4-FFF2-40B4-BE49-F238E27FC236}">
-                <a16:creationId xmlns:a16="http://schemas.microsoft.com/office/drawing/2014/main" id="{264F5005-87C6-4B71-ABB0-FE7DC321D0D5}"/>
-              </a:ext>
-            </a:extLst>
-          </p:cNvPr>
+          <p:cNvPr id="2" name="Title 1"/>
           <p:cNvSpPr>
             <a:spLocks noGrp="1"/>
           </p:cNvSpPr>
@@ -8643,13 +8222,7 @@
       </p:sp>
       <p:sp>
         <p:nvSpPr>
-          <p:cNvPr id="3" name="Content Placeholder 2">
-            <a:extLst>
-              <a:ext uri="{FF2B5EF4-FFF2-40B4-BE49-F238E27FC236}">
-                <a16:creationId xmlns:a16="http://schemas.microsoft.com/office/drawing/2014/main" id="{2B661C93-8FF4-4222-85CF-31FF4EA22A58}"/>
-              </a:ext>
-            </a:extLst>
-          </p:cNvPr>
+          <p:cNvPr id="3" name="Content Placeholder 2"/>
           <p:cNvSpPr>
             <a:spLocks noGrp="1"/>
           </p:cNvSpPr>
@@ -8701,6 +8274,7 @@
               <a:rPr lang="zh-CN" altLang="en-US" dirty="0"/>
               <a:t>当然还有人处理冲突并非从性格出发，而是从官职出发，对于领导的看法则一味赞 同，对别人则是另一副嘴脸。</a:t>
             </a:r>
+            <a:endParaRPr lang="zh-CN" altLang="en-US" dirty="0"/>
           </a:p>
           <a:p>
             <a:endParaRPr lang="en-US" dirty="0"/>
@@ -8708,11 +8282,6 @@
         </p:txBody>
       </p:sp>
     </p:spTree>
-    <p:extLst>
-      <p:ext uri="{BB962C8B-B14F-4D97-AF65-F5344CB8AC3E}">
-        <p14:creationId xmlns:p14="http://schemas.microsoft.com/office/powerpoint/2010/main" val="3393697691"/>
-      </p:ext>
-    </p:extLst>
   </p:cSld>
   <p:clrMapOvr>
     <a:masterClrMapping/>
@@ -8739,13 +8308,7 @@
       </p:grpSpPr>
       <p:sp>
         <p:nvSpPr>
-          <p:cNvPr id="2" name="Title 1">
-            <a:extLst>
-              <a:ext uri="{FF2B5EF4-FFF2-40B4-BE49-F238E27FC236}">
-                <a16:creationId xmlns:a16="http://schemas.microsoft.com/office/drawing/2014/main" id="{DE14B55A-F6D4-4CF2-AFCB-A6B8A1308921}"/>
-              </a:ext>
-            </a:extLst>
-          </p:cNvPr>
+          <p:cNvPr id="2" name="Title 1"/>
           <p:cNvSpPr>
             <a:spLocks noGrp="1"/>
           </p:cNvSpPr>
@@ -8772,13 +8335,7 @@
       </p:sp>
       <p:sp>
         <p:nvSpPr>
-          <p:cNvPr id="3" name="Content Placeholder 2">
-            <a:extLst>
-              <a:ext uri="{FF2B5EF4-FFF2-40B4-BE49-F238E27FC236}">
-                <a16:creationId xmlns:a16="http://schemas.microsoft.com/office/drawing/2014/main" id="{71BE3DB4-58BA-4119-87DD-98B54092FCCA}"/>
-              </a:ext>
-            </a:extLst>
-          </p:cNvPr>
+          <p:cNvPr id="3" name="Content Placeholder 2"/>
           <p:cNvSpPr>
             <a:spLocks noGrp="1"/>
           </p:cNvSpPr>
@@ -8815,11 +8372,6 @@
         </p:txBody>
       </p:sp>
     </p:spTree>
-    <p:extLst>
-      <p:ext uri="{BB962C8B-B14F-4D97-AF65-F5344CB8AC3E}">
-        <p14:creationId xmlns:p14="http://schemas.microsoft.com/office/powerpoint/2010/main" val="4076201193"/>
-      </p:ext>
-    </p:extLst>
   </p:cSld>
   <p:clrMapOvr>
     <a:masterClrMapping/>
@@ -8953,6 +8505,7 @@
               <a:rPr lang="zh-CN" altLang="en-US" dirty="0"/>
               <a:t>软件工程师的职业道德</a:t>
             </a:r>
+            <a:endParaRPr lang="zh-CN" altLang="en-US" dirty="0"/>
           </a:p>
         </p:txBody>
       </p:sp>
@@ -9511,13 +9064,7 @@
       </p:grpSpPr>
       <p:sp>
         <p:nvSpPr>
-          <p:cNvPr id="2" name="Title 1">
-            <a:extLst>
-              <a:ext uri="{FF2B5EF4-FFF2-40B4-BE49-F238E27FC236}">
-                <a16:creationId xmlns:a16="http://schemas.microsoft.com/office/drawing/2014/main" id="{FFAC53C9-FED8-4B49-A6A8-D72F800CE687}"/>
-              </a:ext>
-            </a:extLst>
-          </p:cNvPr>
+          <p:cNvPr id="2" name="Title 1"/>
           <p:cNvSpPr>
             <a:spLocks noGrp="1"/>
           </p:cNvSpPr>
@@ -9540,13 +9087,7 @@
       </p:sp>
       <p:sp>
         <p:nvSpPr>
-          <p:cNvPr id="3" name="Content Placeholder 2">
-            <a:extLst>
-              <a:ext uri="{FF2B5EF4-FFF2-40B4-BE49-F238E27FC236}">
-                <a16:creationId xmlns:a16="http://schemas.microsoft.com/office/drawing/2014/main" id="{FF155A52-89C5-4364-A8BB-DC05EA511495}"/>
-              </a:ext>
-            </a:extLst>
-          </p:cNvPr>
+          <p:cNvPr id="3" name="Content Placeholder 2"/>
           <p:cNvSpPr>
             <a:spLocks noGrp="1"/>
           </p:cNvSpPr>
@@ -9589,11 +9130,6 @@
         </p:txBody>
       </p:sp>
     </p:spTree>
-    <p:extLst>
-      <p:ext uri="{BB962C8B-B14F-4D97-AF65-F5344CB8AC3E}">
-        <p14:creationId xmlns:p14="http://schemas.microsoft.com/office/powerpoint/2010/main" val="245638306"/>
-      </p:ext>
-    </p:extLst>
   </p:cSld>
   <p:clrMapOvr>
     <a:masterClrMapping/>
@@ -9620,13 +9156,7 @@
       </p:grpSpPr>
       <p:sp>
         <p:nvSpPr>
-          <p:cNvPr id="2" name="Title 1">
-            <a:extLst>
-              <a:ext uri="{FF2B5EF4-FFF2-40B4-BE49-F238E27FC236}">
-                <a16:creationId xmlns:a16="http://schemas.microsoft.com/office/drawing/2014/main" id="{0CBE7242-3FFC-4CA3-AAFE-61D1ADF059FA}"/>
-              </a:ext>
-            </a:extLst>
-          </p:cNvPr>
+          <p:cNvPr id="2" name="Title 1"/>
           <p:cNvSpPr>
             <a:spLocks noGrp="1"/>
           </p:cNvSpPr>
@@ -9649,13 +9179,7 @@
       </p:sp>
       <p:sp>
         <p:nvSpPr>
-          <p:cNvPr id="3" name="Content Placeholder 2">
-            <a:extLst>
-              <a:ext uri="{FF2B5EF4-FFF2-40B4-BE49-F238E27FC236}">
-                <a16:creationId xmlns:a16="http://schemas.microsoft.com/office/drawing/2014/main" id="{42A09E88-66DB-46CF-9BDE-2ABCCB874406}"/>
-              </a:ext>
-            </a:extLst>
-          </p:cNvPr>
+          <p:cNvPr id="3" name="Content Placeholder 2"/>
           <p:cNvSpPr>
             <a:spLocks noGrp="1"/>
           </p:cNvSpPr>
@@ -9767,15 +9291,11 @@
               <a:rPr lang="zh-CN" altLang="en-US" dirty="0"/>
               <a:t>） ：几个主要角色的代表轮流做决定，行使独裁权。这个模 式执行起来也许会让团队的方向游移不定。</a:t>
             </a:r>
+            <a:endParaRPr lang="zh-CN" altLang="en-US" dirty="0"/>
           </a:p>
         </p:txBody>
       </p:sp>
     </p:spTree>
-    <p:extLst>
-      <p:ext uri="{BB962C8B-B14F-4D97-AF65-F5344CB8AC3E}">
-        <p14:creationId xmlns:p14="http://schemas.microsoft.com/office/powerpoint/2010/main" val="2464728381"/>
-      </p:ext>
-    </p:extLst>
   </p:cSld>
   <p:clrMapOvr>
     <a:masterClrMapping/>
@@ -9802,13 +9322,7 @@
       </p:grpSpPr>
       <p:sp>
         <p:nvSpPr>
-          <p:cNvPr id="2" name="Title 1">
-            <a:extLst>
-              <a:ext uri="{FF2B5EF4-FFF2-40B4-BE49-F238E27FC236}">
-                <a16:creationId xmlns:a16="http://schemas.microsoft.com/office/drawing/2014/main" id="{D7AB7BC0-14FE-4086-860C-C42C91D77FAC}"/>
-              </a:ext>
-            </a:extLst>
-          </p:cNvPr>
+          <p:cNvPr id="2" name="Title 1"/>
           <p:cNvSpPr>
             <a:spLocks noGrp="1"/>
           </p:cNvSpPr>
@@ -9831,13 +9345,7 @@
       </p:sp>
       <p:sp>
         <p:nvSpPr>
-          <p:cNvPr id="3" name="Content Placeholder 2">
-            <a:extLst>
-              <a:ext uri="{FF2B5EF4-FFF2-40B4-BE49-F238E27FC236}">
-                <a16:creationId xmlns:a16="http://schemas.microsoft.com/office/drawing/2014/main" id="{D11F5A51-D958-42C5-AA35-D9619A8904BD}"/>
-              </a:ext>
-            </a:extLst>
-          </p:cNvPr>
+          <p:cNvPr id="3" name="Content Placeholder 2"/>
           <p:cNvSpPr>
             <a:spLocks noGrp="1"/>
           </p:cNvSpPr>
@@ -9874,11 +9382,6 @@
         </p:txBody>
       </p:sp>
     </p:spTree>
-    <p:extLst>
-      <p:ext uri="{BB962C8B-B14F-4D97-AF65-F5344CB8AC3E}">
-        <p14:creationId xmlns:p14="http://schemas.microsoft.com/office/powerpoint/2010/main" val="351275956"/>
-      </p:ext>
-    </p:extLst>
   </p:cSld>
   <p:clrMapOvr>
     <a:masterClrMapping/>
@@ -9960,7 +9463,7 @@
           </p:nvPr>
         </p:nvPicPr>
         <p:blipFill>
-          <a:blip r:embed="rId2" cstate="print"/>
+          <a:blip r:embed="rId1" cstate="print"/>
           <a:srcRect/>
           <a:stretch>
             <a:fillRect/>
@@ -10040,7 +9543,7 @@
           </p:nvPr>
         </p:nvPicPr>
         <p:blipFill>
-          <a:blip r:embed="rId3" cstate="print"/>
+          <a:blip r:embed="rId1" cstate="print"/>
           <a:stretch>
             <a:fillRect/>
           </a:stretch>
@@ -10080,13 +9583,7 @@
       </p:grpSpPr>
       <p:sp>
         <p:nvSpPr>
-          <p:cNvPr id="2" name="Title 1">
-            <a:extLst>
-              <a:ext uri="{FF2B5EF4-FFF2-40B4-BE49-F238E27FC236}">
-                <a16:creationId xmlns:a16="http://schemas.microsoft.com/office/drawing/2014/main" id="{2B2591B3-3F0D-4298-AA88-4D9C6DDAEB4D}"/>
-              </a:ext>
-            </a:extLst>
-          </p:cNvPr>
+          <p:cNvPr id="2" name="Title 1"/>
           <p:cNvSpPr>
             <a:spLocks noGrp="1"/>
           </p:cNvSpPr>
@@ -10116,13 +9613,7 @@
       </p:sp>
       <p:sp>
         <p:nvSpPr>
-          <p:cNvPr id="3" name="Content Placeholder 2">
-            <a:extLst>
-              <a:ext uri="{FF2B5EF4-FFF2-40B4-BE49-F238E27FC236}">
-                <a16:creationId xmlns:a16="http://schemas.microsoft.com/office/drawing/2014/main" id="{95B99F2C-9909-4716-95AB-B3BA8938D0C0}"/>
-              </a:ext>
-            </a:extLst>
-          </p:cNvPr>
+          <p:cNvPr id="3" name="Content Placeholder 2"/>
           <p:cNvSpPr>
             <a:spLocks noGrp="1"/>
           </p:cNvSpPr>
@@ -10146,6 +9637,7 @@
               <a:rPr lang="en-US" sz="2600" dirty="0"/>
               <a:t>There comes a time in every company's life where it must fight for its life. if you find yourself running when you should be fighting, you need to ask yourself, “if our company isn’t good enough to win, then do we need to exist at all”？</a:t>
             </a:r>
+            <a:endParaRPr lang="en-US" sz="2600" dirty="0"/>
           </a:p>
           <a:p>
             <a:r>
@@ -10159,6 +9651,7 @@
               <a:rPr lang="zh-CN" altLang="en-US" sz="2600" dirty="0"/>
               <a:t>如果你的团队最后赢不了，失去了生 存的意义，你怎么办？要知道，“腐烂，解体“ 也是很多团队的归宿。</a:t>
             </a:r>
+            <a:endParaRPr lang="zh-CN" altLang="en-US" sz="2600" dirty="0"/>
           </a:p>
           <a:p>
             <a:endParaRPr lang="en-US" sz="2600" dirty="0"/>
@@ -10167,20 +9660,14 @@
       </p:sp>
       <p:pic>
         <p:nvPicPr>
-          <p:cNvPr id="3074" name="Picture 2" descr="18176747">
-            <a:extLst>
-              <a:ext uri="{FF2B5EF4-FFF2-40B4-BE49-F238E27FC236}">
-                <a16:creationId xmlns:a16="http://schemas.microsoft.com/office/drawing/2014/main" id="{DA459C69-6610-41A7-B722-A9FFA40B1519}"/>
-              </a:ext>
-            </a:extLst>
-          </p:cNvPr>
+          <p:cNvPr id="3074" name="Picture 2" descr="18176747"/>
           <p:cNvPicPr>
             <a:picLocks noChangeAspect="1" noChangeArrowheads="1"/>
           </p:cNvPicPr>
           <p:nvPr/>
         </p:nvPicPr>
         <p:blipFill rotWithShape="1">
-          <a:blip r:embed="rId3">
+          <a:blip r:embed="rId1">
             <a:extLst>
               <a:ext uri="{28A0092B-C50C-407E-A947-70E740481C1C}">
                 <a14:useLocalDpi xmlns:a14="http://schemas.microsoft.com/office/drawing/2010/main" val="0"/>
@@ -10188,7 +9675,9 @@
             </a:extLst>
           </a:blip>
           <a:srcRect l="2996" r="1407"/>
-          <a:stretch/>
+          <a:stretch>
+            <a:fillRect/>
+          </a:stretch>
         </p:blipFill>
         <p:spPr bwMode="auto">
           <a:xfrm>
@@ -10211,11 +9700,6 @@
         </p:spPr>
       </p:pic>
     </p:spTree>
-    <p:extLst>
-      <p:ext uri="{BB962C8B-B14F-4D97-AF65-F5344CB8AC3E}">
-        <p14:creationId xmlns:p14="http://schemas.microsoft.com/office/powerpoint/2010/main" val="3448455092"/>
-      </p:ext>
-    </p:extLst>
   </p:cSld>
   <p:clrMapOvr>
     <a:masterClrMapping/>
@@ -10242,13 +9726,7 @@
       </p:grpSpPr>
       <p:sp>
         <p:nvSpPr>
-          <p:cNvPr id="2" name="Title 1">
-            <a:extLst>
-              <a:ext uri="{FF2B5EF4-FFF2-40B4-BE49-F238E27FC236}">
-                <a16:creationId xmlns:a16="http://schemas.microsoft.com/office/drawing/2014/main" id="{EBC670D6-509A-4EDF-A852-1D96C818CBE2}"/>
-              </a:ext>
-            </a:extLst>
-          </p:cNvPr>
+          <p:cNvPr id="2" name="Title 1"/>
           <p:cNvSpPr>
             <a:spLocks noGrp="1"/>
           </p:cNvSpPr>
@@ -10275,13 +9753,7 @@
       </p:sp>
       <p:sp>
         <p:nvSpPr>
-          <p:cNvPr id="3" name="Content Placeholder 2">
-            <a:extLst>
-              <a:ext uri="{FF2B5EF4-FFF2-40B4-BE49-F238E27FC236}">
-                <a16:creationId xmlns:a16="http://schemas.microsoft.com/office/drawing/2014/main" id="{1AC0BD55-77EE-4418-B6CB-FE3E6E106140}"/>
-              </a:ext>
-            </a:extLst>
-          </p:cNvPr>
+          <p:cNvPr id="3" name="Content Placeholder 2"/>
           <p:cNvSpPr>
             <a:spLocks noGrp="1"/>
           </p:cNvSpPr>
@@ -10299,11 +9771,6 @@
         </p:txBody>
       </p:sp>
     </p:spTree>
-    <p:extLst>
-      <p:ext uri="{BB962C8B-B14F-4D97-AF65-F5344CB8AC3E}">
-        <p14:creationId xmlns:p14="http://schemas.microsoft.com/office/powerpoint/2010/main" val="1716841113"/>
-      </p:ext>
-    </p:extLst>
   </p:cSld>
   <p:clrMapOvr>
     <a:masterClrMapping/>
@@ -10353,108 +9820,125 @@
           </a:p>
         </p:txBody>
       </p:sp>
+      <p:sp>
+        <p:nvSpPr>
+          <p:cNvPr id="5" name="文本框 4"/>
+          <p:cNvSpPr txBox="1"/>
+          <p:nvPr/>
+        </p:nvSpPr>
+        <p:spPr>
+          <a:xfrm>
+            <a:off x="990600" y="5257800"/>
+            <a:ext cx="5640705" cy="1476375"/>
+          </a:xfrm>
+          <a:prstGeom prst="rect">
+            <a:avLst/>
+          </a:prstGeom>
+          <a:noFill/>
+        </p:spPr>
+        <p:txBody>
+          <a:bodyPr wrap="square" rtlCol="0">
+            <a:spAutoFit/>
+          </a:bodyPr>
+          <a:lstStyle/>
+          <a:p>
+            <a:pPr marL="285750" indent="-285750">
+              <a:buFont typeface="Arial" panose="020B0604020202020204" pitchFamily="34" charset="0"/>
+              <a:buChar char="•"/>
+            </a:pPr>
+            <a:r>
+              <a:rPr lang="zh-CN" altLang="en-US" dirty="0"/>
+              <a:t>猪：提供猪肉，做熏肉</a:t>
+            </a:r>
+            <a:endParaRPr lang="en-US" altLang="zh-CN" dirty="0"/>
+          </a:p>
+          <a:p>
+            <a:pPr marL="285750" indent="-285750">
+              <a:buFont typeface="Arial" panose="020B0604020202020204" pitchFamily="34" charset="0"/>
+              <a:buChar char="•"/>
+            </a:pPr>
+            <a:r>
+              <a:rPr lang="zh-CN" altLang="en-US" dirty="0"/>
+              <a:t>鸡：提供鸡蛋，做煎蛋</a:t>
+            </a:r>
+            <a:endParaRPr lang="en-US" altLang="zh-CN" dirty="0"/>
+          </a:p>
+          <a:p>
+            <a:pPr marL="285750" indent="-285750">
+              <a:buFont typeface="Arial" panose="020B0604020202020204" pitchFamily="34" charset="0"/>
+              <a:buChar char="•"/>
+            </a:pPr>
+            <a:r>
+              <a:rPr lang="zh-CN" altLang="en-US" dirty="0"/>
+              <a:t>鹦鹉：提供咨询和听来的创业故事，最新趋势等</a:t>
+            </a:r>
+            <a:endParaRPr lang="en-US" altLang="zh-CN" dirty="0"/>
+          </a:p>
+          <a:p>
+            <a:pPr indent="0">
+              <a:buFont typeface="Arial" panose="020B0604020202020204" pitchFamily="34" charset="0"/>
+              <a:buNone/>
+            </a:pPr>
+            <a:endParaRPr lang="en-US" dirty="0"/>
+          </a:p>
+          <a:p>
+            <a:r>
+              <a:rPr lang="zh-CN" altLang="en-US" dirty="0"/>
+              <a:t>他们的投入和负担是一样的么？</a:t>
+            </a:r>
+            <a:endParaRPr lang="en-US" dirty="0"/>
+          </a:p>
+        </p:txBody>
+      </p:sp>
       <p:pic>
         <p:nvPicPr>
-          <p:cNvPr id="4" name="内容占位符 3"/>
+          <p:cNvPr id="7" name="图片 6"/>
           <p:cNvPicPr>
-            <a:picLocks noGrp="1" noChangeAspect="1"/>
+            <a:picLocks noChangeAspect="1"/>
           </p:cNvPicPr>
-          <p:nvPr>
-            <p:ph idx="1"/>
-          </p:nvPr>
+          <p:nvPr/>
         </p:nvPicPr>
         <p:blipFill>
-          <a:blip r:embed="rId3"/>
+          <a:blip r:embed="rId1"/>
           <a:stretch>
             <a:fillRect/>
           </a:stretch>
         </p:blipFill>
         <p:spPr>
           <a:xfrm>
-            <a:off x="1905000" y="1600201"/>
-            <a:ext cx="8229600" cy="2792185"/>
+            <a:off x="990600" y="1600200"/>
+            <a:ext cx="6989445" cy="680720"/>
           </a:xfrm>
           <a:prstGeom prst="rect">
             <a:avLst/>
           </a:prstGeom>
         </p:spPr>
       </p:pic>
-      <p:sp>
-        <p:nvSpPr>
-          <p:cNvPr id="5" name="文本框 4"/>
-          <p:cNvSpPr txBox="1"/>
+      <p:pic>
+        <p:nvPicPr>
+          <p:cNvPr id="8" name="图片 7"/>
+          <p:cNvPicPr>
+            <a:picLocks noChangeAspect="1"/>
+          </p:cNvPicPr>
           <p:nvPr/>
-        </p:nvSpPr>
+        </p:nvPicPr>
+        <p:blipFill>
+          <a:blip r:embed="rId2"/>
+          <a:stretch>
+            <a:fillRect/>
+          </a:stretch>
+        </p:blipFill>
         <p:spPr>
           <a:xfrm>
-            <a:off x="2057400" y="4800600"/>
-            <a:ext cx="8153400" cy="1477328"/>
+            <a:off x="990600" y="2286000"/>
+            <a:ext cx="6989445" cy="2791460"/>
           </a:xfrm>
           <a:prstGeom prst="rect">
             <a:avLst/>
           </a:prstGeom>
-          <a:noFill/>
         </p:spPr>
-        <p:txBody>
-          <a:bodyPr wrap="square" rtlCol="0">
-            <a:spAutoFit/>
-          </a:bodyPr>
-          <a:lstStyle/>
-          <a:p>
-            <a:pPr marL="285750" indent="-285750">
-              <a:buFont typeface="Arial" panose="020B0604020202020204" pitchFamily="34" charset="0"/>
-              <a:buChar char="•"/>
-            </a:pPr>
-            <a:r>
-              <a:rPr lang="zh-CN" altLang="en-US" dirty="0"/>
-              <a:t>猪：提供猪肉，做熏肉</a:t>
-            </a:r>
-            <a:endParaRPr lang="en-US" altLang="zh-CN" dirty="0"/>
-          </a:p>
-          <a:p>
-            <a:pPr marL="285750" indent="-285750">
-              <a:buFont typeface="Arial" panose="020B0604020202020204" pitchFamily="34" charset="0"/>
-              <a:buChar char="•"/>
-            </a:pPr>
-            <a:r>
-              <a:rPr lang="zh-CN" altLang="en-US" dirty="0"/>
-              <a:t>鸡：提供鸡蛋，做煎蛋</a:t>
-            </a:r>
-            <a:endParaRPr lang="en-US" altLang="zh-CN" dirty="0"/>
-          </a:p>
-          <a:p>
-            <a:pPr marL="285750" indent="-285750">
-              <a:buFont typeface="Arial" panose="020B0604020202020204" pitchFamily="34" charset="0"/>
-              <a:buChar char="•"/>
-            </a:pPr>
-            <a:r>
-              <a:rPr lang="zh-CN" altLang="en-US" dirty="0"/>
-              <a:t>鹦鹉：提供咨询和听来的创业故事，最新趋势等</a:t>
-            </a:r>
-            <a:endParaRPr lang="en-US" altLang="zh-CN" dirty="0"/>
-          </a:p>
-          <a:p>
-            <a:pPr marL="285750" indent="-285750">
-              <a:buFont typeface="Arial" panose="020B0604020202020204" pitchFamily="34" charset="0"/>
-              <a:buChar char="•"/>
-            </a:pPr>
-            <a:endParaRPr lang="en-US" dirty="0"/>
-          </a:p>
-          <a:p>
-            <a:r>
-              <a:rPr lang="zh-CN" altLang="en-US" dirty="0"/>
-              <a:t>他们的投入和负担是一样的么？</a:t>
-            </a:r>
-            <a:endParaRPr lang="en-US" dirty="0"/>
-          </a:p>
-        </p:txBody>
-      </p:sp>
+      </p:pic>
     </p:spTree>
-    <p:extLst>
-      <p:ext uri="{BB962C8B-B14F-4D97-AF65-F5344CB8AC3E}">
-        <p14:creationId xmlns:p14="http://schemas.microsoft.com/office/powerpoint/2010/main" val="1172930146"/>
-      </p:ext>
-    </p:extLst>
   </p:cSld>
   <p:clrMapOvr>
     <a:masterClrMapping/>
@@ -10708,15 +10192,11 @@
               <a:rPr lang="zh-CN" altLang="en-US" dirty="0"/>
               <a:t>。</a:t>
             </a:r>
+            <a:endParaRPr lang="zh-CN" altLang="en-US" dirty="0"/>
           </a:p>
         </p:txBody>
       </p:sp>
     </p:spTree>
-    <p:extLst>
-      <p:ext uri="{BB962C8B-B14F-4D97-AF65-F5344CB8AC3E}">
-        <p14:creationId xmlns:p14="http://schemas.microsoft.com/office/powerpoint/2010/main" val="552225193"/>
-      </p:ext>
-    </p:extLst>
   </p:cSld>
   <p:clrMapOvr>
     <a:masterClrMapping/>
@@ -10809,11 +10289,6 @@
         </p:txBody>
       </p:sp>
     </p:spTree>
-    <p:extLst>
-      <p:ext uri="{BB962C8B-B14F-4D97-AF65-F5344CB8AC3E}">
-        <p14:creationId xmlns:p14="http://schemas.microsoft.com/office/powerpoint/2010/main" val="4047138967"/>
-      </p:ext>
-    </p:extLst>
   </p:cSld>
   <p:clrMapOvr>
     <a:masterClrMapping/>
@@ -10840,13 +10315,7 @@
       </p:grpSpPr>
       <p:sp>
         <p:nvSpPr>
-          <p:cNvPr id="2" name="Title 1">
-            <a:extLst>
-              <a:ext uri="{FF2B5EF4-FFF2-40B4-BE49-F238E27FC236}">
-                <a16:creationId xmlns:a16="http://schemas.microsoft.com/office/drawing/2014/main" id="{7CD61EC4-17AD-45DC-95E5-80FCD9EA05D7}"/>
-              </a:ext>
-            </a:extLst>
-          </p:cNvPr>
+          <p:cNvPr id="2" name="Title 1"/>
           <p:cNvSpPr>
             <a:spLocks noGrp="1"/>
           </p:cNvSpPr>
@@ -10873,13 +10342,7 @@
       </p:sp>
       <p:sp>
         <p:nvSpPr>
-          <p:cNvPr id="3" name="Content Placeholder 2">
-            <a:extLst>
-              <a:ext uri="{FF2B5EF4-FFF2-40B4-BE49-F238E27FC236}">
-                <a16:creationId xmlns:a16="http://schemas.microsoft.com/office/drawing/2014/main" id="{5040B6A6-3E47-4F96-9882-D68B0A8C96DB}"/>
-              </a:ext>
-            </a:extLst>
-          </p:cNvPr>
+          <p:cNvPr id="3" name="Content Placeholder 2"/>
           <p:cNvSpPr>
             <a:spLocks noGrp="1"/>
           </p:cNvSpPr>
@@ -10897,11 +10360,6 @@
         </p:txBody>
       </p:sp>
     </p:spTree>
-    <p:extLst>
-      <p:ext uri="{BB962C8B-B14F-4D97-AF65-F5344CB8AC3E}">
-        <p14:creationId xmlns:p14="http://schemas.microsoft.com/office/powerpoint/2010/main" val="4263994457"/>
-      </p:ext>
-    </p:extLst>
   </p:cSld>
   <p:clrMapOvr>
     <a:masterClrMapping/>
@@ -10970,7 +10428,7 @@
           </a:bodyPr>
           <a:lstStyle/>
           <a:p>
-            <a:pPr marL="118872" indent="0">
+            <a:pPr marL="118745" indent="0">
               <a:lnSpc>
                 <a:spcPct val="120000"/>
               </a:lnSpc>
@@ -11136,6 +10594,7 @@
               <a:rPr lang="zh-CN" altLang="en-US" dirty="0"/>
               <a:t>（有人碰到好题目，有人碰到不靠谱的作者，有人的书叫好， 有人的书叫座，有人热爱某一个冷门的领域，谁是好编辑？）</a:t>
             </a:r>
+            <a:endParaRPr lang="zh-CN" altLang="en-US" dirty="0"/>
           </a:p>
           <a:p>
             <a:pPr>
@@ -11159,6 +10618,7 @@
               <a:rPr lang="zh-CN" altLang="en-US" dirty="0"/>
               <a:t>（如何评价每个学生的绩效？）</a:t>
             </a:r>
+            <a:endParaRPr lang="zh-CN" altLang="en-US" dirty="0"/>
           </a:p>
           <a:p>
             <a:pPr>
@@ -11171,11 +10631,6 @@
         </p:txBody>
       </p:sp>
     </p:spTree>
-    <p:extLst>
-      <p:ext uri="{BB962C8B-B14F-4D97-AF65-F5344CB8AC3E}">
-        <p14:creationId xmlns:p14="http://schemas.microsoft.com/office/powerpoint/2010/main" val="2779454383"/>
-      </p:ext>
-    </p:extLst>
   </p:cSld>
   <p:clrMapOvr>
     <a:masterClrMapping/>
@@ -11210,26 +10665,11 @@
       </p:grpSpPr>
       <p:sp>
         <p:nvSpPr>
-          <p:cNvPr id="9" name="Rectangle 8">
-            <a:extLst>
-              <a:ext uri="{FF2B5EF4-FFF2-40B4-BE49-F238E27FC236}">
-                <a16:creationId xmlns:a16="http://schemas.microsoft.com/office/drawing/2014/main" id="{05325879-C4B2-475E-B853-DC8F21A63351}"/>
-              </a:ext>
-              <a:ext uri="{C183D7F6-B498-43B3-948B-1728B52AA6E4}">
-                <adec:decorative xmlns:adec="http://schemas.microsoft.com/office/drawing/2017/decorative" val="1"/>
-              </a:ext>
-            </a:extLst>
-          </p:cNvPr>
+          <p:cNvPr id="9" name="Rectangle 8"/>
           <p:cNvSpPr>
             <a:spLocks noGrp="1" noRot="1" noChangeAspect="1" noMove="1" noResize="1" noEditPoints="1" noAdjustHandles="1" noChangeArrowheads="1" noChangeShapeType="1" noTextEdit="1"/>
           </p:cNvSpPr>
-          <p:nvPr>
-            <p:extLst>
-              <p:ext uri="{386F3935-93C4-4BCD-93E2-E3B085C9AB24}">
-                <p16:designElem xmlns:p16="http://schemas.microsoft.com/office/powerpoint/2015/main" val="1"/>
-              </p:ext>
-            </p:extLst>
-          </p:nvPr>
+          <p:nvPr/>
         </p:nvSpPr>
         <p:spPr>
           <a:xfrm>
@@ -11273,26 +10713,11 @@
       </p:sp>
       <p:sp>
         <p:nvSpPr>
-          <p:cNvPr id="11" name="Rectangle 10">
-            <a:extLst>
-              <a:ext uri="{FF2B5EF4-FFF2-40B4-BE49-F238E27FC236}">
-                <a16:creationId xmlns:a16="http://schemas.microsoft.com/office/drawing/2014/main" id="{012C085F-3B19-420D-902A-B55695F5036C}"/>
-              </a:ext>
-              <a:ext uri="{C183D7F6-B498-43B3-948B-1728B52AA6E4}">
-                <adec:decorative xmlns:adec="http://schemas.microsoft.com/office/drawing/2017/decorative" val="1"/>
-              </a:ext>
-            </a:extLst>
-          </p:cNvPr>
+          <p:cNvPr id="11" name="Rectangle 10"/>
           <p:cNvSpPr>
             <a:spLocks noGrp="1" noRot="1" noChangeAspect="1" noMove="1" noResize="1" noEditPoints="1" noAdjustHandles="1" noChangeArrowheads="1" noChangeShapeType="1" noTextEdit="1"/>
           </p:cNvSpPr>
-          <p:nvPr>
-            <p:extLst>
-              <p:ext uri="{386F3935-93C4-4BCD-93E2-E3B085C9AB24}">
-                <p16:designElem xmlns:p16="http://schemas.microsoft.com/office/powerpoint/2015/main" val="1"/>
-              </p:ext>
-            </p:extLst>
-          </p:nvPr>
+          <p:nvPr/>
         </p:nvSpPr>
         <p:spPr>
           <a:xfrm>
@@ -11303,7 +10728,7 @@
             <a:avLst/>
           </a:prstGeom>
           <a:blipFill>
-            <a:blip r:embed="rId2"/>
+            <a:blip r:embed="rId1"/>
             <a:stretch>
               <a:fillRect r="-164004"/>
             </a:stretch>
@@ -11820,20 +11245,14 @@
       </p:sp>
       <p:pic>
         <p:nvPicPr>
-          <p:cNvPr id="4" name="Picture 3">
-            <a:extLst>
-              <a:ext uri="{FF2B5EF4-FFF2-40B4-BE49-F238E27FC236}">
-                <a16:creationId xmlns:a16="http://schemas.microsoft.com/office/drawing/2014/main" id="{C865262D-9945-4CC0-B8FB-C3D176AFD1C3}"/>
-              </a:ext>
-            </a:extLst>
-          </p:cNvPr>
+          <p:cNvPr id="4" name="Picture 3"/>
           <p:cNvPicPr>
             <a:picLocks noChangeAspect="1"/>
           </p:cNvPicPr>
           <p:nvPr/>
         </p:nvPicPr>
         <p:blipFill>
-          <a:blip r:embed="rId3"/>
+          <a:blip r:embed="rId2"/>
           <a:stretch>
             <a:fillRect/>
           </a:stretch>
@@ -11849,11 +11268,6 @@
         </p:spPr>
       </p:pic>
     </p:spTree>
-    <p:extLst>
-      <p:ext uri="{BB962C8B-B14F-4D97-AF65-F5344CB8AC3E}">
-        <p14:creationId xmlns:p14="http://schemas.microsoft.com/office/powerpoint/2010/main" val="2100864417"/>
-      </p:ext>
-    </p:extLst>
   </p:cSld>
   <p:clrMapOvr>
     <a:overrideClrMapping bg1="lt1" tx1="dk1" bg2="lt2" tx2="dk2" accent1="accent1" accent2="accent2" accent3="accent3" accent4="accent4" accent5="accent5" accent6="accent6" hlink="hlink" folHlink="folHlink"/>
@@ -11867,7 +11281,7 @@
     <p:bg>
       <p:bgPr>
         <a:blipFill dpi="0" rotWithShape="1">
-          <a:blip r:embed="rId2">
+          <a:blip r:embed="rId1">
             <a:lum/>
           </a:blip>
           <a:srcRect/>
@@ -11880,13 +11294,7 @@
     </p:bg>
     <p:spTree>
       <p:nvGrpSpPr>
-        <p:cNvPr id="1" name="">
-          <a:extLst>
-            <a:ext uri="{FF2B5EF4-FFF2-40B4-BE49-F238E27FC236}">
-              <a16:creationId xmlns:a16="http://schemas.microsoft.com/office/drawing/2014/main" id="{81E62C2C-6DE6-523E-489E-0098EB8BD1E2}"/>
-            </a:ext>
-          </a:extLst>
-        </p:cNvPr>
+        <p:cNvPr id="1" name=""/>
         <p:cNvGrpSpPr/>
         <p:nvPr/>
       </p:nvGrpSpPr>
@@ -11900,26 +11308,11 @@
       </p:grpSpPr>
       <p:sp>
         <p:nvSpPr>
-          <p:cNvPr id="8" name="Rectangle 10">
-            <a:extLst>
-              <a:ext uri="{FF2B5EF4-FFF2-40B4-BE49-F238E27FC236}">
-                <a16:creationId xmlns:a16="http://schemas.microsoft.com/office/drawing/2014/main" id="{4A079BE1-ED93-4445-AD4A-0D67109702E7}"/>
-              </a:ext>
-              <a:ext uri="{C183D7F6-B498-43B3-948B-1728B52AA6E4}">
-                <adec:decorative xmlns:adec="http://schemas.microsoft.com/office/drawing/2017/decorative" val="1"/>
-              </a:ext>
-            </a:extLst>
-          </p:cNvPr>
+          <p:cNvPr id="8" name="Rectangle 10"/>
           <p:cNvSpPr>
             <a:spLocks noGrp="1" noRot="1" noChangeAspect="1" noMove="1" noResize="1" noEditPoints="1" noAdjustHandles="1" noChangeArrowheads="1" noChangeShapeType="1" noTextEdit="1"/>
           </p:cNvSpPr>
-          <p:nvPr>
-            <p:extLst>
-              <p:ext uri="{386F3935-93C4-4BCD-93E2-E3B085C9AB24}">
-                <p16:designElem xmlns:p16="http://schemas.microsoft.com/office/powerpoint/2015/main" val="1"/>
-              </p:ext>
-            </p:extLst>
-          </p:nvPr>
+          <p:nvPr/>
         </p:nvSpPr>
         <p:spPr>
           <a:xfrm>
@@ -11972,26 +11365,11 @@
       </p:sp>
       <p:sp useBgFill="1">
         <p:nvSpPr>
-          <p:cNvPr id="13" name="Rectangle 12">
-            <a:extLst>
-              <a:ext uri="{FF2B5EF4-FFF2-40B4-BE49-F238E27FC236}">
-                <a16:creationId xmlns:a16="http://schemas.microsoft.com/office/drawing/2014/main" id="{3F6C79BF-A4E0-4CC8-952B-C736485CAFF4}"/>
-              </a:ext>
-              <a:ext uri="{C183D7F6-B498-43B3-948B-1728B52AA6E4}">
-                <adec:decorative xmlns:adec="http://schemas.microsoft.com/office/drawing/2017/decorative" val="1"/>
-              </a:ext>
-            </a:extLst>
-          </p:cNvPr>
+          <p:cNvPr id="13" name="Rectangle 12"/>
           <p:cNvSpPr>
             <a:spLocks noGrp="1" noRot="1" noChangeAspect="1" noMove="1" noResize="1" noEditPoints="1" noAdjustHandles="1" noChangeArrowheads="1" noChangeShapeType="1" noTextEdit="1"/>
           </p:cNvSpPr>
-          <p:nvPr>
-            <p:extLst>
-              <p:ext uri="{386F3935-93C4-4BCD-93E2-E3B085C9AB24}">
-                <p16:designElem xmlns:p16="http://schemas.microsoft.com/office/powerpoint/2015/main" val="1"/>
-              </p:ext>
-            </p:extLst>
-          </p:nvPr>
+          <p:nvPr/>
         </p:nvSpPr>
         <p:spPr>
           <a:xfrm>
@@ -12039,13 +11417,7 @@
       </p:sp>
       <p:sp>
         <p:nvSpPr>
-          <p:cNvPr id="2" name="标题 1">
-            <a:extLst>
-              <a:ext uri="{FF2B5EF4-FFF2-40B4-BE49-F238E27FC236}">
-                <a16:creationId xmlns:a16="http://schemas.microsoft.com/office/drawing/2014/main" id="{1BCB5A19-B3AF-1A55-223F-75EC51F317B0}"/>
-              </a:ext>
-            </a:extLst>
-          </p:cNvPr>
+          <p:cNvPr id="2" name="标题 1"/>
           <p:cNvSpPr>
             <a:spLocks noGrp="1"/>
           </p:cNvSpPr>
@@ -12082,45 +11454,9 @@
           </a:p>
         </p:txBody>
       </p:sp>
-      <p:pic>
-        <p:nvPicPr>
-          <p:cNvPr id="6" name="图片 5">
-            <a:extLst>
-              <a:ext uri="{FF2B5EF4-FFF2-40B4-BE49-F238E27FC236}">
-                <a16:creationId xmlns:a16="http://schemas.microsoft.com/office/drawing/2014/main" id="{0CC04E94-6A1A-51C3-A6BF-3AF6CB38147F}"/>
-              </a:ext>
-            </a:extLst>
-          </p:cNvPr>
-          <p:cNvPicPr>
-            <a:picLocks noChangeAspect="1"/>
-          </p:cNvPicPr>
-          <p:nvPr/>
-        </p:nvPicPr>
-        <p:blipFill>
-          <a:blip r:embed="rId3"/>
-          <a:stretch>
-            <a:fillRect/>
-          </a:stretch>
-        </p:blipFill>
-        <p:spPr>
-          <a:xfrm>
-            <a:off x="643467" y="1025014"/>
-            <a:ext cx="10905066" cy="2835316"/>
-          </a:xfrm>
-          <a:prstGeom prst="rect">
-            <a:avLst/>
-          </a:prstGeom>
-        </p:spPr>
-      </p:pic>
-      <p:sp>
-        <p:nvSpPr>
-          <p:cNvPr id="3" name="内容占位符 2">
-            <a:extLst>
-              <a:ext uri="{FF2B5EF4-FFF2-40B4-BE49-F238E27FC236}">
-                <a16:creationId xmlns:a16="http://schemas.microsoft.com/office/drawing/2014/main" id="{7A831B99-4A25-0C5C-4637-898826B64E22}"/>
-              </a:ext>
-            </a:extLst>
-          </p:cNvPr>
+      <p:sp>
+        <p:nvSpPr>
+          <p:cNvPr id="3" name="内容占位符 2"/>
           <p:cNvSpPr>
             <a:spLocks noGrp="1"/>
           </p:cNvSpPr>
@@ -12371,12 +11707,31 @@
           </a:p>
         </p:txBody>
       </p:sp>
+      <p:pic>
+        <p:nvPicPr>
+          <p:cNvPr id="4" name="图片 3"/>
+          <p:cNvPicPr>
+            <a:picLocks noChangeAspect="1"/>
+          </p:cNvPicPr>
+          <p:nvPr/>
+        </p:nvPicPr>
+        <p:blipFill>
+          <a:blip r:embed="rId2"/>
+          <a:stretch>
+            <a:fillRect/>
+          </a:stretch>
+        </p:blipFill>
+        <p:spPr>
+          <a:xfrm>
+            <a:off x="914400" y="1219200"/>
+            <a:ext cx="8465820" cy="2009775"/>
+          </a:xfrm>
+          <a:prstGeom prst="rect">
+            <a:avLst/>
+          </a:prstGeom>
+        </p:spPr>
+      </p:pic>
     </p:spTree>
-    <p:extLst>
-      <p:ext uri="{BB962C8B-B14F-4D97-AF65-F5344CB8AC3E}">
-        <p14:creationId xmlns:p14="http://schemas.microsoft.com/office/powerpoint/2010/main" val="2423002010"/>
-      </p:ext>
-    </p:extLst>
   </p:cSld>
   <p:clrMapOvr>
     <a:masterClrMapping/>
@@ -12390,7 +11745,7 @@
     <p:bg>
       <p:bgPr>
         <a:blipFill dpi="0" rotWithShape="1">
-          <a:blip r:embed="rId2">
+          <a:blip r:embed="rId1">
             <a:lum/>
           </a:blip>
           <a:srcRect/>
@@ -12417,22 +11772,18 @@
       </p:grpSpPr>
       <p:pic>
         <p:nvPicPr>
-          <p:cNvPr id="4" name="Picture 3">
-            <a:extLst>
-              <a:ext uri="{FF2B5EF4-FFF2-40B4-BE49-F238E27FC236}">
-                <a16:creationId xmlns:a16="http://schemas.microsoft.com/office/drawing/2014/main" id="{105705EE-F9CC-4179-8161-85F1EE4DF5CA}"/>
-              </a:ext>
-            </a:extLst>
-          </p:cNvPr>
+          <p:cNvPr id="4" name="Picture 3"/>
           <p:cNvPicPr>
             <a:picLocks noChangeAspect="1"/>
           </p:cNvPicPr>
           <p:nvPr/>
         </p:nvPicPr>
         <p:blipFill rotWithShape="1">
-          <a:blip r:embed="rId3"/>
+          <a:blip r:embed="rId2"/>
           <a:srcRect r="5437"/>
-          <a:stretch/>
+          <a:stretch>
+            <a:fillRect/>
+          </a:stretch>
         </p:blipFill>
         <p:spPr>
           <a:xfrm>
@@ -12446,26 +11797,11 @@
       </p:pic>
       <p:sp useBgFill="1">
         <p:nvSpPr>
-          <p:cNvPr id="9" name="Rectangle 8">
-            <a:extLst>
-              <a:ext uri="{FF2B5EF4-FFF2-40B4-BE49-F238E27FC236}">
-                <a16:creationId xmlns:a16="http://schemas.microsoft.com/office/drawing/2014/main" id="{229B61F6-561C-44B1-809D-51A2F295F329}"/>
-              </a:ext>
-              <a:ext uri="{C183D7F6-B498-43B3-948B-1728B52AA6E4}">
-                <adec:decorative xmlns:adec="http://schemas.microsoft.com/office/drawing/2017/decorative" val="1"/>
-              </a:ext>
-            </a:extLst>
-          </p:cNvPr>
+          <p:cNvPr id="9" name="Rectangle 8"/>
           <p:cNvSpPr>
             <a:spLocks noGrp="1" noRot="1" noChangeAspect="1" noMove="1" noResize="1" noEditPoints="1" noAdjustHandles="1" noChangeArrowheads="1" noChangeShapeType="1" noTextEdit="1"/>
           </p:cNvSpPr>
-          <p:nvPr>
-            <p:extLst>
-              <p:ext uri="{386F3935-93C4-4BCD-93E2-E3B085C9AB24}">
-                <p16:designElem xmlns:p16="http://schemas.microsoft.com/office/powerpoint/2015/main" val="1"/>
-              </p:ext>
-            </p:extLst>
-          </p:nvPr>
+          <p:nvPr/>
         </p:nvSpPr>
         <p:spPr>
           <a:xfrm>
@@ -12595,11 +11931,6 @@
         </p:txBody>
       </p:sp>
     </p:spTree>
-    <p:extLst>
-      <p:ext uri="{BB962C8B-B14F-4D97-AF65-F5344CB8AC3E}">
-        <p14:creationId xmlns:p14="http://schemas.microsoft.com/office/powerpoint/2010/main" val="3257530078"/>
-      </p:ext>
-    </p:extLst>
   </p:cSld>
   <p:clrMapOvr>
     <a:masterClrMapping/>
@@ -12679,7 +12010,7 @@
           <p:nvPr/>
         </p:nvPicPr>
         <p:blipFill>
-          <a:blip r:embed="rId2"/>
+          <a:blip r:embed="rId1"/>
           <a:stretch>
             <a:fillRect/>
           </a:stretch>
@@ -12695,11 +12026,6 @@
         </p:spPr>
       </p:pic>
     </p:spTree>
-    <p:extLst>
-      <p:ext uri="{BB962C8B-B14F-4D97-AF65-F5344CB8AC3E}">
-        <p14:creationId xmlns:p14="http://schemas.microsoft.com/office/powerpoint/2010/main" val="711914682"/>
-      </p:ext>
-    </p:extLst>
   </p:cSld>
   <p:clrMapOvr>
     <a:masterClrMapping/>
@@ -12797,6 +12123,7 @@
               <a:rPr lang="en-US" dirty="0"/>
               <a:t>Software Engineering Code of Ethics and Professional Practice）</a:t>
             </a:r>
+            <a:endParaRPr lang="en-US" dirty="0"/>
           </a:p>
           <a:p>
             <a:r>
@@ -12807,10 +12134,29 @@
           </a:p>
           <a:p>
             <a:r>
+              <a:rPr lang="en-US" dirty="0"/>
+              <a:t> </a:t>
+            </a:r>
+            <a:r>
+              <a:rPr lang="zh-CN" altLang="en-US" dirty="0"/>
+              <a:t>偷了 《半条命</a:t>
+            </a:r>
+            <a:r>
+              <a:rPr lang="en-US" altLang="zh-CN" dirty="0"/>
+              <a:t>2</a:t>
+            </a:r>
+            <a:r>
+              <a:rPr lang="zh-CN" altLang="en-US" dirty="0"/>
+              <a:t>》源代码的人</a:t>
+            </a:r>
+            <a:endParaRPr lang="en-US" altLang="zh-CN" dirty="0"/>
+          </a:p>
+          <a:p>
+            <a:r>
               <a:rPr lang="en-US" dirty="0">
-                <a:hlinkClick r:id="rId2"/>
+                <a:hlinkClick r:id="rId1"/>
               </a:rPr>
-              <a:t>http://blog.jobbole.com/79450/</a:t>
+              <a:t>http://tech.ifeng.com/a/20141020/40841049_0.shtml</a:t>
             </a:r>
             <a:r>
               <a:rPr lang="en-US" dirty="0"/>
@@ -12818,48 +12164,26 @@
             </a:r>
             <a:r>
               <a:rPr lang="zh-CN" altLang="en-US" dirty="0"/>
-              <a:t>偷了 “半条命”源码的人</a:t>
+              <a:t>计数造假</a:t>
             </a:r>
             <a:endParaRPr lang="en-US" altLang="zh-CN" dirty="0"/>
           </a:p>
           <a:p>
             <a:r>
-              <a:rPr lang="en-US" dirty="0">
-                <a:hlinkClick r:id="rId3"/>
-              </a:rPr>
-              <a:t>http://tech.ifeng.com/a/20141020/40841049_0.shtml</a:t>
-            </a:r>
-            <a:r>
-              <a:rPr lang="en-US" dirty="0"/>
-              <a:t>   </a:t>
-            </a:r>
-            <a:r>
-              <a:rPr lang="zh-CN" altLang="en-US" dirty="0"/>
-              <a:t>计数造假</a:t>
-            </a:r>
+              <a:rPr lang="zh-CN" altLang="en-US" dirty="0"/>
+              <a:t>阿里  月饼 事件</a:t>
+            </a:r>
+            <a:endParaRPr lang="en-US" altLang="zh-CN"/>
+          </a:p>
+          <a:p>
             <a:endParaRPr lang="en-US" altLang="zh-CN" dirty="0"/>
           </a:p>
           <a:p>
-            <a:r>
-              <a:rPr lang="zh-CN" altLang="en-US" dirty="0"/>
-              <a:t>阿里  月饼 事件</a:t>
-            </a:r>
-            <a:endParaRPr lang="en-US" altLang="zh-CN"/>
-          </a:p>
-          <a:p>
-            <a:endParaRPr lang="en-US" altLang="zh-CN" dirty="0"/>
-          </a:p>
-          <a:p>
             <a:endParaRPr lang="en-US" dirty="0"/>
           </a:p>
         </p:txBody>
       </p:sp>
     </p:spTree>
-    <p:extLst>
-      <p:ext uri="{BB962C8B-B14F-4D97-AF65-F5344CB8AC3E}">
-        <p14:creationId xmlns:p14="http://schemas.microsoft.com/office/powerpoint/2010/main" val="476253036"/>
-      </p:ext>
-    </p:extLst>
   </p:cSld>
   <p:clrMapOvr>
     <a:masterClrMapping/>
@@ -12873,7 +12197,7 @@
     <p:bg>
       <p:bgPr>
         <a:blipFill dpi="0" rotWithShape="1">
-          <a:blip r:embed="rId2">
+          <a:blip r:embed="rId1">
             <a:lum/>
           </a:blip>
           <a:srcRect/>
@@ -12900,13 +12224,7 @@
       </p:grpSpPr>
       <p:sp>
         <p:nvSpPr>
-          <p:cNvPr id="2" name="Title 1">
-            <a:extLst>
-              <a:ext uri="{FF2B5EF4-FFF2-40B4-BE49-F238E27FC236}">
-                <a16:creationId xmlns:a16="http://schemas.microsoft.com/office/drawing/2014/main" id="{6D26B91B-D9B1-477D-8B40-9367BF479138}"/>
-              </a:ext>
-            </a:extLst>
-          </p:cNvPr>
+          <p:cNvPr id="2" name="Title 1"/>
           <p:cNvSpPr>
             <a:spLocks noGrp="1"/>
           </p:cNvSpPr>
@@ -12936,27 +12254,21 @@
       </p:sp>
       <p:pic>
         <p:nvPicPr>
-          <p:cNvPr id="4" name="Picture 3">
-            <a:extLst>
-              <a:ext uri="{FF2B5EF4-FFF2-40B4-BE49-F238E27FC236}">
-                <a16:creationId xmlns:a16="http://schemas.microsoft.com/office/drawing/2014/main" id="{B7650DC0-3412-4510-A886-893C09B9FE5D}"/>
-              </a:ext>
-            </a:extLst>
-          </p:cNvPr>
+          <p:cNvPr id="4" name="Picture 3"/>
           <p:cNvPicPr>
             <a:picLocks noChangeAspect="1"/>
           </p:cNvPicPr>
           <p:nvPr/>
         </p:nvPicPr>
         <p:blipFill>
-          <a:blip r:embed="rId3"/>
+          <a:blip r:embed="rId2"/>
           <a:stretch>
             <a:fillRect/>
           </a:stretch>
         </p:blipFill>
         <p:spPr>
           <a:xfrm>
-            <a:off x="956068" y="1924505"/>
+            <a:off x="1142758" y="3200220"/>
             <a:ext cx="3354676" cy="2516007"/>
           </a:xfrm>
           <a:prstGeom prst="rect">
@@ -12966,13 +12278,7 @@
       </p:pic>
       <p:sp>
         <p:nvSpPr>
-          <p:cNvPr id="3" name="Content Placeholder 2">
-            <a:extLst>
-              <a:ext uri="{FF2B5EF4-FFF2-40B4-BE49-F238E27FC236}">
-                <a16:creationId xmlns:a16="http://schemas.microsoft.com/office/drawing/2014/main" id="{C212176C-009A-4C3D-8B0B-972D42797D8A}"/>
-              </a:ext>
-            </a:extLst>
-          </p:cNvPr>
+          <p:cNvPr id="3" name="Content Placeholder 2"/>
           <p:cNvSpPr>
             <a:spLocks noGrp="1"/>
           </p:cNvSpPr>
@@ -12982,8 +12288,8 @@
         </p:nvSpPr>
         <p:spPr>
           <a:xfrm>
-            <a:off x="4800600" y="1825625"/>
-            <a:ext cx="6553200" cy="4351338"/>
+            <a:off x="1066800" y="1600200"/>
+            <a:ext cx="9107805" cy="4351655"/>
           </a:xfrm>
         </p:spPr>
         <p:txBody>
@@ -12992,6 +12298,9 @@
           </a:bodyPr>
           <a:lstStyle/>
           <a:p>
+            <a:pPr marL="0" indent="0">
+              <a:buNone/>
+            </a:pPr>
             <a:r>
               <a:rPr lang="zh-CN" altLang="en-US">
                 <a:gradFill>
@@ -13014,7 +12323,55 @@
                   <a:lin ang="4800000" scaled="0"/>
                 </a:gradFill>
               </a:rPr>
-              <a:t>人和人不一样， 你觉得程序员和自闭症的患者有什么联系么</a:t>
+              <a:t>如果把人按照 </a:t>
+            </a:r>
+            <a:r>
+              <a:rPr lang="en-US">
+                <a:gradFill>
+                  <a:gsLst>
+                    <a:gs pos="34000">
+                      <a:schemeClr val="tx1">
+                        <a:lumMod val="93000"/>
+                      </a:schemeClr>
+                    </a:gs>
+                    <a:gs pos="0">
+                      <a:schemeClr val="bg1">
+                        <a:lumMod val="25000"/>
+                        <a:lumOff val="75000"/>
+                      </a:schemeClr>
+                    </a:gs>
+                    <a:gs pos="100000">
+                      <a:schemeClr val="tx1"/>
+                    </a:gs>
+                  </a:gsLst>
+                  <a:lin ang="4800000" scaled="0"/>
+                </a:gradFill>
+              </a:rPr>
+              <a:t>empathetic （</a:t>
+            </a:r>
+            <a:r>
+              <a:rPr lang="zh-CN" altLang="en-US">
+                <a:gradFill>
+                  <a:gsLst>
+                    <a:gs pos="34000">
+                      <a:schemeClr val="tx1">
+                        <a:lumMod val="93000"/>
+                      </a:schemeClr>
+                    </a:gs>
+                    <a:gs pos="0">
+                      <a:schemeClr val="bg1">
+                        <a:lumMod val="25000"/>
+                        <a:lumOff val="75000"/>
+                      </a:schemeClr>
+                    </a:gs>
+                    <a:gs pos="100000">
+                      <a:schemeClr val="tx1"/>
+                    </a:gs>
+                  </a:gsLst>
+                  <a:lin ang="4800000" scaled="0"/>
+                </a:gradFill>
+              </a:rPr>
+              <a:t>有同理心的）  </a:t>
             </a:r>
             <a:r>
               <a:rPr lang="en-US" altLang="zh-CN">
@@ -13038,12 +12395,10 @@
                   <a:lin ang="4800000" scaled="0"/>
                 </a:gradFill>
               </a:rPr>
-              <a:t>?</a:t>
-            </a:r>
-          </a:p>
-          <a:p>
-            <a:r>
-              <a:rPr lang="en-US" altLang="zh-CN">
+              <a:t>--  </a:t>
+            </a:r>
+            <a:r>
+              <a:rPr lang="en-US">
                 <a:gradFill>
                   <a:gsLst>
                     <a:gs pos="34000">
@@ -13064,10 +12419,10 @@
                   <a:lin ang="4800000" scaled="0"/>
                 </a:gradFill>
               </a:rPr>
-              <a:t>     </a:t>
-            </a:r>
-            <a:r>
-              <a:rPr lang="en-US" u="sng">
+              <a:t>systematic （</a:t>
+            </a:r>
+            <a:r>
+              <a:rPr lang="zh-CN" altLang="en-US">
                 <a:gradFill>
                   <a:gsLst>
                     <a:gs pos="34000">
@@ -13087,11 +12442,10 @@
                   </a:gsLst>
                   <a:lin ang="4800000" scaled="0"/>
                 </a:gradFill>
-                <a:hlinkClick r:id="rId4"/>
               </a:rPr>
-              <a:t>http://archive.wired.com/wired/archive/9.12/baron-cohen.html</a:t>
-            </a:r>
-            <a:endParaRPr lang="en-US">
+              <a:t>系统思维的） 两极来分类， 有人画出了如下的分布示意图，你怎么看？</a:t>
+            </a:r>
+            <a:endParaRPr lang="zh-CN" altLang="en-US">
               <a:gradFill>
                 <a:gsLst>
                   <a:gs pos="34000">
@@ -13112,176 +12466,6 @@
                 <a:lin ang="4800000" scaled="0"/>
               </a:gradFill>
             </a:endParaRPr>
-          </a:p>
-          <a:p>
-            <a:r>
-              <a:rPr lang="en-US">
-                <a:gradFill>
-                  <a:gsLst>
-                    <a:gs pos="34000">
-                      <a:schemeClr val="tx1">
-                        <a:lumMod val="93000"/>
-                      </a:schemeClr>
-                    </a:gs>
-                    <a:gs pos="0">
-                      <a:schemeClr val="bg1">
-                        <a:lumMod val="25000"/>
-                        <a:lumOff val="75000"/>
-                      </a:schemeClr>
-                    </a:gs>
-                    <a:gs pos="100000">
-                      <a:schemeClr val="tx1"/>
-                    </a:gs>
-                  </a:gsLst>
-                  <a:lin ang="4800000" scaled="0"/>
-                </a:gradFill>
-              </a:rPr>
-              <a:t>     </a:t>
-            </a:r>
-            <a:r>
-              <a:rPr lang="zh-CN" altLang="en-US">
-                <a:gradFill>
-                  <a:gsLst>
-                    <a:gs pos="34000">
-                      <a:schemeClr val="tx1">
-                        <a:lumMod val="93000"/>
-                      </a:schemeClr>
-                    </a:gs>
-                    <a:gs pos="0">
-                      <a:schemeClr val="bg1">
-                        <a:lumMod val="25000"/>
-                        <a:lumOff val="75000"/>
-                      </a:schemeClr>
-                    </a:gs>
-                    <a:gs pos="100000">
-                      <a:schemeClr val="tx1"/>
-                    </a:gs>
-                  </a:gsLst>
-                  <a:lin ang="4800000" scaled="0"/>
-                </a:gradFill>
-              </a:rPr>
-              <a:t>如果把人按照 </a:t>
-            </a:r>
-            <a:r>
-              <a:rPr lang="en-US">
-                <a:gradFill>
-                  <a:gsLst>
-                    <a:gs pos="34000">
-                      <a:schemeClr val="tx1">
-                        <a:lumMod val="93000"/>
-                      </a:schemeClr>
-                    </a:gs>
-                    <a:gs pos="0">
-                      <a:schemeClr val="bg1">
-                        <a:lumMod val="25000"/>
-                        <a:lumOff val="75000"/>
-                      </a:schemeClr>
-                    </a:gs>
-                    <a:gs pos="100000">
-                      <a:schemeClr val="tx1"/>
-                    </a:gs>
-                  </a:gsLst>
-                  <a:lin ang="4800000" scaled="0"/>
-                </a:gradFill>
-              </a:rPr>
-              <a:t>empathetic （</a:t>
-            </a:r>
-            <a:r>
-              <a:rPr lang="zh-CN" altLang="en-US">
-                <a:gradFill>
-                  <a:gsLst>
-                    <a:gs pos="34000">
-                      <a:schemeClr val="tx1">
-                        <a:lumMod val="93000"/>
-                      </a:schemeClr>
-                    </a:gs>
-                    <a:gs pos="0">
-                      <a:schemeClr val="bg1">
-                        <a:lumMod val="25000"/>
-                        <a:lumOff val="75000"/>
-                      </a:schemeClr>
-                    </a:gs>
-                    <a:gs pos="100000">
-                      <a:schemeClr val="tx1"/>
-                    </a:gs>
-                  </a:gsLst>
-                  <a:lin ang="4800000" scaled="0"/>
-                </a:gradFill>
-              </a:rPr>
-              <a:t>有同理心的）  </a:t>
-            </a:r>
-            <a:r>
-              <a:rPr lang="en-US" altLang="zh-CN">
-                <a:gradFill>
-                  <a:gsLst>
-                    <a:gs pos="34000">
-                      <a:schemeClr val="tx1">
-                        <a:lumMod val="93000"/>
-                      </a:schemeClr>
-                    </a:gs>
-                    <a:gs pos="0">
-                      <a:schemeClr val="bg1">
-                        <a:lumMod val="25000"/>
-                        <a:lumOff val="75000"/>
-                      </a:schemeClr>
-                    </a:gs>
-                    <a:gs pos="100000">
-                      <a:schemeClr val="tx1"/>
-                    </a:gs>
-                  </a:gsLst>
-                  <a:lin ang="4800000" scaled="0"/>
-                </a:gradFill>
-              </a:rPr>
-              <a:t>--  </a:t>
-            </a:r>
-            <a:r>
-              <a:rPr lang="en-US">
-                <a:gradFill>
-                  <a:gsLst>
-                    <a:gs pos="34000">
-                      <a:schemeClr val="tx1">
-                        <a:lumMod val="93000"/>
-                      </a:schemeClr>
-                    </a:gs>
-                    <a:gs pos="0">
-                      <a:schemeClr val="bg1">
-                        <a:lumMod val="25000"/>
-                        <a:lumOff val="75000"/>
-                      </a:schemeClr>
-                    </a:gs>
-                    <a:gs pos="100000">
-                      <a:schemeClr val="tx1"/>
-                    </a:gs>
-                  </a:gsLst>
-                  <a:lin ang="4800000" scaled="0"/>
-                </a:gradFill>
-              </a:rPr>
-              <a:t>systematic （</a:t>
-            </a:r>
-            <a:r>
-              <a:rPr lang="zh-CN" altLang="en-US">
-                <a:gradFill>
-                  <a:gsLst>
-                    <a:gs pos="34000">
-                      <a:schemeClr val="tx1">
-                        <a:lumMod val="93000"/>
-                      </a:schemeClr>
-                    </a:gs>
-                    <a:gs pos="0">
-                      <a:schemeClr val="bg1">
-                        <a:lumMod val="25000"/>
-                        <a:lumOff val="75000"/>
-                      </a:schemeClr>
-                    </a:gs>
-                    <a:gs pos="100000">
-                      <a:schemeClr val="tx1"/>
-                    </a:gs>
-                  </a:gsLst>
-                  <a:lin ang="4800000" scaled="0"/>
-                </a:gradFill>
-              </a:rPr>
-              <a:t>系统思维的） 两极来分类， 有人画出了如下的分布示意图，你怎么看？</a:t>
-            </a:r>
           </a:p>
           <a:p>
             <a:pPr marL="0" indent="0">
@@ -13312,11 +12496,6 @@
         </p:txBody>
       </p:sp>
     </p:spTree>
-    <p:extLst>
-      <p:ext uri="{BB962C8B-B14F-4D97-AF65-F5344CB8AC3E}">
-        <p14:creationId xmlns:p14="http://schemas.microsoft.com/office/powerpoint/2010/main" val="4084690665"/>
-      </p:ext>
-    </p:extLst>
   </p:cSld>
   <p:clrMapOvr>
     <a:masterClrMapping/>
@@ -13381,7 +12560,7 @@
           </a:bodyPr>
           <a:lstStyle/>
           <a:p>
-            <a:pPr marL="118872" indent="0">
+            <a:pPr marL="118745" indent="0">
               <a:lnSpc>
                 <a:spcPct val="120000"/>
               </a:lnSpc>
@@ -13399,9 +12578,10 @@
               <a:rPr lang="zh-CN" altLang="en-US" dirty="0"/>
               <a:t>名同学进行了深度的合作，那么，谁的合作精神好？ 在课程的最后阶段，每个人列出一个一维的名单，你自己也在里面，从合作精神最高到最低排列，没有并列。</a:t>
             </a:r>
-          </a:p>
-          <a:p>
-            <a:pPr marL="896112" lvl="3" indent="0">
+            <a:endParaRPr lang="zh-CN" altLang="en-US" dirty="0"/>
+          </a:p>
+          <a:p>
+            <a:pPr marL="895985" lvl="3" indent="0">
               <a:lnSpc>
                 <a:spcPct val="120000"/>
               </a:lnSpc>
@@ -13415,9 +12595,10 @@
               <a:rPr lang="en-US" altLang="zh-CN" dirty="0"/>
               <a:t>1 </a:t>
             </a:r>
-          </a:p>
-          <a:p>
-            <a:pPr marL="896112" lvl="3" indent="0">
+            <a:endParaRPr lang="en-US" altLang="zh-CN" dirty="0"/>
+          </a:p>
+          <a:p>
+            <a:pPr marL="895985" lvl="3" indent="0">
               <a:lnSpc>
                 <a:spcPct val="120000"/>
               </a:lnSpc>
@@ -13431,9 +12612,10 @@
               <a:rPr lang="en-US" altLang="zh-CN" dirty="0"/>
               <a:t>2 </a:t>
             </a:r>
-          </a:p>
-          <a:p>
-            <a:pPr marL="896112" lvl="3" indent="0">
+            <a:endParaRPr lang="en-US" altLang="zh-CN" dirty="0"/>
+          </a:p>
+          <a:p>
+            <a:pPr marL="895985" lvl="3" indent="0">
               <a:lnSpc>
                 <a:spcPct val="120000"/>
               </a:lnSpc>
@@ -13443,9 +12625,10 @@
               <a:rPr lang="en-US" altLang="zh-CN" dirty="0"/>
               <a:t>…</a:t>
             </a:r>
-          </a:p>
-          <a:p>
-            <a:pPr marL="896112" lvl="3" indent="0">
+            <a:endParaRPr lang="en-US" altLang="zh-CN" dirty="0"/>
+          </a:p>
+          <a:p>
+            <a:pPr marL="895985" lvl="3" indent="0">
               <a:lnSpc>
                 <a:spcPct val="120000"/>
               </a:lnSpc>
@@ -13466,7 +12649,7 @@
             <a:endParaRPr lang="en-US" altLang="zh-CN" b="1" dirty="0"/>
           </a:p>
           <a:p>
-            <a:pPr marL="896112" lvl="3" indent="0">
+            <a:pPr marL="895985" lvl="3" indent="0">
               <a:lnSpc>
                 <a:spcPct val="120000"/>
               </a:lnSpc>
@@ -13480,9 +12663,10 @@
               <a:rPr lang="en-US" altLang="zh-CN" dirty="0"/>
               <a:t>3</a:t>
             </a:r>
-          </a:p>
-          <a:p>
-            <a:pPr marL="896112" lvl="3" indent="0">
+            <a:endParaRPr lang="en-US" altLang="zh-CN" dirty="0"/>
+          </a:p>
+          <a:p>
+            <a:pPr marL="895985" lvl="3" indent="0">
               <a:lnSpc>
                 <a:spcPct val="120000"/>
               </a:lnSpc>
@@ -13492,9 +12676,10 @@
               <a:rPr lang="en-US" altLang="zh-CN" dirty="0"/>
               <a:t> ...</a:t>
             </a:r>
-          </a:p>
-          <a:p>
-            <a:pPr marL="118872" indent="0">
+            <a:endParaRPr lang="en-US" altLang="zh-CN" dirty="0"/>
+          </a:p>
+          <a:p>
+            <a:pPr marL="118745" indent="0">
               <a:lnSpc>
                 <a:spcPct val="120000"/>
               </a:lnSpc>
@@ -13503,7 +12688,7 @@
             <a:endParaRPr lang="en-US" altLang="zh-CN" dirty="0"/>
           </a:p>
           <a:p>
-            <a:pPr marL="118872" indent="0">
+            <a:pPr marL="118745" indent="0">
               <a:lnSpc>
                 <a:spcPct val="120000"/>
               </a:lnSpc>
@@ -13558,9 +12743,10 @@
               <a:rPr lang="zh-CN" altLang="en-US" dirty="0"/>
               <a:t>拿到全部人的提名后，给所有人统计分数。然后公布。</a:t>
             </a:r>
-          </a:p>
-          <a:p>
-            <a:pPr marL="118872" indent="0">
+            <a:endParaRPr lang="zh-CN" altLang="en-US" dirty="0"/>
+          </a:p>
+          <a:p>
+            <a:pPr marL="118745" indent="0">
               <a:lnSpc>
                 <a:spcPct val="120000"/>
               </a:lnSpc>
@@ -13569,7 +12755,7 @@
             <a:endParaRPr lang="en-US" altLang="zh-CN" dirty="0"/>
           </a:p>
           <a:p>
-            <a:pPr marL="118872" indent="0">
+            <a:pPr marL="118745" indent="0">
               <a:lnSpc>
                 <a:spcPct val="120000"/>
               </a:lnSpc>
@@ -13579,15 +12765,11 @@
               <a:rPr lang="zh-CN" altLang="en-US" dirty="0"/>
               <a:t>任课老师决定是否给得分最高的部分同学某种奖励分。</a:t>
             </a:r>
+            <a:endParaRPr lang="zh-CN" altLang="en-US" dirty="0"/>
           </a:p>
         </p:txBody>
       </p:sp>
     </p:spTree>
-    <p:extLst>
-      <p:ext uri="{BB962C8B-B14F-4D97-AF65-F5344CB8AC3E}">
-        <p14:creationId xmlns:p14="http://schemas.microsoft.com/office/powerpoint/2010/main" val="3587831306"/>
-      </p:ext>
-    </p:extLst>
   </p:cSld>
   <p:clrMapOvr>
     <a:masterClrMapping/>
@@ -13667,11 +12849,6 @@
         </p:txBody>
       </p:sp>
     </p:spTree>
-    <p:extLst>
-      <p:ext uri="{BB962C8B-B14F-4D97-AF65-F5344CB8AC3E}">
-        <p14:creationId xmlns:p14="http://schemas.microsoft.com/office/powerpoint/2010/main" val="3918926281"/>
-      </p:ext>
-    </p:extLst>
   </p:cSld>
   <p:clrMapOvr>
     <a:masterClrMapping/>
@@ -13698,13 +12875,7 @@
       </p:grpSpPr>
       <p:sp>
         <p:nvSpPr>
-          <p:cNvPr id="2" name="Title 1">
-            <a:extLst>
-              <a:ext uri="{FF2B5EF4-FFF2-40B4-BE49-F238E27FC236}">
-                <a16:creationId xmlns:a16="http://schemas.microsoft.com/office/drawing/2014/main" id="{24577D88-E090-464B-BC87-D60EE9128A0F}"/>
-              </a:ext>
-            </a:extLst>
-          </p:cNvPr>
+          <p:cNvPr id="2" name="Title 1"/>
           <p:cNvSpPr>
             <a:spLocks noGrp="1"/>
           </p:cNvSpPr>
@@ -13721,18 +12892,13 @@
               <a:rPr lang="en-US" dirty="0"/>
               <a:t>appendix</a:t>
             </a:r>
-          </a:p>
-        </p:txBody>
-      </p:sp>
-      <p:sp>
-        <p:nvSpPr>
-          <p:cNvPr id="3" name="Content Placeholder 2">
-            <a:extLst>
-              <a:ext uri="{FF2B5EF4-FFF2-40B4-BE49-F238E27FC236}">
-                <a16:creationId xmlns:a16="http://schemas.microsoft.com/office/drawing/2014/main" id="{3402149D-B9D8-49F7-8135-09433B6F86C7}"/>
-              </a:ext>
-            </a:extLst>
-          </p:cNvPr>
+            <a:endParaRPr lang="en-US" dirty="0"/>
+          </a:p>
+        </p:txBody>
+      </p:sp>
+      <p:sp>
+        <p:nvSpPr>
+          <p:cNvPr id="3" name="Content Placeholder 2"/>
           <p:cNvSpPr>
             <a:spLocks noGrp="1"/>
           </p:cNvSpPr>
@@ -13750,11 +12916,6 @@
         </p:txBody>
       </p:sp>
     </p:spTree>
-    <p:extLst>
-      <p:ext uri="{BB962C8B-B14F-4D97-AF65-F5344CB8AC3E}">
-        <p14:creationId xmlns:p14="http://schemas.microsoft.com/office/powerpoint/2010/main" val="161325156"/>
-      </p:ext>
-    </p:extLst>
   </p:cSld>
   <p:clrMapOvr>
     <a:masterClrMapping/>
@@ -13781,13 +12942,7 @@
       </p:grpSpPr>
       <p:sp>
         <p:nvSpPr>
-          <p:cNvPr id="2" name="Title 1">
-            <a:extLst>
-              <a:ext uri="{FF2B5EF4-FFF2-40B4-BE49-F238E27FC236}">
-                <a16:creationId xmlns:a16="http://schemas.microsoft.com/office/drawing/2014/main" id="{C926833A-66DA-414D-AA92-42B60D7431E1}"/>
-              </a:ext>
-            </a:extLst>
-          </p:cNvPr>
+          <p:cNvPr id="2" name="Title 1"/>
           <p:cNvSpPr>
             <a:spLocks noGrp="1"/>
           </p:cNvSpPr>
@@ -13806,7 +12961,7 @@
             </a:r>
             <a:r>
               <a:rPr lang="en-US" altLang="zh-CN" dirty="0"/>
-              <a:t>vs </a:t>
+              <a:t>vs. </a:t>
             </a:r>
             <a:r>
               <a:rPr lang="zh-CN" altLang="en-US" dirty="0"/>
@@ -13818,13 +12973,7 @@
       </p:sp>
       <p:sp>
         <p:nvSpPr>
-          <p:cNvPr id="3" name="Content Placeholder 2">
-            <a:extLst>
-              <a:ext uri="{FF2B5EF4-FFF2-40B4-BE49-F238E27FC236}">
-                <a16:creationId xmlns:a16="http://schemas.microsoft.com/office/drawing/2014/main" id="{80E3C29D-715A-4AA8-B56E-D6566817BC9C}"/>
-              </a:ext>
-            </a:extLst>
-          </p:cNvPr>
+          <p:cNvPr id="3" name="Content Placeholder 2"/>
           <p:cNvSpPr>
             <a:spLocks noGrp="1"/>
           </p:cNvSpPr>
@@ -13894,6 +13043,7 @@
               <a:rPr lang="en-US" altLang="zh-CN" dirty="0"/>
               <a:t>We went overboard with management and forget about leadership.</a:t>
             </a:r>
+            <a:endParaRPr lang="en-US" altLang="zh-CN" dirty="0"/>
           </a:p>
           <a:p>
             <a:pPr marL="0" indent="0">
@@ -13909,6 +13059,7 @@
               <a:rPr lang="zh-CN" altLang="en-US" dirty="0"/>
               <a:t>你管理事务，你带领团队。我们过分重视了“管理”而忘记了“领导”。</a:t>
             </a:r>
+            <a:endParaRPr lang="zh-CN" altLang="en-US" dirty="0"/>
           </a:p>
           <a:p>
             <a:pPr marL="0" indent="0">
@@ -13946,6 +13097,7 @@
               <a:rPr lang="zh-CN" altLang="en-US" dirty="0"/>
               <a:t>思想的上领先</a:t>
             </a:r>
+            <a:endParaRPr lang="zh-CN" altLang="en-US" dirty="0"/>
           </a:p>
           <a:p>
             <a:r>
@@ -13956,6 +13108,7 @@
               <a:rPr lang="zh-CN" altLang="en-US" dirty="0"/>
               <a:t>技术上的领先和指导</a:t>
             </a:r>
+            <a:endParaRPr lang="zh-CN" altLang="en-US" dirty="0"/>
           </a:p>
           <a:p>
             <a:endParaRPr lang="en-US" dirty="0"/>
@@ -13963,11 +13116,6 @@
         </p:txBody>
       </p:sp>
     </p:spTree>
-    <p:extLst>
-      <p:ext uri="{BB962C8B-B14F-4D97-AF65-F5344CB8AC3E}">
-        <p14:creationId xmlns:p14="http://schemas.microsoft.com/office/powerpoint/2010/main" val="73778410"/>
-      </p:ext>
-    </p:extLst>
   </p:cSld>
   <p:clrMapOvr>
     <a:masterClrMapping/>
@@ -13994,13 +13142,7 @@
       </p:grpSpPr>
       <p:sp>
         <p:nvSpPr>
-          <p:cNvPr id="2" name="Title 1">
-            <a:extLst>
-              <a:ext uri="{FF2B5EF4-FFF2-40B4-BE49-F238E27FC236}">
-                <a16:creationId xmlns:a16="http://schemas.microsoft.com/office/drawing/2014/main" id="{3131EFA1-56D1-42A1-B2BE-426F7DE81551}"/>
-              </a:ext>
-            </a:extLst>
-          </p:cNvPr>
+          <p:cNvPr id="2" name="Title 1"/>
           <p:cNvSpPr>
             <a:spLocks noGrp="1"/>
           </p:cNvSpPr>
@@ -14031,13 +13173,7 @@
       </p:sp>
       <p:sp>
         <p:nvSpPr>
-          <p:cNvPr id="3" name="Content Placeholder 2">
-            <a:extLst>
-              <a:ext uri="{FF2B5EF4-FFF2-40B4-BE49-F238E27FC236}">
-                <a16:creationId xmlns:a16="http://schemas.microsoft.com/office/drawing/2014/main" id="{78320EF3-3AF7-4CEF-8858-CFAEC5EDDCB7}"/>
-              </a:ext>
-            </a:extLst>
-          </p:cNvPr>
+          <p:cNvPr id="3" name="Content Placeholder 2"/>
           <p:cNvSpPr>
             <a:spLocks noGrp="1"/>
           </p:cNvSpPr>
@@ -14065,6 +13201,7 @@
               <a:rPr lang="zh-CN" altLang="en-US" dirty="0"/>
               <a:t>：</a:t>
             </a:r>
+            <a:endParaRPr lang="zh-CN" altLang="en-US" dirty="0"/>
           </a:p>
           <a:p>
             <a:r>
@@ -14152,11 +13289,6 @@
         </p:txBody>
       </p:sp>
     </p:spTree>
-    <p:extLst>
-      <p:ext uri="{BB962C8B-B14F-4D97-AF65-F5344CB8AC3E}">
-        <p14:creationId xmlns:p14="http://schemas.microsoft.com/office/powerpoint/2010/main" val="3657488488"/>
-      </p:ext>
-    </p:extLst>
   </p:cSld>
   <p:clrMapOvr>
     <a:masterClrMapping/>
@@ -14183,13 +13315,7 @@
       </p:grpSpPr>
       <p:sp>
         <p:nvSpPr>
-          <p:cNvPr id="2" name="Title 1">
-            <a:extLst>
-              <a:ext uri="{FF2B5EF4-FFF2-40B4-BE49-F238E27FC236}">
-                <a16:creationId xmlns:a16="http://schemas.microsoft.com/office/drawing/2014/main" id="{1457ED85-0EA6-4C87-B125-E08B0BC92D28}"/>
-              </a:ext>
-            </a:extLst>
-          </p:cNvPr>
+          <p:cNvPr id="2" name="Title 1"/>
           <p:cNvSpPr>
             <a:spLocks noGrp="1"/>
           </p:cNvSpPr>
@@ -14220,13 +13346,7 @@
       </p:sp>
       <p:pic>
         <p:nvPicPr>
-          <p:cNvPr id="4" name="Content Placeholder 3">
-            <a:extLst>
-              <a:ext uri="{FF2B5EF4-FFF2-40B4-BE49-F238E27FC236}">
-                <a16:creationId xmlns:a16="http://schemas.microsoft.com/office/drawing/2014/main" id="{09FE889E-E3D8-488A-8E80-D504BC6428D1}"/>
-              </a:ext>
-            </a:extLst>
-          </p:cNvPr>
+          <p:cNvPr id="4" name="Content Placeholder 3"/>
           <p:cNvPicPr>
             <a:picLocks noGrp="1" noChangeAspect="1"/>
           </p:cNvPicPr>
@@ -14235,7 +13355,7 @@
           </p:nvPr>
         </p:nvPicPr>
         <p:blipFill>
-          <a:blip r:embed="rId2"/>
+          <a:blip r:embed="rId1"/>
           <a:stretch>
             <a:fillRect/>
           </a:stretch>
@@ -14251,11 +13371,6 @@
         </p:spPr>
       </p:pic>
     </p:spTree>
-    <p:extLst>
-      <p:ext uri="{BB962C8B-B14F-4D97-AF65-F5344CB8AC3E}">
-        <p14:creationId xmlns:p14="http://schemas.microsoft.com/office/powerpoint/2010/main" val="2735044265"/>
-      </p:ext>
-    </p:extLst>
   </p:cSld>
   <p:clrMapOvr>
     <a:masterClrMapping/>
@@ -14282,13 +13397,7 @@
       </p:grpSpPr>
       <p:sp>
         <p:nvSpPr>
-          <p:cNvPr id="2" name="Title 1">
-            <a:extLst>
-              <a:ext uri="{FF2B5EF4-FFF2-40B4-BE49-F238E27FC236}">
-                <a16:creationId xmlns:a16="http://schemas.microsoft.com/office/drawing/2014/main" id="{48482CD1-B145-480E-8233-FDEC5AA7F71B}"/>
-              </a:ext>
-            </a:extLst>
-          </p:cNvPr>
+          <p:cNvPr id="2" name="Title 1"/>
           <p:cNvSpPr>
             <a:spLocks noGrp="1"/>
           </p:cNvSpPr>
@@ -14327,20 +13436,14 @@
       </p:sp>
       <p:pic>
         <p:nvPicPr>
-          <p:cNvPr id="4" name="Content Placeholder 3">
-            <a:extLst>
-              <a:ext uri="{FF2B5EF4-FFF2-40B4-BE49-F238E27FC236}">
-                <a16:creationId xmlns:a16="http://schemas.microsoft.com/office/drawing/2014/main" id="{B7C38B23-8B30-4EC3-B5CD-E6E502912802}"/>
-              </a:ext>
-            </a:extLst>
-          </p:cNvPr>
+          <p:cNvPr id="4" name="Content Placeholder 3"/>
           <p:cNvPicPr>
             <a:picLocks noChangeAspect="1"/>
           </p:cNvPicPr>
           <p:nvPr/>
         </p:nvPicPr>
         <p:blipFill>
-          <a:blip r:embed="rId2"/>
+          <a:blip r:embed="rId1"/>
           <a:stretch>
             <a:fillRect/>
           </a:stretch>
@@ -14357,13 +13460,7 @@
       </p:pic>
       <p:sp>
         <p:nvSpPr>
-          <p:cNvPr id="3" name="Content Placeholder 2">
-            <a:extLst>
-              <a:ext uri="{FF2B5EF4-FFF2-40B4-BE49-F238E27FC236}">
-                <a16:creationId xmlns:a16="http://schemas.microsoft.com/office/drawing/2014/main" id="{28AEC8AB-610C-41DA-81CB-478A26F98AF9}"/>
-              </a:ext>
-            </a:extLst>
-          </p:cNvPr>
+          <p:cNvPr id="3" name="Content Placeholder 2"/>
           <p:cNvSpPr>
             <a:spLocks noGrp="1"/>
           </p:cNvSpPr>
@@ -14527,11 +13624,6 @@
         </p:txBody>
       </p:sp>
     </p:spTree>
-    <p:extLst>
-      <p:ext uri="{BB962C8B-B14F-4D97-AF65-F5344CB8AC3E}">
-        <p14:creationId xmlns:p14="http://schemas.microsoft.com/office/powerpoint/2010/main" val="1965381647"/>
-      </p:ext>
-    </p:extLst>
   </p:cSld>
   <p:clrMapOvr>
     <a:masterClrMapping/>
@@ -14558,13 +13650,7 @@
       </p:grpSpPr>
       <p:sp>
         <p:nvSpPr>
-          <p:cNvPr id="2" name="Title 1">
-            <a:extLst>
-              <a:ext uri="{FF2B5EF4-FFF2-40B4-BE49-F238E27FC236}">
-                <a16:creationId xmlns:a16="http://schemas.microsoft.com/office/drawing/2014/main" id="{54AC24FE-973F-4B1E-BA89-BC6D2FC6B7CB}"/>
-              </a:ext>
-            </a:extLst>
-          </p:cNvPr>
+          <p:cNvPr id="2" name="Title 1"/>
           <p:cNvSpPr>
             <a:spLocks noGrp="1"/>
           </p:cNvSpPr>
@@ -14597,13 +13683,7 @@
       </p:sp>
       <p:sp>
         <p:nvSpPr>
-          <p:cNvPr id="3" name="Content Placeholder 2">
-            <a:extLst>
-              <a:ext uri="{FF2B5EF4-FFF2-40B4-BE49-F238E27FC236}">
-                <a16:creationId xmlns:a16="http://schemas.microsoft.com/office/drawing/2014/main" id="{3CBB4CC2-5F76-4C23-A965-B6EA78AABBCF}"/>
-              </a:ext>
-            </a:extLst>
-          </p:cNvPr>
+          <p:cNvPr id="3" name="Content Placeholder 2"/>
           <p:cNvSpPr>
             <a:spLocks noGrp="1"/>
           </p:cNvSpPr>
@@ -14678,11 +13758,6 @@
         </p:txBody>
       </p:sp>
     </p:spTree>
-    <p:extLst>
-      <p:ext uri="{BB962C8B-B14F-4D97-AF65-F5344CB8AC3E}">
-        <p14:creationId xmlns:p14="http://schemas.microsoft.com/office/powerpoint/2010/main" val="3019264826"/>
-      </p:ext>
-    </p:extLst>
   </p:cSld>
   <p:clrMapOvr>
     <a:masterClrMapping/>
@@ -14709,13 +13784,7 @@
       </p:grpSpPr>
       <p:sp>
         <p:nvSpPr>
-          <p:cNvPr id="2" name="Title 1">
-            <a:extLst>
-              <a:ext uri="{FF2B5EF4-FFF2-40B4-BE49-F238E27FC236}">
-                <a16:creationId xmlns:a16="http://schemas.microsoft.com/office/drawing/2014/main" id="{48482CD1-B145-480E-8233-FDEC5AA7F71B}"/>
-              </a:ext>
-            </a:extLst>
-          </p:cNvPr>
+          <p:cNvPr id="2" name="Title 1"/>
           <p:cNvSpPr>
             <a:spLocks noGrp="1"/>
           </p:cNvSpPr>
@@ -14754,20 +13823,14 @@
       </p:sp>
       <p:pic>
         <p:nvPicPr>
-          <p:cNvPr id="4" name="Content Placeholder 3">
-            <a:extLst>
-              <a:ext uri="{FF2B5EF4-FFF2-40B4-BE49-F238E27FC236}">
-                <a16:creationId xmlns:a16="http://schemas.microsoft.com/office/drawing/2014/main" id="{B7C38B23-8B30-4EC3-B5CD-E6E502912802}"/>
-              </a:ext>
-            </a:extLst>
-          </p:cNvPr>
+          <p:cNvPr id="4" name="Content Placeholder 3"/>
           <p:cNvPicPr>
             <a:picLocks noChangeAspect="1"/>
           </p:cNvPicPr>
           <p:nvPr/>
         </p:nvPicPr>
         <p:blipFill>
-          <a:blip r:embed="rId2"/>
+          <a:blip r:embed="rId1"/>
           <a:stretch>
             <a:fillRect/>
           </a:stretch>
@@ -14784,13 +13847,7 @@
       </p:pic>
       <p:sp>
         <p:nvSpPr>
-          <p:cNvPr id="3" name="Content Placeholder 2">
-            <a:extLst>
-              <a:ext uri="{FF2B5EF4-FFF2-40B4-BE49-F238E27FC236}">
-                <a16:creationId xmlns:a16="http://schemas.microsoft.com/office/drawing/2014/main" id="{28AEC8AB-610C-41DA-81CB-478A26F98AF9}"/>
-              </a:ext>
-            </a:extLst>
-          </p:cNvPr>
+          <p:cNvPr id="3" name="Content Placeholder 2"/>
           <p:cNvSpPr>
             <a:spLocks noGrp="1"/>
           </p:cNvSpPr>
@@ -14929,15 +13986,31 @@
               </a:rPr>
               <a:t>状态。</a:t>
             </a:r>
+            <a:endParaRPr lang="zh-CN" altLang="en-US" sz="1600" dirty="0">
+              <a:gradFill>
+                <a:gsLst>
+                  <a:gs pos="34000">
+                    <a:schemeClr val="tx1">
+                      <a:lumMod val="93000"/>
+                    </a:schemeClr>
+                  </a:gs>
+                  <a:gs pos="0">
+                    <a:schemeClr val="bg1">
+                      <a:lumMod val="25000"/>
+                      <a:lumOff val="75000"/>
+                    </a:schemeClr>
+                  </a:gs>
+                  <a:gs pos="100000">
+                    <a:schemeClr val="tx1"/>
+                  </a:gs>
+                </a:gsLst>
+                <a:lin ang="4800000" scaled="0"/>
+              </a:gradFill>
+            </a:endParaRPr>
           </a:p>
         </p:txBody>
       </p:sp>
     </p:spTree>
-    <p:extLst>
-      <p:ext uri="{BB962C8B-B14F-4D97-AF65-F5344CB8AC3E}">
-        <p14:creationId xmlns:p14="http://schemas.microsoft.com/office/powerpoint/2010/main" val="1119285080"/>
-      </p:ext>
-    </p:extLst>
   </p:cSld>
   <p:clrMapOvr>
     <a:masterClrMapping/>
@@ -15136,11 +14209,9 @@
       </a:bgFillStyleLst>
     </a:fmtScheme>
   </a:themeElements>
-  <a:objectDefaults/>
-  <a:extraClrSchemeLst/>
   <a:extLst>
     <a:ext uri="{05A4C25C-085E-4340-85A3-A5531E510DB2}">
-      <thm15:themeFamily xmlns:thm15="http://schemas.microsoft.com/office/thememl/2012/main" name="Depth" id="{7BEAFC2A-325C-49C4-AC08-2B765DA903F9}" vid="{1735E755-43E6-43AA-ABA2-C989ECC79AF5}"/>
+      <thm15:themeFamily xmlns:thm15="http://schemas.microsoft.com/office/thememl/2012/main" name="Office Theme" id="{62F939B6-93AF-4DB8-9C6B-D6C7DFDC589F}" vid="{4A3C46E8-61CC-4603-A589-7422A47A8E4A}"/>
     </a:ext>
   </a:extLst>
 </a:theme>
@@ -15424,8 +14495,11 @@
       </a:bgFillStyleLst>
     </a:fmtScheme>
   </a:themeElements>
-  <a:objectDefaults/>
-  <a:extraClrSchemeLst/>
+  <a:extLst>
+    <a:ext uri="{05A4C25C-085E-4340-85A3-A5531E510DB2}">
+      <thm15:themeFamily xmlns:thm15="http://schemas.microsoft.com/office/thememl/2012/main" name="Office Theme" id="{62F939B6-93AF-4DB8-9C6B-D6C7DFDC589F}" vid="{4A3C46E8-61CC-4603-A589-7422A47A8E4A}"/>
+    </a:ext>
+  </a:extLst>
 </a:theme>
 </file>
 
@@ -15560,33 +14634,18 @@
 
 <file path=customXml/itemProps1.xml><?xml version="1.0" encoding="utf-8"?>
 <ds:datastoreItem xmlns:ds="http://schemas.openxmlformats.org/officeDocument/2006/customXml" ds:itemID="{5C132C8A-B094-42C9-8FEB-6C14EB442EF6}">
-  <ds:schemaRefs>
-    <ds:schemaRef ds:uri="http://schemas.microsoft.com/office/2006/metadata/properties"/>
-    <ds:schemaRef ds:uri="http://schemas.microsoft.com/office/infopath/2007/PartnerControls"/>
-  </ds:schemaRefs>
+  <ds:schemaRefs/>
 </ds:datastoreItem>
 </file>
 
 <file path=customXml/itemProps2.xml><?xml version="1.0" encoding="utf-8"?>
 <ds:datastoreItem xmlns:ds="http://schemas.openxmlformats.org/officeDocument/2006/customXml" ds:itemID="{B59B624C-3232-4AA7-B231-042BE14D924C}">
-  <ds:schemaRefs>
-    <ds:schemaRef ds:uri="http://schemas.microsoft.com/sharepoint/v3/contenttype/forms"/>
-  </ds:schemaRefs>
+  <ds:schemaRefs/>
 </ds:datastoreItem>
 </file>
 
 <file path=customXml/itemProps3.xml><?xml version="1.0" encoding="utf-8"?>
 <ds:datastoreItem xmlns:ds="http://schemas.openxmlformats.org/officeDocument/2006/customXml" ds:itemID="{0FBAD3CE-F083-4C4D-9639-2A686804FC72}">
-  <ds:schemaRefs>
-    <ds:schemaRef ds:uri="http://schemas.microsoft.com/office/2006/metadata/contentType"/>
-    <ds:schemaRef ds:uri="http://schemas.microsoft.com/office/2006/metadata/properties/metaAttributes"/>
-    <ds:schemaRef ds:uri="http://www.w3.org/2001/XMLSchema"/>
-    <ds:schemaRef ds:uri="http://schemas.microsoft.com/office/2006/metadata/properties"/>
-    <ds:schemaRef ds:uri="http://schemas.openxmlformats.org/package/2006/metadata/core-properties"/>
-    <ds:schemaRef ds:uri="http://purl.org/dc/elements/1.1/"/>
-    <ds:schemaRef ds:uri="http://purl.org/dc/terms/"/>
-    <ds:schemaRef ds:uri="http://schemas.microsoft.com/internal/obd"/>
-    <ds:schemaRef ds:uri="http://schemas.microsoft.com/office/infopath/2007/PartnerControls"/>
-  </ds:schemaRefs>
+  <ds:schemaRefs/>
 </ds:datastoreItem>
 </file>